--- a/docs/Panduan Orang Tua Pizza Snack Play/Panduan Orang Tua Pizza Snack Play.pptx
+++ b/docs/Panduan Orang Tua Pizza Snack Play/Panduan Orang Tua Pizza Snack Play.pptx
@@ -5,7 +5,7 @@
     <p:sldMasterId id="2147483648" r:id="rId0"/>
   </p:sldMasterIdLst>
   <p:notesMasterIdLst>
-    <p:notesMasterId r:id="rId16"/>
+    <p:notesMasterId r:id="rId17"/>
   </p:notesMasterIdLst>
   <p:sldIdLst>
     <p:sldId id="256" r:id="rId1"/>
@@ -23,6 +23,7 @@
     <p:sldId id="268" r:id="rId13"/>
     <p:sldId id="269" r:id="rId14"/>
     <p:sldId id="270" r:id="rId15"/>
+    <p:sldId id="271" r:id="rId16"/>
   </p:sldIdLst>
   <p:sldSz cx="12192000" cy="6858000"/>
   <p:notesSz cx="6858000" cy="12192000"/>
@@ -558,7 +559,7 @@
   <p:cSld>
     <p:spTree>
       <p:nvGrpSpPr>
-        <p:cNvPr id="1" name=""/>
+        <p:cNvPr id="1" name="" descr="&lt;Slide&#13;&#10;    style={{&#13;&#10;        width: '1280px',&#13;&#10;        height: '720px',&#13;&#10;        background: '#FAF7F2',&#13;&#10;        flexDirection: 'row',&#13;&#10;        padding: 0,&#13;&#10;        position: 'relative',&#13;&#10;        overflow: 'hidden',&#13;&#10;    }}&#13;&#10;&gt;&#13;&#10;    {/* dekorasi latar — lingkaran besar semi-transparan */}&#13;&#10;    &lt;Box&#13;&#10;        style={{&#13;&#10;            position: 'absolute',&#13;&#10;            top: -140,&#13;&#10;            right: -120,&#13;&#10;            width: 520,&#13;&#10;            height: 520,&#13;&#10;            borderRadius: 260,&#13;&#10;            background: 'linear-gradient(135deg, #51277C 0%, #7A45A8 100%)',&#13;&#10;            opacity: 0.10,&#13;&#10;        }}&#13;&#10;    /&gt;&#13;&#10;    &lt;Box&#13;&#10;        style={{&#13;&#10;            position: 'absolute',&#13;&#10;            bottom: -90,&#13;&#10;            left: -80,&#13;&#10;            width: 360,&#13;&#10;            height: 360,&#13;&#10;            borderRadius: 180,&#13;&#10;            background: 'linear-gradient(135deg, #AFC440 0%, #F3B26C 100%)',&#13;&#10;            opacity: 0.14,&#13;&#10;        }}&#13;&#10;    /&gt;&#13;&#10;&#13;&#10;    {/* ── kolom kiri: judul ── */}&#13;&#10;    &lt;Box&#13;&#10;        style={{&#13;&#10;            position: 'relative',&#13;&#10;            zIndex: 1,&#13;&#10;            width: '56%',&#13;&#10;            paddingTop: 96,&#13;&#10;            paddingBottom: 96,&#13;&#10;            paddingLeft: 64,&#13;&#10;            paddingRight: 32,&#13;&#10;            justifyContent: 'center',&#13;&#10;        }}&#13;&#10;    &gt;&#13;&#10;        &lt;Box&#13;&#10;            style={{&#13;&#10;                flexDirection: 'row',&#13;&#10;                alignItems: 'center',&#13;&#10;                gap: 10,&#13;&#10;                alignSelf: 'flex-start',&#13;&#10;                background: '#51277C',&#13;&#10;                borderRadius: 999,&#13;&#10;                paddingTop: 9,&#13;&#10;                paddingBottom: 9,&#13;&#10;                paddingLeft: 20,&#13;&#10;                paddingRight: 22,&#13;&#10;            }}&#13;&#10;        &gt;&#13;&#10;            &lt;svg width={20} height={20} viewBox=&quot;0 0 640 512&quot; xmlns=&quot;http://www.w3.org/2000/svg&quot;&gt;&lt;path fill=&quot;#F3B26C&quot; d=&quot;M144 0a80 80 0 1 1 0 160A80 80 0 1 1 144 0zM512 0a80 80 0 1 1 0 160A80 80 0 1 1 512 0zM0 298.7C0 239.8 47.8 192 106.7 192h42.7c15.9 0 31 3.5 44.6 9.7c-1.3 7.2-1.9 14.7-1.9 22.3c0 38.2 16.8 72.5 43.3 96c-.2 0-.4 0-.7 0H21.3C9.6 320 0 310.4 0 298.7zM405.3 320c-.2 0-.4 0-.7 0c26.6-23.5 43.3-57.8 43.3-96c0-7.6-.7-15-1.9-22.3c13.6-6.3 28.7-9.7 44.6-9.7h42.7C592.2 192 640 239.8 640 298.7c0 11.8-9.6 21.3-21.3 21.3H405.3zM224 224a96 96 0 1 1 192 0 96 96 0 1 1 -192 0zM128 485.3C128 411.7 187.7 352 261.3 352H378.7C452.3 352 512 411.7 512 485.3c0 14.7-11.9 26.7-26.7 26.7H154.7c-14.7 0-26.7-11.9-26.7-26.7z&quot; /&gt;&lt;/svg&gt;&#13;&#10;            &lt;Text style={{ fontSize: 17, color: '#FFFFFF', fontFamily: 'Verdana', fontWeight: 'bold' }}&gt;&#13;&#10;                Panduan Orang Tua Murid&#13;&#10;            &lt;/Text&gt;&#13;&#10;        &lt;/Box&gt;&#13;&#10;&#13;&#10;        &lt;Text&#13;&#10;            style={{&#13;&#10;                marginTop: 26,&#13;&#10;                fontSize: 66,&#13;&#10;                fontWeight: 'bold',&#13;&#10;                color: '#51277C',&#13;&#10;                fontFamily: 'Trebuchet MS',&#13;&#10;                lineHeight: 1.15,&#13;&#10;            }}&#13;&#10;        &gt;&#13;&#10;            Pizza Snack Play&#13;&#10;        &lt;/Text&gt;&#13;&#10;&#13;&#10;        &lt;Box style={{ marginTop: 18, width: 96, height: 7, borderRadius: 4, background: '#AFC440' }} /&gt;&#13;&#10;&#13;&#10;        &lt;Text&#13;&#10;            style={{&#13;&#10;                marginTop: 26,&#13;&#10;                fontSize: 23,&#13;&#10;                color: '#2A2333',&#13;&#10;                fontFamily: 'Verdana',&#13;&#10;                lineHeight: 1.55,&#13;&#10;            }}&#13;&#10;        &gt;&#13;&#10;            Jadwal snack anak, giliran piket, dan menu hari ini —&#13;&#10;            &lt;span style={{ fontWeight: 'bold', color: '#51277C' }}&gt; semuanya langsung kelihatan di HP&lt;/span&gt;&#13;&#10;            {' '}Bapak dan Ibu.&#13;&#10;        &lt;/Text&gt;&#13;&#10;&#13;&#10;        &lt;Text&#13;&#10;            style={{&#13;&#10;                marginTop: 22,&#13;&#10;                fontSize: 19,&#13;&#10;                color: '#6B6478',&#13;&#10;                fontFamily: 'Verdana',&#13;&#10;                lineHeight: 1.5,&#13;&#10;            }}&#13;&#10;        &gt;&#13;&#10;            Tidak perlu lagi tanya-tanya ke grup.&#13;&#10;        &lt;/Text&gt;&#13;&#10;    &lt;/Box&gt;&#13;&#10;&#13;&#10;    {/* ── kolom kanan: logo + ilustrasi ── */}&#13;&#10;    &lt;Box&#13;&#10;        style={{&#13;&#10;            position: 'relative',&#13;&#10;            zIndex: 1,&#13;&#10;            width: '44%',&#13;&#10;            justifyContent: 'center',&#13;&#10;            alignItems: 'center',&#13;&#10;        }}&#13;&#10;    &gt;&#13;&#10;        &lt;Image&#13;&#10;            src=&quot;assets/app_logo.png&quot;&#13;&#10;            style={{ width: 400, height: 388, objectFit: 'contain' }}&#13;&#10;        /&gt;&#13;&#10;&#13;&#10;        &lt;Box&#13;&#10;            style={{&#13;&#10;                marginTop: 18,&#13;&#10;                flexDirection: 'row',&#13;&#10;                alignItems: 'center',&#13;&#10;                gap: 12,&#13;&#10;                background: 'rgba(81,39,124,0.07)',&#13;&#10;                borderRadius: 14,&#13;&#10;                paddingTop: 12,&#13;&#10;                paddingBottom: 12,&#13;&#10;                paddingLeft: 22,&#13;&#10;                paddingRight: 22,&#13;&#10;            }}&#13;&#10;        &gt;&#13;&#10;            &lt;svg width={34} height={34} viewBox='0 0 24 24'&gt;&#13;&#10;                &lt;path&#13;&#10;                    d='M7 2v3M17 2v3M3 9h18M5 5h14a2 2 0 0 1 2 2v12a2 2 0 0 1-2 2H5a2 2 0 0 1-2-2V7a2 2 0 0 1 2-2z'&#13;&#10;                    fill='none'&#13;&#10;                    stroke='#51277C'&#13;&#10;                    strokeWidth='2'&#13;&#10;                    strokeLinecap='round'&#13;&#10;                /&gt;&#13;&#10;            &lt;/svg&gt;&#13;&#10;            &lt;Text style={{ fontSize: 18, color: '#51277C', fontFamily: 'Verdana', fontWeight: 'bold' }}&gt;&#13;&#10;                Senin sampai Jumat&#13;&#10;            &lt;/Text&gt;&#13;&#10;        &lt;/Box&gt;&#13;&#10;    &lt;/Box&gt;&#13;&#10;&lt;/Slide&gt;&#13;&#10;"/>
         <p:cNvGrpSpPr/>
         <p:nvPr/>
       </p:nvGrpSpPr>
@@ -591,10 +592,7 @@
         </p:spPr>
         <p:txBody>
           <a:bodyPr/>
-          <a:p>
-            <a:pPr/>
-            <a:endParaRPr/>
-          </a:p>
+          <a:p/>
         </p:txBody>
       </p:sp>
       <p:sp>
@@ -961,10 +959,7 @@
         </p:spPr>
         <p:txBody>
           <a:bodyPr/>
-          <a:p>
-            <a:pPr/>
-            <a:endParaRPr/>
-          </a:p>
+          <a:p/>
         </p:txBody>
       </p:sp>
       <p:sp>
@@ -1028,10 +1023,7 @@
         </p:spPr>
         <p:txBody>
           <a:bodyPr/>
-          <a:p>
-            <a:pPr/>
-            <a:endParaRPr/>
-          </a:p>
+          <a:p/>
         </p:txBody>
       </p:sp>
       <p:sp>
@@ -1057,10 +1049,7 @@
         </p:spPr>
         <p:txBody>
           <a:bodyPr/>
-          <a:p>
-            <a:pPr/>
-            <a:endParaRPr/>
-          </a:p>
+          <a:p/>
         </p:txBody>
       </p:sp>
       <p:pic>
@@ -1072,7 +1061,7 @@
           <p:nvPr/>
         </p:nvPicPr>
         <p:blipFill>
-          <a:blip r:embed="rId1">
+          <a:blip>
             <a:extLst>
               <a:ext uri="{96DAC541-7B7A-43D3-8B79-37D633B846F1}">
                 <asvg:svgBlip r:embed="rId1"/>
@@ -1187,10 +1176,7 @@
         </p:spPr>
         <p:txBody>
           <a:bodyPr/>
-          <a:p>
-            <a:pPr/>
-            <a:endParaRPr/>
-          </a:p>
+          <a:p/>
         </p:txBody>
       </p:sp>
       <p:sp>
@@ -1346,10 +1332,7 @@
         </p:spPr>
         <p:txBody>
           <a:bodyPr/>
-          <a:p>
-            <a:pPr/>
-            <a:endParaRPr/>
-          </a:p>
+          <a:p/>
         </p:txBody>
       </p:sp>
       <p:pic>
@@ -1361,7 +1344,7 @@
           <p:nvPr/>
         </p:nvPicPr>
         <p:blipFill>
-          <a:blip r:embed="rId3">
+          <a:blip>
             <a:extLst>
               <a:ext uri="{96DAC541-7B7A-43D3-8B79-37D633B846F1}">
                 <asvg:svgBlip r:embed="rId3"/>
@@ -1428,7 +1411,7 @@
   <p:cSld>
     <p:spTree>
       <p:nvGrpSpPr>
-        <p:cNvPr id="16" name="" descr="&lt;Slide&#13;&#10;    style={{&#13;&#10;        width: '1280px',&#13;&#10;        height: '720px',&#13;&#10;        background: '#FAF7F2',&#13;&#10;        paddingTop: 20,&#13;&#10;        paddingBottom: 20,&#13;&#10;        paddingLeft: 64,&#13;&#10;        paddingRight: 64,&#13;&#10;    }}&#13;&#10;&gt;&#13;&#10;    {/* ── A · blok judul ── */}&#13;&#10;    &lt;Box style={{ height: 110, justifyContent: 'center' }}&gt;&#13;&#10;        &lt;Text&#13;&#10;            style={{&#13;&#10;                fontSize: 34,&#13;&#10;                fontWeight: 'bold',&#13;&#10;                color: '#51277C',&#13;&#10;                fontFamily: 'Trebuchet MS',&#13;&#10;                lineHeight: 1.3,&#13;&#10;            }}&#13;&#10;        &gt;&#13;&#10;            Lihat jadwal snack&#13;&#10;        &lt;/Text&gt;&#13;&#10;        &lt;Box style={{ marginTop: 10, width: 72, height: 6, borderRadius: 3, background: '#51277C' }} /&gt;&#13;&#10;    &lt;/Box&gt;&#13;&#10;&#13;&#10;    {/* ── B · area konten ── */}&#13;&#10;    &lt;Box style={{ height: 530 }}&gt;&#13;&#10;        {/* atas 64% · ilustrasi jadwal sepekan */}&#13;&#10;        &lt;Box&#13;&#10;            style={{&#13;&#10;                height: 340,&#13;&#10;                background: 'rgba(81,39,124,0.06)',&#13;&#10;                borderRadius: 20,&#13;&#10;                justifyContent: 'center',&#13;&#10;                alignItems: 'center',&#13;&#10;            }}&#13;&#10;        &gt;&#13;&#10;            &lt;svg width={1100} height={300} viewBox='0 0 1100 300'&gt;&#13;&#10;                {/* Senin */}&#13;&#10;                &lt;rect x='6' y='8' width='208' height='284' rx='16' fill='#FFFFFF' stroke='#E6DFD2' strokeWidth='2' /&gt;&#13;&#10;                &lt;rect x='6' y='8' width='208' height='58' rx='16' fill='#EFEAE1' /&gt;&#13;&#10;                &lt;rect x='6' y='44' width='208' height='22' fill='#EFEAE1' /&gt;&#13;&#10;                &lt;text x='110' y='46' fontFamily='Trebuchet MS' fontSize='24' fontWeight='bold' fill='#51277C' textAnchor='middle'&gt;&#13;&#10;                    Senin&#13;&#10;                &lt;/text&gt;&#13;&#10;                &lt;rect x='28' y='92' width='164' height='16' rx='8' fill='#DED7CB' /&gt;&#13;&#10;                &lt;rect x='28' y='124' width='128' height='14' rx='7' fill='#EDE8DF' /&gt;&#13;&#10;                &lt;rect x='28' y='158' width='72' height='28' rx='14' fill='#AFC440' /&gt;&#13;&#10;                &lt;text x='64' y='178' fontFamily='Verdana' fontSize='15' fill='#3F4718' textAnchor='middle'&gt;&#13;&#10;                    Jeruk&#13;&#10;                &lt;/text&gt;&#13;&#10;                &lt;rect x='28' y='214' width='164' height='1' fill='#EFEAE1' /&gt;&#13;&#10;                &lt;circle cx='44' cy='240' r='12' fill='#DED7CB' /&gt;&#13;&#10;                &lt;rect x='64' y='233' width='104' height='12' rx='6' fill='#EDE8DF' /&gt;&#13;&#10;&#13;&#10;                {/* Selasa */}&#13;&#10;                &lt;rect x='226' y='8' width='208' height='284' rx='16' fill='#FFFFFF' stroke='#E6DFD2' strokeWidth='2' /&gt;&#13;&#10;                &lt;rect x='226' y='8' width='208' height='58' rx='16' fill='#EFEAE1' /&gt;&#13;&#10;                &lt;rect x='226' y='44' width='208' height='22' fill='#EFEAE1' /&gt;&#13;&#10;                &lt;text x='330' y='46' fontFamily='Trebuchet MS' fontSize='24' fontWeight='bold' fill='#51277C' textAnchor='middle'&gt;&#13;&#10;                    Selasa&#13;&#10;                &lt;/text&gt;&#13;&#10;                &lt;rect x='248' y='92' width='164' height='16' rx='8' fill='#DED7CB' /&gt;&#13;&#10;                &lt;rect x='248' y='124' width='112' height='14' rx='7' fill='#EDE8DF' /&gt;&#13;&#10;                &lt;rect x='248' y='158' width='72' height='28' rx='14' fill='#AFC440' /&gt;&#13;&#10;                &lt;text x='284' y='178' fontFamily='Verdana' fontSize='15' fill='#3F4718' textAnchor='middle'&gt;&#13;&#10;                    Pisang&#13;&#10;                &lt;/text&gt;&#13;&#10;                &lt;rect x='248' y='214' width='164' height='1' fill='#EFEAE1' /&gt;&#13;&#10;                &lt;circle cx='264' cy='240' r='12' fill='#DED7CB' /&gt;&#13;&#10;                &lt;rect x='284' y='233' width='96' height='12' rx='6' fill='#EDE8DF' /&gt;&#13;&#10;&#13;&#10;                {/* Rabu — hari ini, disorot */}&#13;&#10;                &lt;rect x='446' y='0' width='208' height='300' rx='16' fill='#FFFFFF' stroke='#F3B26C' strokeWidth='5' /&gt;&#13;&#10;                &lt;rect x='446' y='0' width='208' height='62' rx='16' fill='#51277C' /&gt;&#13;&#10;                &lt;rect x='446' y='40' width='208' height='22' fill='#51277C' /&gt;&#13;&#10;                &lt;text x='550' y='42' fontFamily='Trebuchet MS' fontSize='24' fontWeight='bold' fill='#FFFFFF' textAnchor='middle'&gt;&#13;&#10;                    Rabu&#13;&#10;                &lt;/text&gt;&#13;&#10;                &lt;rect x='468' y='92' width='164' height='16' rx='8' fill='#51277C' opacity='0.65' /&gt;&#13;&#10;                &lt;rect x='468' y='124' width='136' height='14' rx='7' fill='#EDE8DF' /&gt;&#13;&#10;                &lt;rect x='468' y='158' width='92' height='28' rx='14' fill='#F3B26C' /&gt;&#13;&#10;                &lt;text x='514' y='178' fontFamily='Verdana' fontSize='15' fill='#51277C' textAnchor='middle'&gt;&#13;&#10;                    Semangka&#13;&#10;                &lt;/text&gt;&#13;&#10;                &lt;rect x='468' y='214' width='164' height='1' fill='#EFEAE1' /&gt;&#13;&#10;                &lt;circle cx='484' cy='240' r='12' fill='#51277C' opacity='0.25' /&gt;&#13;&#10;                &lt;rect x='504' y='233' width='118' height='12' rx='6' fill='#DED7CB' /&gt;&#13;&#10;                &lt;circle cx='654' cy='16' r='13' fill='#F3B26C' /&gt;&#13;&#10;                &lt;text x='654' y='22' fontFamily='Verdana' fontSize='13' fontWeight='bold' fill='#51277C' textAnchor='middle'&gt;&#13;&#10;                    !&#13;&#10;                &lt;/text&gt;&#13;&#10;&#13;&#10;                {/* Kamis */}&#13;&#10;                &lt;rect x='666' y='8' width='208' height='284' rx='16' fill='#FFFFFF' stroke='#E6DFD2' strokeWidth='2' /&gt;&#13;&#10;                &lt;rect x='666' y='8' width='208' height='58' rx='16' fill='#EFEAE1' /&gt;&#13;&#10;                &lt;rect x='666' y='44' width='208' height='22' fill='#EFEAE1' /&gt;&#13;&#10;                &lt;text x='770' y='46' fontFamily='Trebuchet MS' fontSize='24' fontWeight='bold' fill='#51277C' textAnchor='middle'&gt;&#13;&#10;                    Kamis&#13;&#10;                &lt;/text&gt;&#13;&#10;                &lt;rect x='688' y='92' width='164' height='16' rx='8' fill='#DED7CB' /&gt;&#13;&#10;                &lt;rect x='688' y='124' width='120' height='14' rx='7' fill='#EDE8DF' /&gt;&#13;&#10;                &lt;rect x='688' y='158' width='64' height='28' rx='14' fill='#AFC440' /&gt;&#13;&#10;                &lt;text x='720' y='178' fontFamily='Verdana' fontSize='15' fill='#3F4718' textAnchor='middle'&gt;&#13;&#10;                    Apel&#13;&#10;                &lt;/text&gt;&#13;&#10;                &lt;rect x='688' y='214' width='164' height='1' fill='#EFEAE1' /&gt;&#13;&#10;                &lt;circle cx='704' cy='240' r='12' fill='#DED7CB' /&gt;&#13;&#10;                &lt;rect x='724' y='233' width='88' height='12' rx='6' fill='#EDE8DF' /&gt;&#13;&#10;&#13;&#10;                {/* Jumat */}&#13;&#10;                &lt;rect x='886' y='8' width='208' height='284' rx='16' fill='#FFFFFF' stroke='#E6DFD2' strokeWidth='2' /&gt;&#13;&#10;                &lt;rect x='886' y='8' width='208' height='58' rx='16' fill='#EFEAE1' /&gt;&#13;&#10;                &lt;rect x='886' y='44' width='208' height='22' fill='#EFEAE1' /&gt;&#13;&#10;                &lt;text x='990' y='46' fontFamily='Trebuchet MS' fontSize='24' fontWeight='bold' fill='#51277C' textAnchor='middle'&gt;&#13;&#10;                    Jumat&#13;&#10;                &lt;/text&gt;&#13;&#10;                &lt;rect x='908' y='92' width='164' height='16' rx='8' fill='#DED7CB' /&gt;&#13;&#10;                &lt;rect x='908' y='124' width='132' height='14' rx='7' fill='#EDE8DF' /&gt;&#13;&#10;                &lt;rect x='908' y='158' width='70' height='28' rx='14' fill='#AFC440' /&gt;&#13;&#10;                &lt;text x='943' y='178' fontFamily='Verdana' fontSize='15' fill='#3F4718' textAnchor='middle'&gt;&#13;&#10;                    Melon&#13;&#10;                &lt;/text&gt;&#13;&#10;                &lt;rect x='908' y='214' width='164' height='1' fill='#EFEAE1' /&gt;&#13;&#10;                &lt;circle cx='924' cy='240' r='12' fill='#DED7CB' /&gt;&#13;&#10;                &lt;rect x='944' y='233' width='106' height='12' rx='6' fill='#EDE8DF' /&gt;&#13;&#10;            &lt;/svg&gt;&#13;&#10;        &lt;/Box&gt;&#13;&#10;&#13;&#10;        {/* bawah · dua kartu 60:40 */}&#13;&#10;        &lt;Box style={{ marginTop: 18, height: 172, flexDirection: 'row', gap: 24 }}&gt;&#13;&#10;            &lt;Box&#13;&#10;                style={{&#13;&#10;                    width: '60%',&#13;&#10;                    background: '#FFFFFF',&#13;&#10;                    borderRadius: 16,&#13;&#10;                    boxShadow: '0 4px 20px rgba(0,0,0,0.08)',&#13;&#10;                    padding: 24,&#13;&#10;                    borderLeft: '8px solid #F3B26C',&#13;&#10;                }}&#13;&#10;            &gt;&#13;&#10;                &lt;Text&#13;&#10;                    style={{&#13;&#10;                        fontSize: 26,&#13;&#10;                        fontWeight: 'bold',&#13;&#10;                        color: '#51277C',&#13;&#10;                        fontFamily: 'Trebuchet MS',&#13;&#10;                    }}&#13;&#10;                &gt;&#13;&#10;                    Hari ini &amp;amp; minggu ini&#13;&#10;                &lt;/Text&gt;&#13;&#10;                &lt;Text&#13;&#10;                    style={{&#13;&#10;                        marginTop: 10,&#13;&#10;                        fontSize: 19,&#13;&#10;                        color: '#6B6478',&#13;&#10;                        fontFamily: 'Verdana',&#13;&#10;                        lineHeight: 1.5,&#13;&#10;                    }}&#13;&#10;                &gt;&#13;&#10;                    Makanan dan buahnya langsung kelihatan, berikut nama anak yang piket hari itu. Hari berjalan ditandai.&#13;&#10;                &lt;/Text&gt;&#13;&#10;            &lt;/Box&gt;&#13;&#10;&#13;&#10;            &lt;Box&#13;&#10;                style={{&#13;&#10;                    width: '40%',&#13;&#10;                    background: '#FFFFFF',&#13;&#10;                    borderRadius: 16,&#13;&#10;                    boxShadow: '0 4px 20px rgba(0,0,0,0.08)',&#13;&#10;                    padding: 24,&#13;&#10;                    borderLeft: '8px solid #AFC440',&#13;&#10;                }}&#13;&#10;            &gt;&#13;&#10;                &lt;Text&#13;&#10;                    style={{&#13;&#10;                        fontSize: 26,&#13;&#10;                        fontWeight: 'bold',&#13;&#10;                        color: '#51277C',&#13;&#10;                        fontFamily: 'Trebuchet MS',&#13;&#10;                    }}&#13;&#10;                &gt;&#13;&#10;                    Bulan ini&#13;&#10;                &lt;/Text&gt;&#13;&#10;                &lt;Text&#13;&#10;                    style={{&#13;&#10;                        marginTop: 10,&#13;&#10;                        fontSize: 19,&#13;&#10;                        color: '#6B6478',&#13;&#10;                        fontFamily: 'Verdana',&#13;&#10;                        lineHeight: 1.5,&#13;&#10;                    }}&#13;&#10;                &gt;&#13;&#10;                    Kalender penuh satu bulan — bisa melihat jadwal jauh hari sebelumnya.&#13;&#10;                &lt;/Text&gt;&#13;&#10;            &lt;/Box&gt;&#13;&#10;        &lt;/Box&gt;&#13;&#10;    &lt;/Box&gt;&#13;&#10;&#13;&#10;    {/* ── C · bilah kaki ── */}&#13;&#10;    &lt;Box&#13;&#10;        style={{&#13;&#10;            height: 40,&#13;&#10;            flexDirection: 'row',&#13;&#10;            alignItems: 'center',&#13;&#10;            justifyContent: 'space-between',&#13;&#10;        }}&#13;&#10;    &gt;&#13;&#10;        &lt;Text style={{ fontSize: 14, color: '#6B6478', fontFamily: 'Verdana' }}&gt;&#13;&#10;            Pizza Snack Play · Panduan Orang Tua&#13;&#10;        &lt;/Text&gt;&#13;&#10;        &lt;Text style={{ fontSize: 14, color: '#6B6478', fontFamily: 'Verdana' }}&gt;10 / 15&lt;/Text&gt;&#13;&#10;    &lt;/Box&gt;&#13;&#10;&lt;/Slide&gt;&#13;&#10;"/>
+        <p:cNvPr id="16" name="" descr="&lt;Slide&#10;    style={{&#10;        width: '1280px',&#10;        height: '720px',&#10;        background: '#FAF7F2',&#10;        paddingTop: 20,&#10;        paddingBottom: 20,&#10;        paddingLeft: 64,&#10;        paddingRight: 64,&#10;    }}&#10;&gt;&#10;    {/* ── A · blok judul ── */}&#10;    &lt;Box style={{ height: 110, justifyContent: 'center' }}&gt;&#10;        &lt;Text&#10;            style={{&#10;                fontSize: 34,&#10;                fontWeight: 'bold',&#10;                color: '#51277C',&#10;                fontFamily: 'Trebuchet MS',&#10;                lineHeight: 1.3,&#10;            }}&#10;        &gt;&#10;            Lihat jadwal snack&#10;        &lt;/Text&gt;&#10;        &lt;Box style={{ marginTop: 10, width: 72, height: 6, borderRadius: 3, background: '#51277C' }} /&gt;&#10;    &lt;/Box&gt;&#10;&#10;    {/* ── B · area konten ── */}&#10;    &lt;Box style={{ height: 530 }}&gt;&#10;        {/* atas 64% · ilustrasi jadwal sepekan */}&#10;        &lt;Box&#10;            style={{&#10;                height: 340,&#10;                background: 'rgba(81,39,124,0.06)',&#10;                borderRadius: 20,&#10;                justifyContent: 'center',&#10;                alignItems: 'center',&#10;            }}&#10;        &gt;&#10;            &lt;svg width={1100} height={300} viewBox='0 0 1100 300'&gt;&#10;                {/* Senin */}&#10;                &lt;rect x='6' y='8' width='208' height='284' rx='16' fill='#FFFFFF' stroke='#E6DFD2' strokeWidth='2' /&gt;&#10;                &lt;rect x='6' y='8' width='208' height='58' rx='16' fill='#EFEAE1' /&gt;&#10;                &lt;rect x='6' y='44' width='208' height='22' fill='#EFEAE1' /&gt;&#10;                &lt;text x='110' y='46' fontFamily='Trebuchet MS' fontSize='24' fontWeight='bold' fill='#51277C' textAnchor='middle'&gt;&#10;                    Senin&#10;                &lt;/text&gt;&#10;                &lt;rect x='28' y='92' width='164' height='16' rx='8' fill='#DED7CB' /&gt;&#10;                &lt;rect x='28' y='124' width='128' height='14' rx='7' fill='#EDE8DF' /&gt;&#10;                &lt;rect x='28' y='158' width='72' height='28' rx='14' fill='#AFC440' /&gt;&#10;                &lt;text x='64' y='178' fontFamily='Verdana' fontSize='15' fill='#3F4718' textAnchor='middle'&gt;&#10;                    Jeruk&#10;                &lt;/text&gt;&#10;                &lt;rect x='28' y='214' width='164' height='1' fill='#EFEAE1' /&gt;&#10;                &lt;circle cx='44' cy='240' r='12' fill='#DED7CB' /&gt;&#10;                &lt;rect x='64' y='233' width='104' height='12' rx='6' fill='#EDE8DF' /&gt;&#10;&#10;                {/* Selasa */}&#10;                &lt;rect x='226' y='8' width='208' height='284' rx='16' fill='#FFFFFF' stroke='#E6DFD2' strokeWidth='2' /&gt;&#10;                &lt;rect x='226' y='8' width='208' height='58' rx='16' fill='#EFEAE1' /&gt;&#10;                &lt;rect x='226' y='44' width='208' height='22' fill='#EFEAE1' /&gt;&#10;                &lt;text x='330' y='46' fontFamily='Trebuchet MS' fontSize='24' fontWeight='bold' fill='#51277C' textAnchor='middle'&gt;&#10;                    Selasa&#10;                &lt;/text&gt;&#10;                &lt;rect x='248' y='92' width='164' height='16' rx='8' fill='#DED7CB' /&gt;&#10;                &lt;rect x='248' y='124' width='112' height='14' rx='7' fill='#EDE8DF' /&gt;&#10;                &lt;rect x='248' y='158' width='72' height='28' rx='14' fill='#AFC440' /&gt;&#10;                &lt;text x='284' y='178' fontFamily='Verdana' fontSize='15' fill='#3F4718' textAnchor='middle'&gt;&#10;                    Pisang&#10;                &lt;/text&gt;&#10;                &lt;rect x='248' y='214' width='164' height='1' fill='#EFEAE1' /&gt;&#10;                &lt;circle cx='264' cy='240' r='12' fill='#DED7CB' /&gt;&#10;                &lt;rect x='284' y='233' width='96' height='12' rx='6' fill='#EDE8DF' /&gt;&#10;&#10;                {/* Rabu — hari ini, disorot */}&#10;                &lt;rect x='446' y='0' width='208' height='300' rx='16' fill='#FFFFFF' stroke='#F3B26C' strokeWidth='5' /&gt;&#10;                &lt;rect x='446' y='0' width='208' height='62' rx='16' fill='#51277C' /&gt;&#10;                &lt;rect x='446' y='40' width='208' height='22' fill='#51277C' /&gt;&#10;                &lt;text x='550' y='42' fontFamily='Trebuchet MS' fontSize='24' fontWeight='bold' fill='#FFFFFF' textAnchor='middle'&gt;&#10;                    Rabu&#10;                &lt;/text&gt;&#10;                &lt;rect x='468' y='92' width='164' height='16' rx='8' fill='#51277C' opacity='0.65' /&gt;&#10;                &lt;rect x='468' y='124' width='136' height='14' rx='7' fill='#EDE8DF' /&gt;&#10;                &lt;rect x='468' y='158' width='92' height='28' rx='14' fill='#F3B26C' /&gt;&#10;                &lt;text x='514' y='178' fontFamily='Verdana' fontSize='15' fill='#51277C' textAnchor='middle'&gt;&#10;                    Semangka&#10;                &lt;/text&gt;&#10;                &lt;rect x='468' y='214' width='164' height='1' fill='#EFEAE1' /&gt;&#10;                &lt;circle cx='484' cy='240' r='12' fill='#51277C' opacity='0.25' /&gt;&#10;                &lt;rect x='504' y='233' width='118' height='12' rx='6' fill='#DED7CB' /&gt;&#10;                &lt;circle cx='654' cy='16' r='13' fill='#F3B26C' /&gt;&#10;                &lt;text x='654' y='22' fontFamily='Verdana' fontSize='13' fontWeight='bold' fill='#51277C' textAnchor='middle'&gt;&#10;                    !&#10;                &lt;/text&gt;&#10;&#10;                {/* Kamis */}&#10;                &lt;rect x='666' y='8' width='208' height='284' rx='16' fill='#FFFFFF' stroke='#E6DFD2' strokeWidth='2' /&gt;&#10;                &lt;rect x='666' y='8' width='208' height='58' rx='16' fill='#EFEAE1' /&gt;&#10;                &lt;rect x='666' y='44' width='208' height='22' fill='#EFEAE1' /&gt;&#10;                &lt;text x='770' y='46' fontFamily='Trebuchet MS' fontSize='24' fontWeight='bold' fill='#51277C' textAnchor='middle'&gt;&#10;                    Kamis&#10;                &lt;/text&gt;&#10;                &lt;rect x='688' y='92' width='164' height='16' rx='8' fill='#DED7CB' /&gt;&#10;                &lt;rect x='688' y='124' width='120' height='14' rx='7' fill='#EDE8DF' /&gt;&#10;                &lt;rect x='688' y='158' width='64' height='28' rx='14' fill='#AFC440' /&gt;&#10;                &lt;text x='720' y='178' fontFamily='Verdana' fontSize='15' fill='#3F4718' textAnchor='middle'&gt;&#10;                    Apel&#10;                &lt;/text&gt;&#10;                &lt;rect x='688' y='214' width='164' height='1' fill='#EFEAE1' /&gt;&#10;                &lt;circle cx='704' cy='240' r='12' fill='#DED7CB' /&gt;&#10;                &lt;rect x='724' y='233' width='88' height='12' rx='6' fill='#EDE8DF' /&gt;&#10;&#10;                {/* Jumat */}&#10;                &lt;rect x='886' y='8' width='208' height='284' rx='16' fill='#FFFFFF' stroke='#E6DFD2' strokeWidth='2' /&gt;&#10;                &lt;rect x='886' y='8' width='208' height='58' rx='16' fill='#EFEAE1' /&gt;&#10;                &lt;rect x='886' y='44' width='208' height='22' fill='#EFEAE1' /&gt;&#10;                &lt;text x='990' y='46' fontFamily='Trebuchet MS' fontSize='24' fontWeight='bold' fill='#51277C' textAnchor='middle'&gt;&#10;                    Jumat&#10;                &lt;/text&gt;&#10;                &lt;rect x='908' y='92' width='164' height='16' rx='8' fill='#DED7CB' /&gt;&#10;                &lt;rect x='908' y='124' width='132' height='14' rx='7' fill='#EDE8DF' /&gt;&#10;                &lt;rect x='908' y='158' width='70' height='28' rx='14' fill='#AFC440' /&gt;&#10;                &lt;text x='943' y='178' fontFamily='Verdana' fontSize='15' fill='#3F4718' textAnchor='middle'&gt;&#10;                    Melon&#10;                &lt;/text&gt;&#10;                &lt;rect x='908' y='214' width='164' height='1' fill='#EFEAE1' /&gt;&#10;                &lt;circle cx='924' cy='240' r='12' fill='#DED7CB' /&gt;&#10;                &lt;rect x='944' y='233' width='106' height='12' rx='6' fill='#EDE8DF' /&gt;&#10;            &lt;/svg&gt;&#10;        &lt;/Box&gt;&#10;&#10;        {/* bawah · dua kartu 60:40 */}&#10;        &lt;Box style={{ marginTop: 18, height: 172, flexDirection: 'row', gap: 24 }}&gt;&#10;            &lt;Box&#10;                style={{&#10;                    width: '60%',&#10;                    background: '#FFFFFF',&#10;                    borderRadius: 16,&#10;                    boxShadow: '0 4px 20px rgba(0,0,0,0.08)',&#10;                    padding: 24,&#10;                    borderLeft: '8px solid #F3B26C',&#10;                }}&#10;            &gt;&#10;                &lt;Text&#10;                    style={{&#10;                        fontSize: 26,&#10;                        fontWeight: 'bold',&#10;                        color: '#51277C',&#10;                        fontFamily: 'Trebuchet MS',&#10;                    }}&#10;                &gt;&#10;                    Hari ini &amp;amp; minggu ini&#10;                &lt;/Text&gt;&#10;                &lt;Text&#10;                    style={{&#10;                        marginTop: 10,&#10;                        fontSize: 19,&#10;                        color: '#6B6478',&#10;                        fontFamily: 'Verdana',&#10;                        lineHeight: 1.5,&#10;                    }}&#10;                &gt;&#10;                    Makanan dan buahnya langsung kelihatan, berikut nama anak yang piket hari itu. Hari berjalan ditandai.&#10;                &lt;/Text&gt;&#10;            &lt;/Box&gt;&#10;&#10;            &lt;Box&#10;                style={{&#10;                    width: '40%',&#10;                    background: '#FFFFFF',&#10;                    borderRadius: 16,&#10;                    boxShadow: '0 4px 20px rgba(0,0,0,0.08)',&#10;                    padding: 24,&#10;                    borderLeft: '8px solid #AFC440',&#10;                }}&#10;            &gt;&#10;                &lt;Text&#10;                    style={{&#10;                        fontSize: 26,&#10;                        fontWeight: 'bold',&#10;                        color: '#51277C',&#10;                        fontFamily: 'Trebuchet MS',&#10;                    }}&#10;                &gt;&#10;                    Bulan ini&#10;                &lt;/Text&gt;&#10;                &lt;Text&#10;                    style={{&#10;                        marginTop: 10,&#10;                        fontSize: 19,&#10;                        color: '#6B6478',&#10;                        fontFamily: 'Verdana',&#10;                        lineHeight: 1.5,&#10;                    }}&#10;                &gt;&#10;                    Kalender penuh satu bulan — bisa melihat jadwal jauh hari sebelumnya.&#10;                &lt;/Text&gt;&#10;            &lt;/Box&gt;&#10;        &lt;/Box&gt;&#10;    &lt;/Box&gt;&#10;&#10;    {/* ── C · bilah kaki ── */}&#10;    &lt;Box&#10;        style={{&#10;            height: 40,&#10;            flexDirection: 'row',&#10;            alignItems: 'center',&#10;            justifyContent: 'space-between',&#10;        }}&#10;    &gt;&#10;        &lt;Text style={{ fontSize: 14, color: '#6B6478', fontFamily: 'Verdana' }}&gt;&#10;            Pizza Snack Play · Panduan Orang Tua&#10;        &lt;/Text&gt;&#10;        &lt;Text style={{ fontSize: 14, color: '#6B6478', fontFamily: 'Verdana' }}&gt;10 / 16&lt;/Text&gt;&#10;    &lt;/Box&gt;&#10;&lt;/Slide&gt;&#10;"/>
         <p:cNvGrpSpPr/>
         <p:nvPr/>
       </p:nvGrpSpPr>
@@ -1562,7 +1545,7 @@
           <p:nvPr/>
         </p:nvPicPr>
         <p:blipFill>
-          <a:blip r:embed="rId1">
+          <a:blip>
             <a:extLst>
               <a:ext uri="{96DAC541-7B7A-43D3-8B79-37D633B846F1}">
                 <asvg:svgBlip r:embed="rId1"/>
@@ -1972,7 +1955,7 @@
                 <a:latin typeface="Verdana"/>
                 <a:ea typeface="Verdana"/>
               </a:rPr>
-              <a:t>10 / 15</a:t>
+              <a:t>10 / 16</a:t>
             </a:r>
             <a:endParaRPr/>
           </a:p>
@@ -1988,7 +1971,7 @@
   <p:cSld>
     <p:spTree>
       <p:nvGrpSpPr>
-        <p:cNvPr id="32" name=""/>
+        <p:cNvPr id="32" name="" descr="&lt;Slide&#10;    style={{&#10;        width: '1280px',&#10;        height: '720px',&#10;        background: '#FAF7F2',&#10;        paddingTop: 20,&#10;        paddingBottom: 20,&#10;        paddingLeft: 64,&#10;        paddingRight: 64,&#10;        position: 'relative',&#10;        overflow: 'hidden',&#10;    }}&#10;&gt;&#10;    {/* sorotan latar Hero */}&#10;    &lt;Box&#10;        style={{&#10;            position: 'absolute',&#10;            top: 120,&#10;            left: -60,&#10;            width: 420,&#10;            height: 420,&#10;            borderRadius: 210,&#10;            background: '#F3B26C',&#10;            opacity: 0.20,&#10;        }}&#10;    /&gt;&#10;&#10;    {/* ── A · blok judul ── */}&#10;    &lt;Box style={{ height: 110, justifyContent: 'center', position: 'relative', zIndex: 1 }}&gt;&#10;        &lt;Text&#10;            style={{&#10;                fontSize: 34,&#10;                fontWeight: 'bold',&#10;                color: '#51277C',&#10;                fontFamily: 'Trebuchet MS',&#10;                lineHeight: 1.3,&#10;            }}&#10;        &gt;&#10;            Ambil tanggal piket&#10;        &lt;/Text&gt;&#10;        &lt;Box style={{ marginTop: 10, width: 72, height: 6, borderRadius: 3, background: '#51277C' }} /&gt;&#10;    &lt;/Box&gt;&#10;&#10;    {/* ── B · area konten ── */}&#10;    &lt;Box style={{ height: 530, flexDirection: 'row', gap: 30, position: 'relative', zIndex: 1 }}&gt;&#10;        {/* kiri · frasa raksasa + penjelasan */}&#10;        &lt;Box style={{ width: '52%', justifyContent: 'center' }}&gt;&#10;            &lt;Text&#10;                style={{&#10;                    fontSize: 72,&#10;                    fontWeight: 'bold',&#10;                    color: '#51277C',&#10;                    fontFamily: 'Trebuchet MS',&#10;                    lineHeight: 1.05,&#10;                }}&#10;            &gt;&#10;                Siapa cepat,{'\n'}dia dapat.&#10;            &lt;/Text&gt;&#10;&#10;            &lt;Box style={{ marginTop: 24, width: 110, height: 7, borderRadius: 4, background: '#F3B26C' }} /&gt;&#10;&#10;            &lt;Text&#10;                style={{&#10;                    marginTop: 22,&#10;                    fontSize: 19,&#10;                    color: '#2A2333',&#10;                    fontFamily: 'Verdana',&#10;                    lineHeight: 1.55,&#10;                }}&#10;            &gt;&#10;                Tanggal yang belum ada petugasnya bisa diambil sendiri. Satu ketuk langsung tercatat.&#10;            &lt;/Text&gt;&#10;&#10;            &lt;Text&#10;                style={{&#10;                    marginTop: 14,&#10;                    fontSize: 19,&#10;                    color: '#6B6478',&#10;                    fontFamily: 'Verdana',&#10;                    lineHeight: 1.55,&#10;                }}&#10;            &gt;&#10;                Kalau keduluan, aplikasi menyebut siapa yang lebih dulu mengambilnya. Jadi tidak ada lagi dua orang merasa sama-sama sudah dapat.&#10;            &lt;/Text&gt;&#10;&#10;            &lt;Box&#10;                style={{&#10;                    marginTop: 22,&#10;                    flexDirection: 'row',&#10;                    alignItems: 'center',&#10;                    gap: 12,&#10;                    alignSelf: 'flex-start',&#10;                    background: '#FFFFFF',&#10;                    borderRadius: 14,&#10;                    boxShadow: '0 4px 20px rgba(0,0,0,0.08)',&#10;                    paddingTop: 12,&#10;                    paddingBottom: 12,&#10;                    paddingLeft: 20,&#10;                    paddingRight: 22,&#10;                }}&#10;            &gt;&#10;                &lt;svg width={22} height={22} viewBox=&quot;0 0 512 512&quot; xmlns=&quot;http://www.w3.org/2000/svg&quot;&gt;&lt;path fill=&quot;#51277C&quot; d=&quot;M48.5 224H40c-13.3 0-24-10.7-24-24V72c0-9.7 5.8-18.5 14.8-22.2s19.3-1.7 26.2 5.2L98.6 96.6c87.6-86.5 228.7-86.2 315.8 1c87.5 87.5 87.5 229.3 0 316.8s-229.3 87.5-316.8 0c-12.5-12.5-12.5-32.8 0-45.3s32.8-12.5 45.3 0c62.5 62.5 163.8 62.5 226.3 0s62.5-163.8 0-226.3c-62.2-62.2-162.7-62.5-225.3-1L185 183c6.9 6.9 8.9 17.2 5.2 26.2s-12.5 14.8-22.2 14.8H48.5z&quot; /&gt;&lt;/svg&gt;&#10;                &lt;Text style={{ fontSize: 18, color: '#2A2333', fontFamily: 'Verdana' }}&gt;&#10;                    Masih bisa dibatalkan sendiri&#10;                &lt;/Text&gt;&#10;            &lt;/Box&gt;&#10;        &lt;/Box&gt;&#10;&#10;        {/* kanan · kartu tanggal */}&#10;        &lt;Box&#10;            style={{&#10;                width: '48%',&#10;                justifyContent: 'center',&#10;                alignItems: 'center',&#10;            }}&#10;        &gt;&#10;            &lt;svg width={480} height={420} viewBox='0 0 480 420'&gt;&#10;                {/* kartu tersedia */}&#10;                &lt;rect x='8' y='8' width='464' height='236' rx='20' fill='#FFFFFF' stroke='#E6DFD2' strokeWidth='3' /&gt;&#10;                &lt;path d='M8 88 h464 v-32 a20 20 0 0 0 -20 -20 h-424 a20 20 0 0 0 -20 20 z' fill='#51277C' /&gt;&#10;                &lt;rect x='8' y='56' width='464' height='32' fill='#51277C' /&gt;&#10;                &lt;text x='36' y='62' fontFamily='Trebuchet MS' fontSize='23' fontWeight='bold' fill='#FFFFFF'&gt;&#10;                    Selasa, 1 September&#10;                &lt;/text&gt;&#10;                &lt;text x='36' y='158' fontFamily='Trebuchet MS' fontSize='64' fontWeight='bold' fill='#51277C'&gt;&#10;                    1&#10;                &lt;/text&gt;&#10;                &lt;text x='36' y='192' fontFamily='Verdana' fontSize='17' fill='#6B6478'&gt;&#10;                    Belum ada petugas&#10;                &lt;/text&gt;&#10;                &lt;rect x='272' y='132' width='176' height='62' rx='18' fill='#F3B26C' /&gt;&#10;                &lt;text x='360' y='172' fontFamily='Trebuchet MS' fontSize='26' fontWeight='bold' fill='#51277C' textAnchor='middle'&gt;&#10;                    Ambil&#10;                &lt;/text&gt;&#10;&#10;                {/* kartu sudah diambil */}&#10;                &lt;rect x='8' y='268' width='464' height='144' rx='20' fill='#FFFFFF' stroke='#AFC440' strokeWidth='4' /&gt;&#10;                &lt;circle cx='60' cy='340' r='30' fill='#AFC440' /&gt;&#10;                &lt;path&#10;                    d='M46 340 l10 11 l19 -22'&#10;                    fill='none'&#10;                    stroke='#FFFFFF'&#10;                    strokeWidth='7'&#10;                    strokeLinecap='round'&#10;                    strokeLinejoin='round'&#10;                /&gt;&#10;                &lt;text x='108' y='334' fontFamily='Trebuchet MS' fontSize='23' fontWeight='bold' fill='#2A2333'&gt;&#10;                    Diambil Bu Sari&#10;                &lt;/text&gt;&#10;                &lt;text x='108' y='364' fontFamily='Verdana' fontSize='17' fill='#6B6478'&gt;&#10;                    Tanggal ini sudah punya petugas&#10;                &lt;/text&gt;&#10;            &lt;/svg&gt;&#10;        &lt;/Box&gt;&#10;    &lt;/Box&gt;&#10;&#10;    {/* ── C · bilah kaki ── */}&#10;    &lt;Box&#10;        style={{&#10;            height: 40,&#10;            flexDirection: 'row',&#10;            alignItems: 'center',&#10;            justifyContent: 'space-between',&#10;            position: 'relative',&#10;            zIndex: 1,&#10;        }}&#10;    &gt;&#10;        &lt;Text style={{ fontSize: 14, color: '#6B6478', fontFamily: 'Verdana' }}&gt;&#10;            Pizza Snack Play · Panduan Orang Tua&#10;        &lt;/Text&gt;&#10;        &lt;Text style={{ fontSize: 14, color: '#6B6478', fontFamily: 'Verdana' }}&gt;11 / 16&lt;/Text&gt;&#10;    &lt;/Box&gt;&#10;&lt;/Slide&gt;&#10;"/>
         <p:cNvGrpSpPr/>
         <p:nvPr/>
       </p:nvGrpSpPr>
@@ -2021,10 +2004,7 @@
         </p:spPr>
         <p:txBody>
           <a:bodyPr/>
-          <a:p>
-            <a:pPr/>
-            <a:endParaRPr/>
-          </a:p>
+          <a:p/>
         </p:txBody>
       </p:sp>
       <p:sp>
@@ -2639,10 +2619,7 @@
         </p:spPr>
         <p:txBody>
           <a:bodyPr/>
-          <a:p>
-            <a:pPr/>
-            <a:endParaRPr/>
-          </a:p>
+          <a:p/>
         </p:txBody>
       </p:sp>
       <p:sp>
@@ -2703,10 +2680,7 @@
         </p:spPr>
         <p:txBody>
           <a:bodyPr/>
-          <a:p>
-            <a:pPr/>
-            <a:endParaRPr/>
-          </a:p>
+          <a:p/>
         </p:txBody>
       </p:sp>
       <p:sp>
@@ -2785,10 +2759,7 @@
         </p:spPr>
         <p:txBody>
           <a:bodyPr/>
-          <a:p>
-            <a:pPr/>
-            <a:endParaRPr/>
-          </a:p>
+          <a:p/>
         </p:txBody>
       </p:sp>
       <p:sp>
@@ -2895,10 +2866,7 @@
         </p:spPr>
         <p:txBody>
           <a:bodyPr/>
-          <a:p>
-            <a:pPr/>
-            <a:endParaRPr/>
-          </a:p>
+          <a:p/>
         </p:txBody>
       </p:sp>
       <p:pic>
@@ -2910,7 +2878,7 @@
           <p:nvPr/>
         </p:nvPicPr>
         <p:blipFill>
-          <a:blip r:embed="rId1">
+          <a:blip>
             <a:extLst>
               <a:ext uri="{96DAC541-7B7A-43D3-8B79-37D633B846F1}">
                 <asvg:svgBlip r:embed="rId1"/>
@@ -2976,7 +2944,7 @@
           <p:nvPr/>
         </p:nvPicPr>
         <p:blipFill>
-          <a:blip r:embed="rId2">
+          <a:blip>
             <a:extLst>
               <a:ext uri="{96DAC541-7B7A-43D3-8B79-37D633B846F1}">
                 <asvg:svgBlip r:embed="rId2"/>
@@ -3062,7 +3030,7 @@
                 <a:latin typeface="Verdana"/>
                 <a:ea typeface="Verdana"/>
               </a:rPr>
-              <a:t>11 / 15</a:t>
+              <a:t>11 / 16</a:t>
             </a:r>
             <a:endParaRPr/>
           </a:p>
@@ -3078,7 +3046,7 @@
   <p:cSld>
     <p:spTree>
       <p:nvGrpSpPr>
-        <p:cNvPr id="47" name=""/>
+        <p:cNvPr id="47" name="" descr="&lt;Slide&#10;    style={{&#10;        width: '1280px',&#10;        height: '720px',&#10;        background: '#FAF7F2',&#10;        paddingTop: 20,&#10;        paddingBottom: 20,&#10;        paddingLeft: 64,&#10;        paddingRight: 64,&#10;    }}&#10;&gt;&#10;    {/* ── A · blok judul ── */}&#10;    &lt;Box style={{ height: 110, justifyContent: 'center' }}&gt;&#10;        &lt;Text&#10;            style={{&#10;                fontSize: 34,&#10;                fontWeight: 'bold',&#10;                color: '#51277C',&#10;                fontFamily: 'Trebuchet MS',&#10;                lineHeight: 1.3,&#10;            }}&#10;        &gt;&#10;            Kabar otomatis lewat WhatsApp&#10;        &lt;/Text&gt;&#10;        &lt;Box style={{ marginTop: 10, width: 72, height: 6, borderRadius: 3, background: '#F3B26C' }} /&gt;&#10;    &lt;/Box&gt;&#10;&#10;    {/* ── B · area konten ── */}&#10;    &lt;Box style={{ height: 530, flexDirection: 'row', gap: 30 }}&gt;&#10;        {/* kiri 55% · ilustrasi percakapan WhatsApp */}&#10;        &lt;Box style={{ width: '55%', height: '100%', justifyContent: 'center', alignItems: 'center' }}&gt;&#10;            &lt;svg width={560} height={500} viewBox='0 0 560 500' xmlns='http://www.w3.org/2000/svg'&gt;&#10;                {/* badan ponsel */}&#10;                &lt;rect x='90' y='6' width='380' height='488' rx='30' fill='#FFFFFF' stroke='#E6DFD2' strokeWidth='3' /&gt;&#10;                {/* kepala percakapan */}&#10;                &lt;path d='M90 36 a30 30 0 0 1 30 -30 h320 a30 30 0 0 1 30 30 v58 h-380 z' fill='#51277C' /&gt;&#10;                &lt;text x='124' y='56' fontFamily='Trebuchet MS' fontSize='19' fontWeight='bold' fill='#FFFFFF'&gt;&#10;                    Pizza Snack Play&#10;                &lt;/text&gt;&#10;                &lt;text x='124' y='80' fontFamily='Verdana' fontSize='13' fill='rgba(255,255,255,0.82)'&gt;&#10;                    Kabar untuk wali murid&#10;                &lt;/text&gt;&#10;&#10;                {/* gelembung 1 · konfirmasi */}&#10;                &lt;rect x='112' y='108' width='336' height='112' rx='16' fill='#FFFFFF' stroke='#E6DFD2' strokeWidth='2' /&gt;&#10;                &lt;text x='134' y='140' fontFamily='Verdana' fontSize='14' fill='#6B6478'&gt;&#10;                    Konfirmasi&#10;                &lt;/text&gt;&#10;                &lt;text x='134' y='168' fontFamily='Verdana' fontSize='15' fill='#2A2333'&gt;&#10;                    Tanggal Selasa, 1 September&#10;                &lt;/text&gt;&#10;                &lt;text x='134' y='192' fontFamily='Verdana' fontSize='15' fill='#2A2333'&gt;&#10;                    sudah tercatat untuk Ani.&#10;                &lt;/text&gt;&#10;&#10;                {/* gelembung 2 · pengingat */}&#10;                &lt;rect x='112' y='240' width='336' height='136' rx='16' fill='#EEF3D4' stroke='#AFC440' strokeWidth='2' /&gt;&#10;                &lt;text x='134' y='272' fontFamily='Verdana' fontSize='14' fill='#5E6B1E'&gt;&#10;                    Pengingat piket&#10;                &lt;/text&gt;&#10;                &lt;text x='134' y='300' fontFamily='Verdana' fontSize='15' fill='#2A2333'&gt;&#10;                    Ani bertugas membawa snack&#10;                &lt;/text&gt;&#10;                &lt;text x='134' y='324' fontFamily='Verdana' fontSize='15' fill='#2A2333'&gt;&#10;                    pada Selasa, 1 September&#10;                &lt;/text&gt;&#10;                &lt;text x='134' y='348' fontFamily='Verdana' fontSize='15' fill='#2A2333'&gt;&#10;                    2026 (Roti Abon + Susu).&#10;                &lt;/text&gt;&#10;&#10;                {/* keterangan */}&#10;                &lt;text x='112' y='404' fontFamily='Verdana' fontSize='13' fill='#6B6478'&gt;&#10;                    Dikirim otomatis · tidak perlu dibalas&#10;                &lt;/text&gt;&#10;&#10;                {/* ikon centang */}&#10;                &lt;circle cx='390' cy='452' r='24' fill='#AFC440' /&gt;&#10;                &lt;path&#10;                    d='M378 452 l9 10 l17 -20'&#10;                    fill='none'&#10;                    stroke='#FFFFFF'&#10;                    strokeWidth='6'&#10;                    strokeLinecap='round'&#10;                    strokeLinejoin='round'&#10;                /&gt;&#10;            &lt;/svg&gt;&#10;        &lt;/Box&gt;&#10;&#10;        {/* kanan 45% · tiga hal yang perlu diketahui */}&#10;        &lt;Box style={{ width: '45%', height: '100%', justifyContent: 'center' }}&gt;&#10;            {[&#10;                {&#10;                    t: 'Begitu tanggal diambil',&#10;                    d: 'Konfirmasi langsung masuk ke WhatsApp wali. Tidak perlu mencatat ulang atau bertanya ke korlas.',&#10;                },&#10;                {&#10;                    t: 'Sehari sebelum piket',&#10;                    d: 'Sekolah mengirim pengingat: nama anak, tanggalnya, dan menu yang perlu dibawa.',&#10;                },&#10;                {&#10;                    t: 'Pastikan nomor Anda terisi',&#10;                    d: 'Kabar dikirim ke nomor di halaman Profil. Kalau belum ada, isi di sana — bisa diubah sendiri.',&#10;                },&#10;            ].map((it, i) =&gt; (&#10;                &lt;Box key={i} style={{ marginBottom: i &lt; 2 ? 22 : 0 }}&gt;&#10;                    &lt;Box style={{ flexDirection: 'row', alignItems: 'center', gap: 10 }}&gt;&#10;                        &lt;Box style={{ width: 10, height: 10, borderRadius: 5, background: '#F3B26C' }} /&gt;&#10;                        &lt;Text&#10;                            style={{&#10;                                fontSize: 21,&#10;                                fontWeight: 'bold',&#10;                                color: '#51277C',&#10;                                fontFamily: 'Trebuchet MS',&#10;                                lineHeight: 1.3,&#10;                            }}&#10;                        &gt;&#10;                            {it.t}&#10;                        &lt;/Text&gt;&#10;                    &lt;/Box&gt;&#10;                    &lt;Text&#10;                        style={{&#10;                            marginTop: 7,&#10;                            marginLeft: 20,&#10;                            fontSize: 17,&#10;                            color: '#2A2333',&#10;                            fontFamily: 'Verdana',&#10;                            lineHeight: 1.55,&#10;                        }}&#10;                    &gt;&#10;                        {it.d}&#10;                    &lt;/Text&gt;&#10;                &lt;/Box&gt;&#10;            ))}&#10;        &lt;/Box&gt;&#10;    &lt;/Box&gt;&#10;&#10;    {/* ── C · bilah kaki ── */}&#10;    &lt;Box&#10;        style={{&#10;            height: 40,&#10;            flexDirection: 'row',&#10;            alignItems: 'center',&#10;            justifyContent: 'space-between',&#10;        }}&#10;    &gt;&#10;        &lt;Text style={{ fontSize: 14, color: '#6B6478', fontFamily: 'Verdana' }}&gt;&#10;            Pizza Snack Play · Panduan Orang Tua&#10;        &lt;/Text&gt;&#10;        &lt;Text style={{ fontSize: 14, color: '#6B6478', fontFamily: 'Verdana' }}&gt;12 / 16&lt;/Text&gt;&#10;    &lt;/Box&gt;&#10;&lt;/Slide&gt;&#10;"/>
         <p:cNvGrpSpPr/>
         <p:nvPr/>
       </p:nvGrpSpPr>
@@ -3111,10 +3079,7 @@
         </p:spPr>
         <p:txBody>
           <a:bodyPr/>
-          <a:p>
-            <a:pPr/>
-            <a:endParaRPr/>
-          </a:p>
+          <a:p/>
         </p:txBody>
       </p:sp>
       <p:sp>
@@ -3146,6 +3111,508 @@
                 <a:latin typeface="Trebuchet MS"/>
                 <a:ea typeface="Trebuchet MS"/>
               </a:rPr>
+              <a:t>Kabar otomatis lewat WhatsApp</a:t>
+            </a:r>
+            <a:endParaRPr/>
+          </a:p>
+        </p:txBody>
+      </p:sp>
+      <p:sp>
+        <p:nvSpPr>
+          <p:cNvPr id="50" name=""/>
+          <p:cNvSpPr/>
+          <p:nvPr/>
+        </p:nvSpPr>
+        <p:spPr>
+          <a:xfrm rot="0" flipH="0" flipV="0">
+            <a:off x="609600" y="990600"/>
+            <a:ext cx="685800" cy="57150"/>
+          </a:xfrm>
+          <a:prstGeom prst="roundRect">
+            <a:avLst>
+              <a:gd name="adj" fmla="val 50000"/>
+            </a:avLst>
+          </a:prstGeom>
+          <a:solidFill>
+            <a:srgbClr val="F3B26C"/>
+          </a:solidFill>
+          <a:ln/>
+        </p:spPr>
+        <p:txBody>
+          <a:bodyPr/>
+          <a:p/>
+        </p:txBody>
+      </p:sp>
+      <p:pic>
+        <p:nvPicPr>
+          <p:cNvPr id="51" name=""/>
+          <p:cNvPicPr>
+            <a:picLocks noChangeAspect="1"/>
+          </p:cNvPicPr>
+          <p:nvPr/>
+        </p:nvPicPr>
+        <p:blipFill>
+          <a:blip>
+            <a:extLst>
+              <a:ext uri="{96DAC541-7B7A-43D3-8B79-37D633B846F1}">
+                <asvg:svgBlip r:embed="rId1"/>
+              </a:ext>
+            </a:extLst>
+          </a:blip>
+          <a:stretch>
+            <a:fillRect/>
+          </a:stretch>
+        </p:blipFill>
+        <p:spPr>
+          <a:xfrm rot="0" flipH="0" flipV="0">
+            <a:off x="885825" y="1381125"/>
+            <a:ext cx="5334000" cy="4762500"/>
+          </a:xfrm>
+          <a:prstGeom prst="rect">
+            <a:avLst/>
+          </a:prstGeom>
+          <a:ln/>
+        </p:spPr>
+      </p:pic>
+      <p:sp>
+        <p:nvSpPr>
+          <p:cNvPr id="52" name=""/>
+          <p:cNvSpPr/>
+          <p:nvPr/>
+        </p:nvSpPr>
+        <p:spPr>
+          <a:xfrm rot="0" flipH="0" flipV="0">
+            <a:off x="6772275" y="2181225"/>
+            <a:ext cx="95250" cy="95250"/>
+          </a:xfrm>
+          <a:prstGeom prst="roundRect">
+            <a:avLst>
+              <a:gd name="adj" fmla="val 50000"/>
+            </a:avLst>
+          </a:prstGeom>
+          <a:solidFill>
+            <a:srgbClr val="F3B26C"/>
+          </a:solidFill>
+          <a:ln/>
+        </p:spPr>
+        <p:txBody>
+          <a:bodyPr/>
+          <a:p/>
+        </p:txBody>
+      </p:sp>
+      <p:sp>
+        <p:nvSpPr>
+          <p:cNvPr id="53" name="" descr="{&quot;isTemplate&quot;:true,&quot;type&quot;:&quot;text&quot;}"/>
+          <p:cNvSpPr txBox="1"/>
+          <p:nvPr/>
+        </p:nvSpPr>
+        <p:spPr>
+          <a:xfrm rot="0" flipH="0" flipV="0">
+            <a:off x="6962775" y="2066925"/>
+            <a:ext cx="2076450" cy="314325"/>
+          </a:xfrm>
+          <a:prstGeom prst="rect"/>
+        </p:spPr>
+        <p:txBody>
+          <a:bodyPr wrap="none" lIns="0" tIns="0" rIns="0" bIns="0"/>
+          <a:p>
+            <a:pPr>
+              <a:lnSpc>
+                <a:spcPct val="130000"/>
+              </a:lnSpc>
+            </a:pPr>
+            <a:r>
+              <a:rPr lang="en-US" sz="1575" b="1">
+                <a:solidFill>
+                  <a:srgbClr val="51277C"/>
+                </a:solidFill>
+                <a:latin typeface="Trebuchet MS"/>
+                <a:ea typeface="Trebuchet MS"/>
+              </a:rPr>
+              <a:t>Begitu tanggal diambil</a:t>
+            </a:r>
+            <a:endParaRPr/>
+          </a:p>
+        </p:txBody>
+      </p:sp>
+      <p:sp>
+        <p:nvSpPr>
+          <p:cNvPr id="54" name="" descr="{&quot;isTemplate&quot;:true,&quot;type&quot;:&quot;text&quot;}"/>
+          <p:cNvSpPr txBox="1"/>
+          <p:nvPr/>
+        </p:nvSpPr>
+        <p:spPr>
+          <a:xfrm rot="0" flipH="0" flipV="0">
+            <a:off x="6962775" y="2447925"/>
+            <a:ext cx="4619625" cy="609600"/>
+          </a:xfrm>
+          <a:prstGeom prst="rect"/>
+        </p:spPr>
+        <p:txBody>
+          <a:bodyPr wrap="square" lIns="0" tIns="0" rIns="0" bIns="0">
+            <a:normAutofit/>
+          </a:bodyPr>
+          <a:p>
+            <a:pPr>
+              <a:lnSpc>
+                <a:spcPct val="155000"/>
+              </a:lnSpc>
+            </a:pPr>
+            <a:r>
+              <a:rPr lang="en-US" sz="1275">
+                <a:solidFill>
+                  <a:srgbClr val="2A2333"/>
+                </a:solidFill>
+                <a:latin typeface="Verdana"/>
+                <a:ea typeface="Verdana"/>
+              </a:rPr>
+              <a:t>Konfirmasi langsung masuk ke WhatsApp wali. Tidak perlu mencatat ulang atau bertanya ke korlas.</a:t>
+            </a:r>
+            <a:endParaRPr/>
+          </a:p>
+        </p:txBody>
+      </p:sp>
+      <p:sp>
+        <p:nvSpPr>
+          <p:cNvPr id="55" name=""/>
+          <p:cNvSpPr/>
+          <p:nvPr/>
+        </p:nvSpPr>
+        <p:spPr>
+          <a:xfrm rot="0" flipH="0" flipV="0">
+            <a:off x="6772275" y="3381375"/>
+            <a:ext cx="95250" cy="95250"/>
+          </a:xfrm>
+          <a:prstGeom prst="roundRect">
+            <a:avLst>
+              <a:gd name="adj" fmla="val 50000"/>
+            </a:avLst>
+          </a:prstGeom>
+          <a:solidFill>
+            <a:srgbClr val="F3B26C"/>
+          </a:solidFill>
+          <a:ln/>
+        </p:spPr>
+        <p:txBody>
+          <a:bodyPr/>
+          <a:p/>
+        </p:txBody>
+      </p:sp>
+      <p:sp>
+        <p:nvSpPr>
+          <p:cNvPr id="56" name="" descr="{&quot;isTemplate&quot;:true,&quot;type&quot;:&quot;text&quot;}"/>
+          <p:cNvSpPr txBox="1"/>
+          <p:nvPr/>
+        </p:nvSpPr>
+        <p:spPr>
+          <a:xfrm rot="0" flipH="0" flipV="0">
+            <a:off x="6962775" y="3267075"/>
+            <a:ext cx="1971675" cy="314325"/>
+          </a:xfrm>
+          <a:prstGeom prst="rect"/>
+        </p:spPr>
+        <p:txBody>
+          <a:bodyPr wrap="none" lIns="0" tIns="0" rIns="0" bIns="0"/>
+          <a:p>
+            <a:pPr>
+              <a:lnSpc>
+                <a:spcPct val="130000"/>
+              </a:lnSpc>
+            </a:pPr>
+            <a:r>
+              <a:rPr lang="en-US" sz="1575" b="1">
+                <a:solidFill>
+                  <a:srgbClr val="51277C"/>
+                </a:solidFill>
+                <a:latin typeface="Trebuchet MS"/>
+                <a:ea typeface="Trebuchet MS"/>
+              </a:rPr>
+              <a:t>Sehari sebelum piket</a:t>
+            </a:r>
+            <a:endParaRPr/>
+          </a:p>
+        </p:txBody>
+      </p:sp>
+      <p:sp>
+        <p:nvSpPr>
+          <p:cNvPr id="57" name="" descr="{&quot;isTemplate&quot;:true,&quot;type&quot;:&quot;text&quot;}"/>
+          <p:cNvSpPr txBox="1"/>
+          <p:nvPr/>
+        </p:nvSpPr>
+        <p:spPr>
+          <a:xfrm rot="0" flipH="0" flipV="0">
+            <a:off x="6962775" y="3648075"/>
+            <a:ext cx="4619625" cy="609600"/>
+          </a:xfrm>
+          <a:prstGeom prst="rect"/>
+        </p:spPr>
+        <p:txBody>
+          <a:bodyPr wrap="square" lIns="0" tIns="0" rIns="0" bIns="0">
+            <a:normAutofit/>
+          </a:bodyPr>
+          <a:p>
+            <a:pPr>
+              <a:lnSpc>
+                <a:spcPct val="155000"/>
+              </a:lnSpc>
+            </a:pPr>
+            <a:r>
+              <a:rPr lang="en-US" sz="1275">
+                <a:solidFill>
+                  <a:srgbClr val="2A2333"/>
+                </a:solidFill>
+                <a:latin typeface="Verdana"/>
+                <a:ea typeface="Verdana"/>
+              </a:rPr>
+              <a:t>Sekolah mengirim pengingat: nama anak, tanggalnya, dan menu yang perlu dibawa.</a:t>
+            </a:r>
+            <a:endParaRPr/>
+          </a:p>
+        </p:txBody>
+      </p:sp>
+      <p:sp>
+        <p:nvSpPr>
+          <p:cNvPr id="58" name=""/>
+          <p:cNvSpPr/>
+          <p:nvPr/>
+        </p:nvSpPr>
+        <p:spPr>
+          <a:xfrm rot="0" flipH="0" flipV="0">
+            <a:off x="6772275" y="4581525"/>
+            <a:ext cx="95250" cy="95250"/>
+          </a:xfrm>
+          <a:prstGeom prst="roundRect">
+            <a:avLst>
+              <a:gd name="adj" fmla="val 50000"/>
+            </a:avLst>
+          </a:prstGeom>
+          <a:solidFill>
+            <a:srgbClr val="F3B26C"/>
+          </a:solidFill>
+          <a:ln/>
+        </p:spPr>
+        <p:txBody>
+          <a:bodyPr/>
+          <a:p/>
+        </p:txBody>
+      </p:sp>
+      <p:sp>
+        <p:nvSpPr>
+          <p:cNvPr id="59" name="" descr="{&quot;isTemplate&quot;:true,&quot;type&quot;:&quot;text&quot;}"/>
+          <p:cNvSpPr txBox="1"/>
+          <p:nvPr/>
+        </p:nvSpPr>
+        <p:spPr>
+          <a:xfrm rot="0" flipH="0" flipV="0">
+            <a:off x="6962775" y="4467225"/>
+            <a:ext cx="2505075" cy="314325"/>
+          </a:xfrm>
+          <a:prstGeom prst="rect"/>
+        </p:spPr>
+        <p:txBody>
+          <a:bodyPr wrap="none" lIns="0" tIns="0" rIns="0" bIns="0"/>
+          <a:p>
+            <a:pPr>
+              <a:lnSpc>
+                <a:spcPct val="130000"/>
+              </a:lnSpc>
+            </a:pPr>
+            <a:r>
+              <a:rPr lang="en-US" sz="1575" b="1">
+                <a:solidFill>
+                  <a:srgbClr val="51277C"/>
+                </a:solidFill>
+                <a:latin typeface="Trebuchet MS"/>
+                <a:ea typeface="Trebuchet MS"/>
+              </a:rPr>
+              <a:t>Pastikan nomor Anda terisi</a:t>
+            </a:r>
+            <a:endParaRPr/>
+          </a:p>
+        </p:txBody>
+      </p:sp>
+      <p:sp>
+        <p:nvSpPr>
+          <p:cNvPr id="60" name="" descr="{&quot;isTemplate&quot;:true,&quot;type&quot;:&quot;text&quot;}"/>
+          <p:cNvSpPr txBox="1"/>
+          <p:nvPr/>
+        </p:nvSpPr>
+        <p:spPr>
+          <a:xfrm rot="0" flipH="0" flipV="0">
+            <a:off x="6962775" y="4848225"/>
+            <a:ext cx="4619625" cy="609600"/>
+          </a:xfrm>
+          <a:prstGeom prst="rect"/>
+        </p:spPr>
+        <p:txBody>
+          <a:bodyPr wrap="square" lIns="0" tIns="0" rIns="0" bIns="0">
+            <a:normAutofit/>
+          </a:bodyPr>
+          <a:p>
+            <a:pPr>
+              <a:lnSpc>
+                <a:spcPct val="155000"/>
+              </a:lnSpc>
+            </a:pPr>
+            <a:r>
+              <a:rPr lang="en-US" sz="1275">
+                <a:solidFill>
+                  <a:srgbClr val="2A2333"/>
+                </a:solidFill>
+                <a:latin typeface="Verdana"/>
+                <a:ea typeface="Verdana"/>
+              </a:rPr>
+              <a:t>Kabar dikirim ke nomor di halaman Profil. Kalau belum ada, isi di sana — bisa diubah sendiri.</a:t>
+            </a:r>
+            <a:endParaRPr/>
+          </a:p>
+        </p:txBody>
+      </p:sp>
+      <p:sp>
+        <p:nvSpPr>
+          <p:cNvPr id="61" name="" descr="{&quot;isTemplate&quot;:true,&quot;type&quot;:&quot;text&quot;}"/>
+          <p:cNvSpPr txBox="1"/>
+          <p:nvPr/>
+        </p:nvSpPr>
+        <p:spPr>
+          <a:xfrm rot="0" flipH="0" flipV="0">
+            <a:off x="609600" y="6400800"/>
+            <a:ext cx="2562225" cy="161925"/>
+          </a:xfrm>
+          <a:prstGeom prst="rect"/>
+        </p:spPr>
+        <p:txBody>
+          <a:bodyPr wrap="none" lIns="0" tIns="0" rIns="0" bIns="0"/>
+          <a:p>
+            <a:pPr>
+              <a:lnSpc>
+                <a:spcPct val="100000"/>
+              </a:lnSpc>
+            </a:pPr>
+            <a:r>
+              <a:rPr lang="en-US" sz="1050">
+                <a:solidFill>
+                  <a:srgbClr val="6B6478"/>
+                </a:solidFill>
+                <a:latin typeface="Verdana"/>
+                <a:ea typeface="Verdana"/>
+              </a:rPr>
+              <a:t>Pizza Snack Play · Panduan Orang Tua</a:t>
+            </a:r>
+            <a:endParaRPr/>
+          </a:p>
+        </p:txBody>
+      </p:sp>
+      <p:sp>
+        <p:nvSpPr>
+          <p:cNvPr id="62" name="" descr="{&quot;isTemplate&quot;:true,&quot;type&quot;:&quot;text&quot;}"/>
+          <p:cNvSpPr txBox="1"/>
+          <p:nvPr/>
+        </p:nvSpPr>
+        <p:spPr>
+          <a:xfrm rot="0" flipH="0" flipV="0">
+            <a:off x="11087100" y="6400800"/>
+            <a:ext cx="495300" cy="161925"/>
+          </a:xfrm>
+          <a:prstGeom prst="rect"/>
+        </p:spPr>
+        <p:txBody>
+          <a:bodyPr wrap="none" lIns="0" tIns="0" rIns="0" bIns="0"/>
+          <a:p>
+            <a:pPr>
+              <a:lnSpc>
+                <a:spcPct val="100000"/>
+              </a:lnSpc>
+            </a:pPr>
+            <a:r>
+              <a:rPr lang="en-US" sz="1050">
+                <a:solidFill>
+                  <a:srgbClr val="6B6478"/>
+                </a:solidFill>
+                <a:latin typeface="Verdana"/>
+                <a:ea typeface="Verdana"/>
+              </a:rPr>
+              <a:t>12 / 16</a:t>
+            </a:r>
+            <a:endParaRPr/>
+          </a:p>
+        </p:txBody>
+      </p:sp>
+    </p:spTree>
+  </p:cSld>
+</p:sld>
+</file>
+
+<file path=ppt/slides/slide13.xml><?xml version="1.0" encoding="utf-8"?>
+<p:sld xmlns:p="http://schemas.openxmlformats.org/presentationml/2006/main" xmlns:a="http://schemas.openxmlformats.org/drawingml/2006/main" xmlns:asvg="http://schemas.microsoft.com/office/drawing/2016/SVG/main" xmlns:r="http://schemas.openxmlformats.org/officeDocument/2006/relationships" xmlns:mc="http://schemas.openxmlformats.org/markup-compatibility/2006" mc:Ignorable="asvg">
+  <p:cSld>
+    <p:spTree>
+      <p:nvGrpSpPr>
+        <p:cNvPr id="63" name="" descr="&lt;Slide&#10;    style={{&#10;        width: '1280px',&#10;        height: '720px',&#10;        background: '#FAF7F2',&#10;        paddingTop: 20,&#10;        paddingBottom: 20,&#10;        paddingLeft: 64,&#10;        paddingRight: 64,&#10;    }}&#10;&gt;&#10;    {/* ── A · blok judul ── */}&#10;    &lt;Box style={{ height: 110, justifyContent: 'center' }}&gt;&#10;        &lt;Text&#10;            style={{&#10;                fontSize: 34,&#10;                fontWeight: 'bold',&#10;                color: '#51277C',&#10;                fontFamily: 'Trebuchet MS',&#10;                lineHeight: 1.3,&#10;            }}&#10;        &gt;&#10;            Cari menu&#10;        &lt;/Text&gt;&#10;        &lt;Box style={{ marginTop: 10, width: 72, height: 6, borderRadius: 3, background: '#51277C' }} /&gt;&#10;    &lt;/Box&gt;&#10;&#10;    {/* ── B · area konten ── */}&#10;    &lt;Box style={{ height: 530, flexDirection: 'row', gap: 28 }}&gt;&#10;        {/* kiri 30% · panel ungu */}&#10;        &lt;Box&#10;            style={{&#10;                width: '30%',&#10;                height: '100%',&#10;                background: 'linear-gradient(135deg, #51277C 0%, #7A45A8 100%)',&#10;                borderRadius: 20,&#10;                padding: 26,&#10;                justifyContent: 'space-between',&#10;                alignItems: 'center',&#10;            }}&#10;        &gt;&#10;            &lt;Box style={{ alignItems: 'center' }}&gt;&#10;                &lt;Text style={{ fontSize: 16, color: 'rgba(255,255,255,0.75)', fontFamily: 'Verdana' }}&gt;&#10;                    Fitur pendukung&#10;                &lt;/Text&gt;&#10;                &lt;Text&#10;                    style={{&#10;                        marginTop: 8,&#10;                        fontSize: 40,&#10;                        fontWeight: 'bold',&#10;                        color: '#FFFFFF',&#10;                        fontFamily: 'Trebuchet MS',&#10;                    }}&#10;                &gt;&#10;                    Cari&#10;                &lt;/Text&gt;&#10;            &lt;/Box&gt;&#10;&#10;            &lt;svg width={190} height={190} viewBox='0 0 190 190'&gt;&#10;                &lt;circle cx='82' cy='82' r='54' fill='none' stroke='#FFFFFF' strokeWidth='12' /&gt;&#10;                &lt;path d='M122 122 l44 44' stroke='#F3B26C' strokeWidth='14' strokeLinecap='round' /&gt;&#10;                &lt;circle cx='82' cy='82' r='34' fill='#AFC440' opacity='0.35' /&gt;&#10;                &lt;circle cx='70' cy='72' r='7' fill='#FFFFFF' /&gt;&#10;                &lt;circle cx='94' cy='88' r='7' fill='#FFFFFF' /&gt;&#10;                &lt;circle cx='76' cy='98' r='7' fill='#FFFFFF' /&gt;&#10;            &lt;/svg&gt;&#10;&#10;            &lt;Text&#10;                style={{&#10;                    fontSize: 17,&#10;                    color: 'rgba(255,255,255,0.9)',&#10;                    fontFamily: 'Verdana',&#10;                    lineHeight: 1.5,&#10;                    textAlign: 'center',&#10;                }}&#10;            &gt;&#10;                Dipakai kalau ingin tahu riwayat menu.&#10;            &lt;/Text&gt;&#10;        &lt;/Box&gt;&#10;&#10;        {/* kanan 70% · tiga keterangan */}&#10;        &lt;Box style={{ width: '70%', height: '100%', justifyContent: 'space-between' }}&gt;&#10;            &lt;Box&#10;                style={{&#10;                    height: 166,&#10;                    flexDirection: 'row',&#10;                    alignItems: 'center',&#10;                    gap: 20,&#10;                    background: '#FFFFFF',&#10;                    borderRadius: 16,&#10;                    boxShadow: '0 4px 20px rgba(0,0,0,0.08)',&#10;                    paddingLeft: 24,&#10;                    paddingRight: 26,&#10;                    borderLeft: '8px solid #AFC440',&#10;                }}&#10;            &gt;&#10;                &lt;Box&#10;                    style={{&#10;                        width: 54,&#10;                        height: 54,&#10;                        borderRadius: 27,&#10;                        background: 'rgba(81,39,124,0.10)',&#10;                        justifyContent: 'center',&#10;                        alignItems: 'center',&#10;                    }}&#10;                &gt;&#10;                    &lt;svg width={28} height={28} viewBox=&quot;0 0 512 512&quot; xmlns=&quot;http://www.w3.org/2000/svg&quot;&gt;&lt;path fill=&quot;#51277C&quot; d=&quot;M416 208c0 45.9-14.9 88.3-40 122.7L502.6 457.4c12.5 12.5 12.5 32.8 0 45.3s-32.8 12.5-45.3 0L330.7 376c-34.4 25.2-76.8 40-122.7 40C93.1 416 0 322.9 0 208S93.1 0 208 0S416 93.1 416 208zM208 352a144 144 0 1 0 0-288 144 144 0 1 0 0 288z&quot; /&gt;&lt;/svg&gt;&#10;                &lt;/Box&gt;&#10;                &lt;Box style={{ flex: 1 }}&gt;&#10;                    &lt;Text&#10;                        style={{&#10;                            fontSize: 24,&#10;                            fontWeight: 'bold',&#10;                            color: '#2A2333',&#10;                            fontFamily: 'Trebuchet MS',&#10;                            lineHeight: 1.3,&#10;                        }}&#10;                    &gt;&#10;                        Ketik nama makanan atau buah&#10;                    &lt;/Text&gt;&#10;                    &lt;Text&#10;                        style={{&#10;                            marginTop: 6,&#10;                            fontSize: 18,&#10;                            color: '#6B6478',&#10;                            fontFamily: 'Verdana',&#10;                            lineHeight: 1.45,&#10;                        }}&#10;                    &gt;&#10;                        Misalnya &quot;jeruk&quot; atau &quot;roti&quot;. Aplikasi langsung menemukannya.&#10;                    &lt;/Text&gt;&#10;                &lt;/Box&gt;&#10;            &lt;/Box&gt;&#10;&#10;            &lt;Box&#10;                style={{&#10;                    height: 166,&#10;                    flexDirection: 'row',&#10;                    alignItems: 'center',&#10;                    gap: 20,&#10;                    background: '#FFFFFF',&#10;                    borderRadius: 16,&#10;                    boxShadow: '0 4px 20px rgba(0,0,0,0.08)',&#10;                    paddingLeft: 24,&#10;                    paddingRight: 26,&#10;                    borderLeft: '8px solid #AFC440',&#10;                }}&#10;            &gt;&#10;                &lt;Box&#10;                    style={{&#10;                        width: 54,&#10;                        height: 54,&#10;                        borderRadius: 27,&#10;                        background: 'rgba(81,39,124,0.10)',&#10;                        justifyContent: 'center',&#10;                        alignItems: 'center',&#10;                    }}&#10;                &gt;&#10;                    &lt;svg width={28} height={28} viewBox=&quot;0 0 448 512&quot; xmlns=&quot;http://www.w3.org/2000/svg&quot;&gt;&lt;path fill=&quot;#51277C&quot; d=&quot;M96 32V64H48C21.5 64 0 85.5 0 112v48H448V112c0-26.5-21.5-48-48-48H352V32c0-17.7-14.3-32-32-32s-32 14.3-32 32V64H160V32c0-17.7-14.3-32-32-32S96 14.3 96 32zM448 192H0V464c0 26.5 21.5 48 48 48H400c26.5 0 48-21.5 48-48V192z&quot; /&gt;&lt;/svg&gt;&#10;                &lt;/Box&gt;&#10;                &lt;Box style={{ flex: 1 }}&gt;&#10;                    &lt;Text&#10;                        style={{&#10;                            fontSize: 24,&#10;                            fontWeight: 'bold',&#10;                            color: '#2A2333',&#10;                            fontFamily: 'Trebuchet MS',&#10;                            lineHeight: 1.3,&#10;                        }}&#10;                    &gt;&#10;                        Tahu kapan terakhir disajikan&#10;                    &lt;/Text&gt;&#10;                    &lt;Text&#10;                        style={{&#10;                            marginTop: 6,&#10;                            fontSize: 18,&#10;                            color: '#6B6478',&#10;                            fontFamily: 'Verdana',&#10;                            lineHeight: 1.45,&#10;                        }}&#10;                    &gt;&#10;                        Hasilnya berupa daftar tanggal, jadi rotasi menunya kelihatan.&#10;                    &lt;/Text&gt;&#10;                &lt;/Box&gt;&#10;            &lt;/Box&gt;&#10;&#10;            &lt;Box&#10;                style={{&#10;                    height: 166,&#10;                    background: '#FFFFFF',&#10;                    borderRadius: 16,&#10;                    boxShadow: '0 4px 20px rgba(0,0,0,0.08)',&#10;                    padding: 22,&#10;                    borderLeft: '8px solid #F3B26C',&#10;                }}&#10;            &gt;&#10;                &lt;Text&#10;                    style={{&#10;                        fontSize: 24,&#10;                        fontWeight: 'bold',&#10;                        color: '#2A2333',&#10;                        fontFamily: 'Trebuchet MS',&#10;                        lineHeight: 1.3,&#10;                    }}&#10;                &gt;&#10;                    Berguna kalau anak punya pantangan&#10;                &lt;/Text&gt;&#10;                &lt;Text&#10;                    style={{&#10;                        marginTop: 8,&#10;                        fontSize: 18,&#10;                        color: '#6B6478',&#10;                        fontFamily: 'Verdana',&#10;                        lineHeight: 1.45,&#10;                    }}&#10;                &gt;&#10;                    Bisa dicek lebih dulu sebelum hari itu tiba. Kalau perlu, hubungi korlas kelas agar menu diganti.&#10;                &lt;/Text&gt;&#10;                &lt;Box style={{ marginTop: 'auto' }}&gt;&#10;                    &lt;Text style={{ fontSize: 15, color: '#51277C', fontFamily: 'Verdana', fontWeight: 'bold' }}&gt;&#10;                        Contoh: cari &quot;udang&quot;, lalu lihat tanggalnya&#10;                    &lt;/Text&gt;&#10;                &lt;/Box&gt;&#10;            &lt;/Box&gt;&#10;        &lt;/Box&gt;&#10;    &lt;/Box&gt;&#10;&#10;    {/* ── C · bilah kaki ── */}&#10;    &lt;Box&#10;        style={{&#10;            height: 40,&#10;            flexDirection: 'row',&#10;            alignItems: 'center',&#10;            justifyContent: 'space-between',&#10;        }}&#10;    &gt;&#10;        &lt;Text style={{ fontSize: 14, color: '#6B6478', fontFamily: 'Verdana' }}&gt;&#10;            Pizza Snack Play · Panduan Orang Tua&#10;        &lt;/Text&gt;&#10;        &lt;Text style={{ fontSize: 14, color: '#6B6478', fontFamily: 'Verdana' }}&gt;13 / 16&lt;/Text&gt;&#10;    &lt;/Box&gt;&#10;&lt;/Slide&gt;&#10;"/>
+        <p:cNvGrpSpPr/>
+        <p:nvPr/>
+      </p:nvGrpSpPr>
+      <p:grpSpPr>
+        <a:xfrm>
+          <a:off x="0" y="0"/>
+          <a:ext cx="0" cy="0"/>
+          <a:chOff x="0" y="0"/>
+          <a:chExt cx="0" cy="0"/>
+        </a:xfrm>
+      </p:grpSpPr>
+      <p:sp>
+        <p:nvSpPr>
+          <p:cNvPr id="64" name=""/>
+          <p:cNvSpPr/>
+          <p:nvPr/>
+        </p:nvSpPr>
+        <p:spPr>
+          <a:xfrm rot="0" flipH="0" flipV="0">
+            <a:off x="0" y="0"/>
+            <a:ext cx="12192000" cy="6858000"/>
+          </a:xfrm>
+          <a:prstGeom prst="rect">
+            <a:avLst/>
+          </a:prstGeom>
+          <a:solidFill>
+            <a:srgbClr val="FAF7F2"/>
+          </a:solidFill>
+          <a:ln/>
+        </p:spPr>
+        <p:txBody>
+          <a:bodyPr/>
+          <a:p/>
+        </p:txBody>
+      </p:sp>
+      <p:sp>
+        <p:nvSpPr>
+          <p:cNvPr id="65" name="" descr="{&quot;isTemplate&quot;:true,&quot;type&quot;:&quot;text&quot;}"/>
+          <p:cNvSpPr txBox="1"/>
+          <p:nvPr/>
+        </p:nvSpPr>
+        <p:spPr>
+          <a:xfrm rot="0" flipH="0" flipV="0">
+            <a:off x="609600" y="381000"/>
+            <a:ext cx="10972800" cy="514350"/>
+          </a:xfrm>
+          <a:prstGeom prst="rect"/>
+        </p:spPr>
+        <p:txBody>
+          <a:bodyPr wrap="none" lIns="0" tIns="0" rIns="0" bIns="0"/>
+          <a:p>
+            <a:pPr>
+              <a:lnSpc>
+                <a:spcPct val="130000"/>
+              </a:lnSpc>
+            </a:pPr>
+            <a:r>
+              <a:rPr lang="en-US" sz="2550" b="1">
+                <a:solidFill>
+                  <a:srgbClr val="51277C"/>
+                </a:solidFill>
+                <a:latin typeface="Trebuchet MS"/>
+                <a:ea typeface="Trebuchet MS"/>
+              </a:rPr>
               <a:t>Cari menu</a:t>
             </a:r>
             <a:endParaRPr/>
@@ -3154,7 +3621,7 @@
       </p:sp>
       <p:sp>
         <p:nvSpPr>
-          <p:cNvPr id="50" name=""/>
+          <p:cNvPr id="66" name=""/>
           <p:cNvSpPr/>
           <p:nvPr/>
         </p:nvSpPr>
@@ -3175,15 +3642,12 @@
         </p:spPr>
         <p:txBody>
           <a:bodyPr/>
-          <a:p>
-            <a:pPr/>
-            <a:endParaRPr/>
-          </a:p>
-        </p:txBody>
-      </p:sp>
-      <p:sp>
-        <p:nvSpPr>
-          <p:cNvPr id="51" name=""/>
+          <a:p/>
+        </p:txBody>
+      </p:sp>
+      <p:sp>
+        <p:nvSpPr>
+          <p:cNvPr id="67" name=""/>
           <p:cNvSpPr/>
           <p:nvPr/>
         </p:nvSpPr>
@@ -3212,15 +3676,12 @@
         </p:spPr>
         <p:txBody>
           <a:bodyPr/>
-          <a:p>
-            <a:pPr/>
-            <a:endParaRPr/>
-          </a:p>
-        </p:txBody>
-      </p:sp>
-      <p:sp>
-        <p:nvSpPr>
-          <p:cNvPr id="52" name="" descr="{&quot;isTemplate&quot;:true,&quot;type&quot;:&quot;text&quot;}"/>
+          <a:p/>
+        </p:txBody>
+      </p:sp>
+      <p:sp>
+        <p:nvSpPr>
+          <p:cNvPr id="68" name="" descr="{&quot;isTemplate&quot;:true,&quot;type&quot;:&quot;text&quot;}"/>
           <p:cNvSpPr txBox="1"/>
           <p:nvPr/>
         </p:nvSpPr>
@@ -3257,7 +3718,7 @@
       </p:sp>
       <p:sp>
         <p:nvSpPr>
-          <p:cNvPr id="53" name="" descr="{&quot;isTemplate&quot;:true,&quot;type&quot;:&quot;text&quot;}"/>
+          <p:cNvPr id="69" name="" descr="{&quot;isTemplate&quot;:true,&quot;type&quot;:&quot;text&quot;}"/>
           <p:cNvSpPr txBox="1"/>
           <p:nvPr/>
         </p:nvSpPr>
@@ -3292,14 +3753,14 @@
       </p:sp>
       <p:pic>
         <p:nvPicPr>
-          <p:cNvPr id="54" name=""/>
+          <p:cNvPr id="70" name=""/>
           <p:cNvPicPr>
             <a:picLocks noChangeAspect="1"/>
           </p:cNvPicPr>
           <p:nvPr/>
         </p:nvPicPr>
         <p:blipFill>
-          <a:blip r:embed="rId1">
+          <a:blip>
             <a:extLst>
               <a:ext uri="{96DAC541-7B7A-43D3-8B79-37D633B846F1}">
                 <asvg:svgBlip r:embed="rId1"/>
@@ -3323,7 +3784,7 @@
       </p:pic>
       <p:sp>
         <p:nvSpPr>
-          <p:cNvPr id="55" name="" descr="{&quot;isTemplate&quot;:true,&quot;type&quot;:&quot;text&quot;}"/>
+          <p:cNvPr id="71" name="" descr="{&quot;isTemplate&quot;:true,&quot;type&quot;:&quot;text&quot;}"/>
           <p:cNvSpPr txBox="1"/>
           <p:nvPr/>
         </p:nvSpPr>
@@ -3362,7 +3823,7 @@
       </p:sp>
       <p:sp>
         <p:nvSpPr>
-          <p:cNvPr id="56" name=""/>
+          <p:cNvPr id="72" name=""/>
           <p:cNvSpPr/>
           <p:nvPr/>
         </p:nvSpPr>
@@ -3390,15 +3851,12 @@
         </p:spPr>
         <p:txBody>
           <a:bodyPr/>
-          <a:p>
-            <a:pPr/>
-            <a:endParaRPr/>
-          </a:p>
-        </p:txBody>
-      </p:sp>
-      <p:sp>
-        <p:nvSpPr>
-          <p:cNvPr id="57" name=""/>
+          <a:p/>
+        </p:txBody>
+      </p:sp>
+      <p:sp>
+        <p:nvSpPr>
+          <p:cNvPr id="73" name=""/>
           <p:cNvSpPr/>
           <p:nvPr/>
         </p:nvSpPr>
@@ -3450,15 +3908,12 @@
         </p:spPr>
         <p:txBody>
           <a:bodyPr/>
-          <a:p>
-            <a:pPr/>
-            <a:endParaRPr/>
-          </a:p>
-        </p:txBody>
-      </p:sp>
-      <p:sp>
-        <p:nvSpPr>
-          <p:cNvPr id="58" name=""/>
+          <a:p/>
+        </p:txBody>
+      </p:sp>
+      <p:sp>
+        <p:nvSpPr>
+          <p:cNvPr id="74" name=""/>
           <p:cNvSpPr/>
           <p:nvPr/>
         </p:nvSpPr>
@@ -3481,22 +3936,19 @@
         </p:spPr>
         <p:txBody>
           <a:bodyPr/>
-          <a:p>
-            <a:pPr/>
-            <a:endParaRPr/>
-          </a:p>
+          <a:p/>
         </p:txBody>
       </p:sp>
       <p:pic>
         <p:nvPicPr>
-          <p:cNvPr id="59" name=""/>
+          <p:cNvPr id="75" name=""/>
           <p:cNvPicPr>
             <a:picLocks noChangeAspect="1"/>
           </p:cNvPicPr>
           <p:nvPr/>
         </p:nvPicPr>
         <p:blipFill>
-          <a:blip r:embed="rId2">
+          <a:blip>
             <a:extLst>
               <a:ext uri="{96DAC541-7B7A-43D3-8B79-37D633B846F1}">
                 <asvg:svgBlip r:embed="rId2"/>
@@ -3520,7 +3972,7 @@
       </p:pic>
       <p:sp>
         <p:nvSpPr>
-          <p:cNvPr id="60" name="" descr="{&quot;isTemplate&quot;:true,&quot;type&quot;:&quot;text&quot;}"/>
+          <p:cNvPr id="76" name="" descr="{&quot;isTemplate&quot;:true,&quot;type&quot;:&quot;text&quot;}"/>
           <p:cNvSpPr txBox="1"/>
           <p:nvPr/>
         </p:nvSpPr>
@@ -3555,7 +4007,7 @@
       </p:sp>
       <p:sp>
         <p:nvSpPr>
-          <p:cNvPr id="61" name="" descr="{&quot;isTemplate&quot;:true,&quot;type&quot;:&quot;text&quot;}"/>
+          <p:cNvPr id="77" name="" descr="{&quot;isTemplate&quot;:true,&quot;type&quot;:&quot;text&quot;}"/>
           <p:cNvSpPr txBox="1"/>
           <p:nvPr/>
         </p:nvSpPr>
@@ -3590,7 +4042,7 @@
       </p:sp>
       <p:sp>
         <p:nvSpPr>
-          <p:cNvPr id="62" name=""/>
+          <p:cNvPr id="78" name=""/>
           <p:cNvSpPr/>
           <p:nvPr/>
         </p:nvSpPr>
@@ -3618,15 +4070,12 @@
         </p:spPr>
         <p:txBody>
           <a:bodyPr/>
-          <a:p>
-            <a:pPr/>
-            <a:endParaRPr/>
-          </a:p>
-        </p:txBody>
-      </p:sp>
-      <p:sp>
-        <p:nvSpPr>
-          <p:cNvPr id="63" name=""/>
+          <a:p/>
+        </p:txBody>
+      </p:sp>
+      <p:sp>
+        <p:nvSpPr>
+          <p:cNvPr id="79" name=""/>
           <p:cNvSpPr/>
           <p:nvPr/>
         </p:nvSpPr>
@@ -3678,15 +4127,12 @@
         </p:spPr>
         <p:txBody>
           <a:bodyPr/>
-          <a:p>
-            <a:pPr/>
-            <a:endParaRPr/>
-          </a:p>
-        </p:txBody>
-      </p:sp>
-      <p:sp>
-        <p:nvSpPr>
-          <p:cNvPr id="64" name=""/>
+          <a:p/>
+        </p:txBody>
+      </p:sp>
+      <p:sp>
+        <p:nvSpPr>
+          <p:cNvPr id="80" name=""/>
           <p:cNvSpPr/>
           <p:nvPr/>
         </p:nvSpPr>
@@ -3709,22 +4155,19 @@
         </p:spPr>
         <p:txBody>
           <a:bodyPr/>
-          <a:p>
-            <a:pPr/>
-            <a:endParaRPr/>
-          </a:p>
+          <a:p/>
         </p:txBody>
       </p:sp>
       <p:pic>
         <p:nvPicPr>
-          <p:cNvPr id="65" name=""/>
+          <p:cNvPr id="81" name=""/>
           <p:cNvPicPr>
             <a:picLocks noChangeAspect="1"/>
           </p:cNvPicPr>
           <p:nvPr/>
         </p:nvPicPr>
         <p:blipFill>
-          <a:blip r:embed="rId3">
+          <a:blip>
             <a:extLst>
               <a:ext uri="{96DAC541-7B7A-43D3-8B79-37D633B846F1}">
                 <asvg:svgBlip r:embed="rId3"/>
@@ -3748,7 +4191,7 @@
       </p:pic>
       <p:sp>
         <p:nvSpPr>
-          <p:cNvPr id="66" name="" descr="{&quot;isTemplate&quot;:true,&quot;type&quot;:&quot;text&quot;}"/>
+          <p:cNvPr id="82" name="" descr="{&quot;isTemplate&quot;:true,&quot;type&quot;:&quot;text&quot;}"/>
           <p:cNvSpPr txBox="1"/>
           <p:nvPr/>
         </p:nvSpPr>
@@ -3783,7 +4226,7 @@
       </p:sp>
       <p:sp>
         <p:nvSpPr>
-          <p:cNvPr id="67" name="" descr="{&quot;isTemplate&quot;:true,&quot;type&quot;:&quot;text&quot;}"/>
+          <p:cNvPr id="83" name="" descr="{&quot;isTemplate&quot;:true,&quot;type&quot;:&quot;text&quot;}"/>
           <p:cNvSpPr txBox="1"/>
           <p:nvPr/>
         </p:nvSpPr>
@@ -3818,7 +4261,7 @@
       </p:sp>
       <p:sp>
         <p:nvSpPr>
-          <p:cNvPr id="68" name=""/>
+          <p:cNvPr id="84" name=""/>
           <p:cNvSpPr/>
           <p:nvPr/>
         </p:nvSpPr>
@@ -3846,15 +4289,12 @@
         </p:spPr>
         <p:txBody>
           <a:bodyPr/>
-          <a:p>
-            <a:pPr/>
-            <a:endParaRPr/>
-          </a:p>
-        </p:txBody>
-      </p:sp>
-      <p:sp>
-        <p:nvSpPr>
-          <p:cNvPr id="69" name=""/>
+          <a:p/>
+        </p:txBody>
+      </p:sp>
+      <p:sp>
+        <p:nvSpPr>
+          <p:cNvPr id="85" name=""/>
           <p:cNvSpPr/>
           <p:nvPr/>
         </p:nvSpPr>
@@ -3906,15 +4346,12 @@
         </p:spPr>
         <p:txBody>
           <a:bodyPr/>
-          <a:p>
-            <a:pPr/>
-            <a:endParaRPr/>
-          </a:p>
-        </p:txBody>
-      </p:sp>
-      <p:sp>
-        <p:nvSpPr>
-          <p:cNvPr id="70" name="" descr="{&quot;isTemplate&quot;:true,&quot;type&quot;:&quot;text&quot;}"/>
+          <a:p/>
+        </p:txBody>
+      </p:sp>
+      <p:sp>
+        <p:nvSpPr>
+          <p:cNvPr id="86" name="" descr="{&quot;isTemplate&quot;:true,&quot;type&quot;:&quot;text&quot;}"/>
           <p:cNvSpPr txBox="1"/>
           <p:nvPr/>
         </p:nvSpPr>
@@ -3949,7 +4386,7 @@
       </p:sp>
       <p:sp>
         <p:nvSpPr>
-          <p:cNvPr id="71" name="" descr="{&quot;isTemplate&quot;:true,&quot;type&quot;:&quot;text&quot;}"/>
+          <p:cNvPr id="87" name="" descr="{&quot;isTemplate&quot;:true,&quot;type&quot;:&quot;text&quot;}"/>
           <p:cNvSpPr txBox="1"/>
           <p:nvPr/>
         </p:nvSpPr>
@@ -3986,7 +4423,7 @@
       </p:sp>
       <p:sp>
         <p:nvSpPr>
-          <p:cNvPr id="72" name="" descr="{&quot;isTemplate&quot;:true,&quot;type&quot;:&quot;text&quot;}"/>
+          <p:cNvPr id="88" name="" descr="{&quot;isTemplate&quot;:true,&quot;type&quot;:&quot;text&quot;}"/>
           <p:cNvSpPr txBox="1"/>
           <p:nvPr/>
         </p:nvSpPr>
@@ -4021,7 +4458,7 @@
       </p:sp>
       <p:sp>
         <p:nvSpPr>
-          <p:cNvPr id="73" name="" descr="{&quot;isTemplate&quot;:true,&quot;type&quot;:&quot;text&quot;}"/>
+          <p:cNvPr id="89" name="" descr="{&quot;isTemplate&quot;:true,&quot;type&quot;:&quot;text&quot;}"/>
           <p:cNvSpPr txBox="1"/>
           <p:nvPr/>
         </p:nvSpPr>
@@ -4056,7 +4493,7 @@
       </p:sp>
       <p:sp>
         <p:nvSpPr>
-          <p:cNvPr id="74" name="" descr="{&quot;isTemplate&quot;:true,&quot;type&quot;:&quot;text&quot;}"/>
+          <p:cNvPr id="90" name="" descr="{&quot;isTemplate&quot;:true,&quot;type&quot;:&quot;text&quot;}"/>
           <p:cNvSpPr txBox="1"/>
           <p:nvPr/>
         </p:nvSpPr>
@@ -4083,7 +4520,7 @@
                 <a:latin typeface="Verdana"/>
                 <a:ea typeface="Verdana"/>
               </a:rPr>
-              <a:t>12 / 15</a:t>
+              <a:t>13 / 16</a:t>
             </a:r>
             <a:endParaRPr/>
           </a:p>
@@ -4094,12 +4531,12 @@
 </p:sld>
 </file>
 
-<file path=ppt/slides/slide13.xml><?xml version="1.0" encoding="utf-8"?>
+<file path=ppt/slides/slide14.xml><?xml version="1.0" encoding="utf-8"?>
 <p:sld xmlns:p="http://schemas.openxmlformats.org/presentationml/2006/main" xmlns:a="http://schemas.openxmlformats.org/drawingml/2006/main" xmlns:asvg="http://schemas.microsoft.com/office/drawing/2016/SVG/main" xmlns:r="http://schemas.openxmlformats.org/officeDocument/2006/relationships" xmlns:mc="http://schemas.openxmlformats.org/markup-compatibility/2006" mc:Ignorable="asvg">
   <p:cSld>
     <p:spTree>
       <p:nvGrpSpPr>
-        <p:cNvPr id="75" name=""/>
+        <p:cNvPr id="91" name="" descr="&lt;Slide&#10;    style={{&#10;        width: '1280px',&#10;        height: '720px',&#10;        background: 'linear-gradient(135deg, #51277C 0%, #7A45A8 100%)',&#10;        paddingTop: 60,&#10;        paddingBottom: 60,&#10;        paddingLeft: 72,&#10;        paddingRight: 72,&#10;        justifyContent: 'center',&#10;        position: 'relative',&#10;        overflow: 'hidden',&#10;    }}&#10;&gt;&#10;    {/* dekorasi: lingkaran centang + bintang */}&#10;    &lt;Box&#10;        style={{&#10;            position: 'absolute',&#10;            bottom: -130,&#10;            right: -40,&#10;            width: 420,&#10;            height: 420,&#10;            borderRadius: 210,&#10;            background: '#AFC440',&#10;            opacity: 0.16,&#10;        }}&#10;    /&gt;&#10;    &lt;Box style={{ position: 'absolute', top: 78, right: 96, opacity: 0.22 }}&gt;&#10;        &lt;svg width={230} height={230} viewBox='0 0 230 230'&gt;&#10;            &lt;circle cx='115' cy='115' r='96' fill='none' stroke='#FFFFFF' strokeWidth='8' /&gt;&#10;            &lt;path&#10;                d='M72 118 l30 32 l60 -70'&#10;                fill='none'&#10;                stroke='#AFC440'&#10;                strokeWidth='16'&#10;                strokeLinecap='round'&#10;                strokeLinejoin='round'&#10;            /&gt;&#10;            &lt;path&#10;                d='M196 36 l8 18 l18 8 l-18 8 l-8 18 l-8 -18 l-18 -8 l18 -8 z'&#10;                fill='#F3B26C'&#10;            /&gt;&#10;        &lt;/svg&gt;&#10;    &lt;/Box&gt;&#10;&#10;    {/* isi */}&#10;    &lt;Box style={{ position: 'relative', zIndex: 1, width: '62%' }}&gt;&#10;        &lt;Box style={{ flexDirection: 'row', alignItems: 'center', gap: 14, alignSelf: 'flex-start' }}&gt;&#10;            &lt;Text&#10;                style={{&#10;                    fontSize: 76,&#10;                    fontWeight: 'bold',&#10;                    color: '#F3B26C',&#10;                    fontFamily: 'Trebuchet MS',&#10;                    lineHeight: 1,&#10;                }}&#10;            &gt;&#10;                04&#10;            &lt;/Text&gt;&#10;            &lt;Box style={{ width: 3, height: 52, background: 'rgba(255,255,255,0.45)' }} /&gt;&#10;            &lt;Text style={{ fontSize: 19, color: 'rgba(255,255,255,0.8)', fontFamily: 'Verdana' }}&gt;&#10;                Bagian terakhir&#10;            &lt;/Text&gt;&#10;        &lt;/Box&gt;&#10;&#10;        &lt;Text&#10;            style={{&#10;                marginTop: 26,&#10;                fontSize: 60,&#10;                fontWeight: 'bold',&#10;                color: '#FFFFFF',&#10;                fontFamily: 'Trebuchet MS',&#10;                lineHeight: 1.15,&#10;            }}&#10;        &gt;&#10;            Yang perlu{'\n'}diingat&#10;        &lt;/Text&gt;&#10;&#10;        &lt;Text&#10;            style={{&#10;                marginTop: 24,&#10;                fontSize: 22,&#10;                color: 'rgba(255,255,255,0.88)',&#10;                fontFamily: 'Verdana',&#10;                lineHeight: 1.5,&#10;            }}&#10;        &gt;&#10;            Empat hal yang paling sering ditanyakan orang tua.&#10;        &lt;/Text&gt;&#10;    &lt;/Box&gt;&#10;&lt;/Slide&gt;&#10;"/>
         <p:cNvGrpSpPr/>
         <p:nvPr/>
       </p:nvGrpSpPr>
@@ -4113,7 +4550,7 @@
       </p:grpSpPr>
       <p:sp>
         <p:nvSpPr>
-          <p:cNvPr id="76" name=""/>
+          <p:cNvPr id="92" name=""/>
           <p:cNvSpPr/>
           <p:nvPr/>
         </p:nvSpPr>
@@ -4140,15 +4577,12 @@
         </p:spPr>
         <p:txBody>
           <a:bodyPr/>
-          <a:p>
-            <a:pPr/>
-            <a:endParaRPr/>
-          </a:p>
-        </p:txBody>
-      </p:sp>
-      <p:sp>
-        <p:nvSpPr>
-          <p:cNvPr id="77" name=""/>
+          <a:p/>
+        </p:txBody>
+      </p:sp>
+      <p:sp>
+        <p:nvSpPr>
+          <p:cNvPr id="93" name=""/>
           <p:cNvSpPr/>
           <p:nvPr/>
         </p:nvSpPr>
@@ -4536,22 +4970,19 @@
         </p:spPr>
         <p:txBody>
           <a:bodyPr/>
-          <a:p>
-            <a:pPr/>
-            <a:endParaRPr/>
-          </a:p>
+          <a:p/>
         </p:txBody>
       </p:sp>
       <p:pic>
         <p:nvPicPr>
-          <p:cNvPr id="78" name=""/>
+          <p:cNvPr id="94" name=""/>
           <p:cNvPicPr>
             <a:picLocks noChangeAspect="1"/>
           </p:cNvPicPr>
           <p:nvPr/>
         </p:nvPicPr>
         <p:blipFill>
-          <a:blip r:embed="rId1">
+          <a:blip>
             <a:alphaModFix amt="22000"/>
             <a:extLst>
               <a:ext uri="{96DAC541-7B7A-43D3-8B79-37D633B846F1}">
@@ -4576,7 +5007,7 @@
       </p:pic>
       <p:sp>
         <p:nvSpPr>
-          <p:cNvPr id="79" name="" descr="{&quot;isTemplate&quot;:true,&quot;type&quot;:&quot;text&quot;}"/>
+          <p:cNvPr id="95" name="" descr="{&quot;isTemplate&quot;:true,&quot;type&quot;:&quot;text&quot;}"/>
           <p:cNvSpPr txBox="1"/>
           <p:nvPr/>
         </p:nvSpPr>
@@ -4611,7 +5042,7 @@
       </p:sp>
       <p:sp>
         <p:nvSpPr>
-          <p:cNvPr id="80" name=""/>
+          <p:cNvPr id="96" name=""/>
           <p:cNvSpPr/>
           <p:nvPr/>
         </p:nvSpPr>
@@ -4632,15 +5063,12 @@
         </p:spPr>
         <p:txBody>
           <a:bodyPr/>
-          <a:p>
-            <a:pPr/>
-            <a:endParaRPr/>
-          </a:p>
-        </p:txBody>
-      </p:sp>
-      <p:sp>
-        <p:nvSpPr>
-          <p:cNvPr id="81" name="" descr="{&quot;isTemplate&quot;:true,&quot;type&quot;:&quot;text&quot;}"/>
+          <a:p/>
+        </p:txBody>
+      </p:sp>
+      <p:sp>
+        <p:nvSpPr>
+          <p:cNvPr id="97" name="" descr="{&quot;isTemplate&quot;:true,&quot;type&quot;:&quot;text&quot;}"/>
           <p:cNvSpPr txBox="1"/>
           <p:nvPr/>
         </p:nvSpPr>
@@ -4677,7 +5105,7 @@
       </p:sp>
       <p:sp>
         <p:nvSpPr>
-          <p:cNvPr id="82" name="" descr="{&quot;isTemplate&quot;:true,&quot;type&quot;:&quot;text&quot;}"/>
+          <p:cNvPr id="98" name="" descr="{&quot;isTemplate&quot;:true,&quot;type&quot;:&quot;text&quot;}"/>
           <p:cNvSpPr txBox="1"/>
           <p:nvPr/>
         </p:nvSpPr>
@@ -4730,7 +5158,7 @@
       </p:sp>
       <p:sp>
         <p:nvSpPr>
-          <p:cNvPr id="83" name="" descr="{&quot;isTemplate&quot;:true,&quot;type&quot;:&quot;text&quot;}"/>
+          <p:cNvPr id="99" name="" descr="{&quot;isTemplate&quot;:true,&quot;type&quot;:&quot;text&quot;}"/>
           <p:cNvSpPr txBox="1"/>
           <p:nvPr/>
         </p:nvSpPr>
@@ -4770,12 +5198,12 @@
 </p:sld>
 </file>
 
-<file path=ppt/slides/slide14.xml><?xml version="1.0" encoding="utf-8"?>
+<file path=ppt/slides/slide15.xml><?xml version="1.0" encoding="utf-8"?>
 <p:sld xmlns:p="http://schemas.openxmlformats.org/presentationml/2006/main" xmlns:a="http://schemas.openxmlformats.org/drawingml/2006/main" xmlns:asvg="http://schemas.microsoft.com/office/drawing/2016/SVG/main" xmlns:r="http://schemas.openxmlformats.org/officeDocument/2006/relationships" xmlns:mc="http://schemas.openxmlformats.org/markup-compatibility/2006" mc:Ignorable="asvg">
   <p:cSld>
     <p:spTree>
       <p:nvGrpSpPr>
-        <p:cNvPr id="84" name="" descr="&lt;Slide&#13;&#10;    style={{&#13;&#10;        width: '1280px',&#13;&#10;        height: '720px',&#13;&#10;        background: '#FAF7F2',&#13;&#10;        paddingTop: 20,&#13;&#10;        paddingBottom: 20,&#13;&#10;        paddingLeft: 64,&#13;&#10;        paddingRight: 64,&#13;&#10;    }}&#13;&#10;&gt;&#13;&#10;    {/* ── A · blok judul ── */}&#13;&#10;    &lt;Box style={{ height: 110, justifyContent: 'center' }}&gt;&#13;&#10;        &lt;Text&#13;&#10;            style={{&#13;&#10;                fontSize: 34,&#13;&#10;                fontWeight: 'bold',&#13;&#10;                color: '#51277C',&#13;&#10;                fontFamily: 'Trebuchet MS',&#13;&#10;                lineHeight: 1.3,&#13;&#10;            }}&#13;&#10;        &gt;&#13;&#10;            Empat hal yang perlu diingat&#13;&#10;        &lt;/Text&gt;&#13;&#10;        &lt;Box style={{ marginTop: 10, width: 72, height: 6, borderRadius: 3, background: '#51277C' }} /&gt;&#13;&#10;    &lt;/Box&gt;&#13;&#10;&#13;&#10;    {/* ── B · area konten ── */}&#13;&#10;    &lt;Box style={{ height: 530 }}&gt;&#13;&#10;        &lt;Box style={{ height: 470, flexDirection: 'row', gap: 18 }}&gt;&#13;&#10;            {[&#13;&#10;                {&#13;&#10;                    vb: '0 0 512 512',&#13;&#10;                    d: 'M256 0a256 256 0 1 1 0 512A256 256 0 1 1 256 0zM232 120V256c0 8 4 15.5 10.7 20l96 64c11 7.4 25.9 4.4 33.3-6.7s4.4-25.9-6.7-33.3L280 243.2V120c0-13.3-10.7-24-24-24s-24 10.7-24 24z',&#13;&#10;                    t: 'Jadwal muncul setelah diumumkan',&#13;&#10;                    d: 'Jadwal baru tampil setelah korlas atau admin sekolah mengumumkannya. Kalau hari itu belum muncul, berarti belum diumumkan — bukan hilang.',&#13;&#10;                    g: 'Sabar menunggu',&#13;&#10;                },&#13;&#10;                {&#13;&#10;                    vb: '0 0 640 512',&#13;&#10;                    d: 'M144 0a80 80 0 1 1 0 160A80 80 0 1 1 144 0zM512 0a80 80 0 1 1 0 160A80 80 0 1 1 512 0zM0 298.7C0 239.8 47.8 192 106.7 192h42.7c15.9 0 31 3.5 44.6 9.7c-1.3 7.2-1.9 14.7-1.9 22.3c0 38.2 16.8 72.5 43.3 96c-.2 0-.4 0-.7 0H21.3C9.6 320 0 310.4 0 298.7zM405.3 320c-.2 0-.4 0-.7 0c26.6-23.5 43.3-57.8 43.3-96c0-7.6-.7-15-1.9-22.3c13.6-6.3 28.7-9.7 44.6-9.7h42.7C592.2 192 640 239.8 640 298.7c0 11.8-9.6 21.3-21.3 21.3H405.3zM224 224a96 96 0 1 1 192 0 96 96 0 1 1 -192 0zM128 485.3C128 411.7 187.7 352 261.3 352H378.7C452.3 352 512 411.7 512 485.3c0 14.7-11.9 26.7-26.7 26.7H154.7c-14.7 0-26.7-11.9-26.7-26.7z',&#13;&#10;                    t: 'Satu akun untuk beberapa anak',&#13;&#10;                    d: 'Punya dua anak di kelas berbeda tidak perlu akun tambahan. Pilih kelasnya di bagian atas layar, jadwalnya ikut berganti.',&#13;&#10;                    g: 'Tidak perlu daftar ulang',&#13;&#10;                },&#13;&#10;                {&#13;&#10;                    vb: '0 0 576 512',&#13;&#10;                    d: 'M575.8 255.5c0 18-15 32.1-32 32.1h-32l.7 160.2c0 2.7-.2 5.4-.5 8.1V472c0 22.1-17.9 40-40 40H456c-1.1 0-2.2 0-3.3-.1c-1.4 .1-2.8 .1-4.2 .1H416 392c-22.1 0-40-17.9-40-40V448 384c0-17.7-14.3-32-32-32H256c-17.7 0-32 14.3-32 32v64 24c0 22.1-17.9 40-40 40H160 128.1c-1.5 0-3-.1-4.5-.2c-1.2 .1-2.4 .2-3.6 .2H104c-22.1 0-40-17.9-40-40V360c0-.9 0-1.9 .1-2.8V287.6H32c-18 0-32-14-32-32.1c0-9 3-17 10-24L266.4 8c7-7 15-8 22-8s15 2 21 7L564.8 231.5c8 7 12 15 11 24z',&#13;&#10;                    t: 'Ambil tanggal di kelas anak sendiri',&#13;&#10;                    d: 'Setiap kelas punya barisnya sendiri. Ambil tanggal di kelas lain tidak bisa, dan yang sudah ditentukan korlas tidak ikut direbutkan.',&#13;&#10;                    g: 'Adil per kelas',&#13;&#10;                },&#13;&#10;                {&#13;&#10;                    vb: '0 0 512 512',&#13;&#10;                    d: 'M164.9 24.6c-7.7-18.6-28-28.5-47.4-23.2l-88 24C12.1 30.2 0 46 0 64C0 311.4 200.6 512 448 512c18 0 33.8-12.1 38.6-29.5l24-88c5.3-19.4-4.6-39.7-23.2-47.4l-96-40c-16.3-6.8-35.2-2.1-46.3 11.6L304.7 368C234.3 334.7 177.3 277.7 144 207.3L193.3 167c13.7-11.2 18.4-30 11.6-46.3l-40-96z',&#13;&#10;                    t: 'Perubahan lewat korlas kelas',&#13;&#10;                    d: 'Jadwal yang sudah diumumkan tidak bisa diubah sendiri. Sampaikan ke korlas kelas atau admin sekolah bila ada keperluan mendadak.',&#13;&#10;                    g: 'Jangan diubah sendiri',&#13;&#10;                },&#13;&#10;            ].map((c, idx) =&gt; (&#13;&#10;                &lt;Box&#13;&#10;                    key={idx}&#13;&#10;                    style={{&#13;&#10;                        flex: 1,&#13;&#10;                        height: '100%',&#13;&#10;                        background: '#FFFFFF',&#13;&#10;                        borderRadius: 16,&#13;&#10;                        boxShadow: '0 4px 20px rgba(0,0,0,0.08)',&#13;&#10;                        padding: 24,&#13;&#10;                        borderTop: '8px solid #AFC440',&#13;&#10;                    }}&#13;&#10;                &gt;&#13;&#10;                    &lt;Box&#13;&#10;                        style={{&#13;&#10;                            width: 60,&#13;&#10;                            height: 60,&#13;&#10;                            borderRadius: 30,&#13;&#10;                            background: 'rgba(81,39,124,0.10)',&#13;&#10;                            justifyContent: 'center',&#13;&#10;                            alignItems: 'center',&#13;&#10;                        }}&#13;&#10;                    &gt;&#13;&#10;                        &lt;svg width={30} height={30} viewBox={c.vb} xmlns=&quot;http://www.w3.org/2000/svg&quot;&gt;&lt;path fill=&quot;#51277C&quot; d={c.d} /&gt;&lt;/svg&gt;&#13;&#10;                    &lt;/Box&gt;&#13;&#10;&#13;&#10;                    &lt;Text&#13;&#10;                        style={{&#13;&#10;                            marginTop: 16,&#13;&#10;                            fontSize: 23,&#13;&#10;                            fontWeight: 'bold',&#13;&#10;                            color: '#51277C',&#13;&#10;                            fontFamily: 'Trebuchet MS',&#13;&#10;                            lineHeight: 1.32,&#13;&#10;                        }}&#13;&#10;                    &gt;&#13;&#10;                        {c.t}&#13;&#10;                    &lt;/Text&gt;&#13;&#10;&#13;&#10;                    &lt;Box&#13;&#10;                        style={{&#13;&#10;                            marginTop: 12,&#13;&#10;                            width: 44,&#13;&#10;                            height: 3,&#13;&#10;                            borderRadius: 2,&#13;&#10;                            background: '#AFC440',&#13;&#10;                        }}&#13;&#10;                    /&gt;&#13;&#10;&#13;&#10;                    &lt;Text&#13;&#10;                        style={{&#13;&#10;                            marginTop: 12,&#13;&#10;                            fontSize: 17,&#13;&#10;                            color: '#6B6478',&#13;&#10;                            fontFamily: 'Verdana',&#13;&#10;                            lineHeight: 1.5,&#13;&#10;                        }}&#13;&#10;                    &gt;&#13;&#10;                        {c.d}&#13;&#10;                    &lt;/Text&gt;&#13;&#10;&#13;&#10;                    &lt;Box style={{ marginTop: 'auto' }}&gt;&#13;&#10;                        &lt;Text&#13;&#10;                            style={{&#13;&#10;                                fontSize: 16,&#13;&#10;                                color: '#51277C',&#13;&#10;                                fontFamily: 'Verdana',&#13;&#10;                                fontWeight: 'bold',&#13;&#10;                            }}&#13;&#10;                        &gt;&#13;&#10;                            {c.g}&#13;&#10;                        &lt;/Text&gt;&#13;&#10;                    &lt;/Box&gt;&#13;&#10;                &lt;/Box&gt;&#13;&#10;            ))}&#13;&#10;        &lt;/Box&gt;&#13;&#10;&#13;&#10;        {/* simpulan */}&#13;&#10;        &lt;Box&#13;&#10;            style={{&#13;&#10;                marginTop: 14,&#13;&#10;                height: 46,&#13;&#10;                background: '#51277C',&#13;&#10;                borderRadius: 14,&#13;&#10;                justifyContent: 'center',&#13;&#10;                alignItems: 'center',&#13;&#10;            }}&#13;&#10;        &gt;&#13;&#10;            &lt;Text&#13;&#10;                style={{&#13;&#10;                    fontSize: 19,&#13;&#10;                    color: '#FFFFFF',&#13;&#10;                    fontFamily: 'Verdana',&#13;&#10;                    fontWeight: 'bold',&#13;&#10;                }}&#13;&#10;            &gt;&#13;&#10;                Intinya: satu akun, satu aplikasi, dan semua perubahan disampaikan lewat korlas kelas.&#13;&#10;            &lt;/Text&gt;&#13;&#10;        &lt;/Box&gt;&#13;&#10;    &lt;/Box&gt;&#13;&#10;&#13;&#10;    {/* ── C · bilah kaki ── */}&#13;&#10;    &lt;Box&#13;&#10;        style={{&#13;&#10;            height: 40,&#13;&#10;            flexDirection: 'row',&#13;&#10;            alignItems: 'center',&#13;&#10;            justifyContent: 'space-between',&#13;&#10;        }}&#13;&#10;    &gt;&#13;&#10;        &lt;Text style={{ fontSize: 14, color: '#6B6478', fontFamily: 'Verdana' }}&gt;&#13;&#10;            Pizza Snack Play · Panduan Orang Tua&#13;&#10;        &lt;/Text&gt;&#13;&#10;        &lt;Text style={{ fontSize: 14, color: '#6B6478', fontFamily: 'Verdana' }}&gt;14 / 15&lt;/Text&gt;&#13;&#10;    &lt;/Box&gt;&#13;&#10;&lt;/Slide&gt;&#13;&#10;"/>
+        <p:cNvPr id="100" name="" descr="&lt;Slide&#10;    style={{&#10;        width: '1280px',&#10;        height: '720px',&#10;        background: '#FAF7F2',&#10;        paddingTop: 20,&#10;        paddingBottom: 20,&#10;        paddingLeft: 64,&#10;        paddingRight: 64,&#10;    }}&#10;&gt;&#10;    {/* ── A · blok judul ── */}&#10;    &lt;Box style={{ height: 110, justifyContent: 'center' }}&gt;&#10;        &lt;Text&#10;            style={{&#10;                fontSize: 34,&#10;                fontWeight: 'bold',&#10;                color: '#51277C',&#10;                fontFamily: 'Trebuchet MS',&#10;                lineHeight: 1.3,&#10;            }}&#10;        &gt;&#10;            Empat hal yang perlu diingat&#10;        &lt;/Text&gt;&#10;        &lt;Box style={{ marginTop: 10, width: 72, height: 6, borderRadius: 3, background: '#51277C' }} /&gt;&#10;    &lt;/Box&gt;&#10;&#10;    {/* ── B · area konten ── */}&#10;    &lt;Box style={{ height: 530 }}&gt;&#10;        &lt;Box style={{ height: 470, flexDirection: 'row', gap: 18 }}&gt;&#10;            {[&#10;                {&#10;                    vb: '0 0 512 512',&#10;                    d: 'M256 0a256 256 0 1 1 0 512A256 256 0 1 1 256 0zM232 120V256c0 8 4 15.5 10.7 20l96 64c11 7.4 25.9 4.4 33.3-6.7s4.4-25.9-6.7-33.3L280 243.2V120c0-13.3-10.7-24-24-24s-24 10.7-24 24z',&#10;                    t: 'Jadwal muncul setelah diumumkan',&#10;                    d: 'Jadwal baru tampil setelah korlas atau admin sekolah mengumumkannya. Kalau hari itu belum muncul, berarti belum diumumkan — bukan hilang.',&#10;                    g: 'Sabar menunggu',&#10;                },&#10;                {&#10;                    vb: '0 0 640 512',&#10;                    d: 'M144 0a80 80 0 1 1 0 160A80 80 0 1 1 144 0zM512 0a80 80 0 1 1 0 160A80 80 0 1 1 512 0zM0 298.7C0 239.8 47.8 192 106.7 192h42.7c15.9 0 31 3.5 44.6 9.7c-1.3 7.2-1.9 14.7-1.9 22.3c0 38.2 16.8 72.5 43.3 96c-.2 0-.4 0-.7 0H21.3C9.6 320 0 310.4 0 298.7zM405.3 320c-.2 0-.4 0-.7 0c26.6-23.5 43.3-57.8 43.3-96c0-7.6-.7-15-1.9-22.3c13.6-6.3 28.7-9.7 44.6-9.7h42.7C592.2 192 640 239.8 640 298.7c0 11.8-9.6 21.3-21.3 21.3H405.3zM224 224a96 96 0 1 1 192 0 96 96 0 1 1 -192 0zM128 485.3C128 411.7 187.7 352 261.3 352H378.7C452.3 352 512 411.7 512 485.3c0 14.7-11.9 26.7-26.7 26.7H154.7c-14.7 0-26.7-11.9-26.7-26.7z',&#10;                    t: 'Satu akun untuk beberapa anak',&#10;                    d: 'Punya dua anak di kelas berbeda tidak perlu akun tambahan. Pilih kelasnya di bagian atas layar, jadwalnya ikut berganti.',&#10;                    g: 'Tidak perlu daftar ulang',&#10;                },&#10;                {&#10;                    vb: '0 0 576 512',&#10;                    d: 'M575.8 255.5c0 18-15 32.1-32 32.1h-32l.7 160.2c0 2.7-.2 5.4-.5 8.1V472c0 22.1-17.9 40-40 40H456c-1.1 0-2.2 0-3.3-.1c-1.4 .1-2.8 .1-4.2 .1H416 392c-22.1 0-40-17.9-40-40V448 384c0-17.7-14.3-32-32-32H256c-17.7 0-32 14.3-32 32v64 24c0 22.1-17.9 40-40 40H160 128.1c-1.5 0-3-.1-4.5-.2c-1.2 .1-2.4 .2-3.6 .2H104c-22.1 0-40-17.9-40-40V360c0-.9 0-1.9 .1-2.8V287.6H32c-18 0-32-14-32-32.1c0-9 3-17 10-24L266.4 8c7-7 15-8 22-8s15 2 21 7L564.8 231.5c8 7 12 15 11 24z',&#10;                    t: 'Ambil tanggal di kelas anak sendiri',&#10;                    d: 'Setiap kelas punya barisnya sendiri. Ambil tanggal di kelas lain tidak bisa, dan yang sudah ditentukan korlas tidak ikut direbutkan.',&#10;                    g: 'Adil per kelas',&#10;                },&#10;                {&#10;                    vb: '0 0 512 512',&#10;                    d: 'M164.9 24.6c-7.7-18.6-28-28.5-47.4-23.2l-88 24C12.1 30.2 0 46 0 64C0 311.4 200.6 512 448 512c18 0 33.8-12.1 38.6-29.5l24-88c5.3-19.4-4.6-39.7-23.2-47.4l-96-40c-16.3-6.8-35.2-2.1-46.3 11.6L304.7 368C234.3 334.7 177.3 277.7 144 207.3L193.3 167c13.7-11.2 18.4-30 11.6-46.3l-40-96z',&#10;                    t: 'Perubahan lewat korlas kelas',&#10;                    d: 'Jadwal yang sudah diumumkan tidak bisa diubah sendiri. Sampaikan ke korlas kelas atau admin sekolah bila ada keperluan mendadak.',&#10;                    g: 'Jangan diubah sendiri',&#10;                },&#10;            ].map((c, idx) =&gt; (&#10;                &lt;Box&#10;                    key={idx}&#10;                    style={{&#10;                        flex: 1,&#10;                        height: '100%',&#10;                        background: '#FFFFFF',&#10;                        borderRadius: 16,&#10;                        boxShadow: '0 4px 20px rgba(0,0,0,0.08)',&#10;                        padding: 24,&#10;                        borderTop: '8px solid #AFC440',&#10;                    }}&#10;                &gt;&#10;                    &lt;Box&#10;                        style={{&#10;                            width: 60,&#10;                            height: 60,&#10;                            borderRadius: 30,&#10;                            background: 'rgba(81,39,124,0.10)',&#10;                            justifyContent: 'center',&#10;                            alignItems: 'center',&#10;                        }}&#10;                    &gt;&#10;                        &lt;svg width={30} height={30} viewBox={c.vb} xmlns=&quot;http://www.w3.org/2000/svg&quot;&gt;&lt;path fill=&quot;#51277C&quot; d={c.d} /&gt;&lt;/svg&gt;&#10;                    &lt;/Box&gt;&#10;&#10;                    &lt;Text&#10;                        style={{&#10;                            marginTop: 16,&#10;                            fontSize: 23,&#10;                            fontWeight: 'bold',&#10;                            color: '#51277C',&#10;                            fontFamily: 'Trebuchet MS',&#10;                            lineHeight: 1.32,&#10;                        }}&#10;                    &gt;&#10;                        {c.t}&#10;                    &lt;/Text&gt;&#10;&#10;                    &lt;Box&#10;                        style={{&#10;                            marginTop: 12,&#10;                            width: 44,&#10;                            height: 3,&#10;                            borderRadius: 2,&#10;                            background: '#AFC440',&#10;                        }}&#10;                    /&gt;&#10;&#10;                    &lt;Text&#10;                        style={{&#10;                            marginTop: 12,&#10;                            fontSize: 17,&#10;                            color: '#6B6478',&#10;                            fontFamily: 'Verdana',&#10;                            lineHeight: 1.5,&#10;                        }}&#10;                    &gt;&#10;                        {c.d}&#10;                    &lt;/Text&gt;&#10;&#10;                    &lt;Box style={{ marginTop: 'auto' }}&gt;&#10;                        &lt;Text&#10;                            style={{&#10;                                fontSize: 16,&#10;                                color: '#51277C',&#10;                                fontFamily: 'Verdana',&#10;                                fontWeight: 'bold',&#10;                            }}&#10;                        &gt;&#10;                            {c.g}&#10;                        &lt;/Text&gt;&#10;                    &lt;/Box&gt;&#10;                &lt;/Box&gt;&#10;            ))}&#10;        &lt;/Box&gt;&#10;&#10;        {/* simpulan */}&#10;        &lt;Box&#10;            style={{&#10;                marginTop: 14,&#10;                height: 46,&#10;                background: '#51277C',&#10;                borderRadius: 14,&#10;                justifyContent: 'center',&#10;                alignItems: 'center',&#10;            }}&#10;        &gt;&#10;            &lt;Text&#10;                style={{&#10;                    fontSize: 19,&#10;                    color: '#FFFFFF',&#10;                    fontFamily: 'Verdana',&#10;                    fontWeight: 'bold',&#10;                }}&#10;            &gt;&#10;                Intinya: satu akun, satu aplikasi, dan semua perubahan disampaikan lewat korlas kelas.&#10;            &lt;/Text&gt;&#10;        &lt;/Box&gt;&#10;    &lt;/Box&gt;&#10;&#10;    {/* ── C · bilah kaki ── */}&#10;    &lt;Box&#10;        style={{&#10;            height: 40,&#10;            flexDirection: 'row',&#10;            alignItems: 'center',&#10;            justifyContent: 'space-between',&#10;        }}&#10;    &gt;&#10;        &lt;Text style={{ fontSize: 14, color: '#6B6478', fontFamily: 'Verdana' }}&gt;&#10;            Pizza Snack Play · Panduan Orang Tua&#10;        &lt;/Text&gt;&#10;        &lt;Text style={{ fontSize: 14, color: '#6B6478', fontFamily: 'Verdana' }}&gt;15 / 16&lt;/Text&gt;&#10;    &lt;/Box&gt;&#10;&lt;/Slide&gt;&#10;"/>
         <p:cNvGrpSpPr/>
         <p:nvPr/>
       </p:nvGrpSpPr>
@@ -4789,7 +5217,7 @@
       </p:grpSpPr>
       <p:sp>
         <p:nvSpPr>
-          <p:cNvPr id="85" name=""/>
+          <p:cNvPr id="101" name=""/>
           <p:cNvSpPr/>
           <p:nvPr/>
         </p:nvSpPr>
@@ -4813,7 +5241,7 @@
       </p:sp>
       <p:sp>
         <p:nvSpPr>
-          <p:cNvPr id="86" name="" descr="{&quot;isTemplate&quot;:true,&quot;type&quot;:&quot;text&quot;}"/>
+          <p:cNvPr id="102" name="" descr="{&quot;isTemplate&quot;:true,&quot;type&quot;:&quot;text&quot;}"/>
           <p:cNvSpPr txBox="1"/>
           <p:nvPr/>
         </p:nvSpPr>
@@ -4848,7 +5276,7 @@
       </p:sp>
       <p:sp>
         <p:nvSpPr>
-          <p:cNvPr id="87" name=""/>
+          <p:cNvPr id="103" name=""/>
           <p:cNvSpPr/>
           <p:nvPr/>
         </p:nvSpPr>
@@ -4874,7 +5302,7 @@
       </p:sp>
       <p:sp>
         <p:nvSpPr>
-          <p:cNvPr id="88" name=""/>
+          <p:cNvPr id="104" name=""/>
           <p:cNvSpPr/>
           <p:nvPr/>
         </p:nvSpPr>
@@ -4907,7 +5335,7 @@
       </p:sp>
       <p:sp>
         <p:nvSpPr>
-          <p:cNvPr id="89" name=""/>
+          <p:cNvPr id="105" name=""/>
           <p:cNvSpPr/>
           <p:nvPr/>
         </p:nvSpPr>
@@ -4964,7 +5392,7 @@
       </p:sp>
       <p:sp>
         <p:nvSpPr>
-          <p:cNvPr id="90" name=""/>
+          <p:cNvPr id="106" name=""/>
           <p:cNvSpPr/>
           <p:nvPr/>
         </p:nvSpPr>
@@ -4992,14 +5420,14 @@
       </p:sp>
       <p:pic>
         <p:nvPicPr>
-          <p:cNvPr id="91" name=""/>
+          <p:cNvPr id="107" name=""/>
           <p:cNvPicPr>
             <a:picLocks noChangeAspect="1"/>
           </p:cNvPicPr>
           <p:nvPr/>
         </p:nvPicPr>
         <p:blipFill>
-          <a:blip r:embed="rId1">
+          <a:blip>
             <a:extLst>
               <a:ext uri="{96DAC541-7B7A-43D3-8B79-37D633B846F1}">
                 <asvg:svgBlip r:embed="rId1"/>
@@ -5023,7 +5451,7 @@
       </p:pic>
       <p:sp>
         <p:nvSpPr>
-          <p:cNvPr id="92" name="" descr="{&quot;isTemplate&quot;:true,&quot;type&quot;:&quot;text&quot;}"/>
+          <p:cNvPr id="108" name="" descr="{&quot;isTemplate&quot;:true,&quot;type&quot;:&quot;text&quot;}"/>
           <p:cNvSpPr txBox="1"/>
           <p:nvPr/>
         </p:nvSpPr>
@@ -5060,7 +5488,7 @@
       </p:sp>
       <p:sp>
         <p:nvSpPr>
-          <p:cNvPr id="93" name=""/>
+          <p:cNvPr id="109" name=""/>
           <p:cNvSpPr/>
           <p:nvPr/>
         </p:nvSpPr>
@@ -5086,7 +5514,7 @@
       </p:sp>
       <p:sp>
         <p:nvSpPr>
-          <p:cNvPr id="94" name="" descr="{&quot;isTemplate&quot;:true,&quot;type&quot;:&quot;text&quot;}"/>
+          <p:cNvPr id="110" name="" descr="{&quot;isTemplate&quot;:true,&quot;type&quot;:&quot;text&quot;}"/>
           <p:cNvSpPr txBox="1"/>
           <p:nvPr/>
         </p:nvSpPr>
@@ -5123,7 +5551,7 @@
       </p:sp>
       <p:sp>
         <p:nvSpPr>
-          <p:cNvPr id="95" name="" descr="{&quot;isTemplate&quot;:true,&quot;type&quot;:&quot;text&quot;}"/>
+          <p:cNvPr id="111" name="" descr="{&quot;isTemplate&quot;:true,&quot;type&quot;:&quot;text&quot;}"/>
           <p:cNvSpPr txBox="1"/>
           <p:nvPr/>
         </p:nvSpPr>
@@ -5158,7 +5586,7 @@
       </p:sp>
       <p:sp>
         <p:nvSpPr>
-          <p:cNvPr id="96" name=""/>
+          <p:cNvPr id="112" name=""/>
           <p:cNvSpPr/>
           <p:nvPr/>
         </p:nvSpPr>
@@ -5191,7 +5619,7 @@
       </p:sp>
       <p:sp>
         <p:nvSpPr>
-          <p:cNvPr id="97" name=""/>
+          <p:cNvPr id="113" name=""/>
           <p:cNvSpPr/>
           <p:nvPr/>
         </p:nvSpPr>
@@ -5248,7 +5676,7 @@
       </p:sp>
       <p:sp>
         <p:nvSpPr>
-          <p:cNvPr id="98" name=""/>
+          <p:cNvPr id="114" name=""/>
           <p:cNvSpPr/>
           <p:nvPr/>
         </p:nvSpPr>
@@ -5276,14 +5704,14 @@
       </p:sp>
       <p:pic>
         <p:nvPicPr>
-          <p:cNvPr id="99" name=""/>
+          <p:cNvPr id="115" name=""/>
           <p:cNvPicPr>
             <a:picLocks noChangeAspect="1"/>
           </p:cNvPicPr>
           <p:nvPr/>
         </p:nvPicPr>
         <p:blipFill>
-          <a:blip r:embed="rId2">
+          <a:blip>
             <a:extLst>
               <a:ext uri="{96DAC541-7B7A-43D3-8B79-37D633B846F1}">
                 <asvg:svgBlip r:embed="rId2"/>
@@ -5307,7 +5735,7 @@
       </p:pic>
       <p:sp>
         <p:nvSpPr>
-          <p:cNvPr id="100" name="" descr="{&quot;isTemplate&quot;:true,&quot;type&quot;:&quot;text&quot;}"/>
+          <p:cNvPr id="116" name="" descr="{&quot;isTemplate&quot;:true,&quot;type&quot;:&quot;text&quot;}"/>
           <p:cNvSpPr txBox="1"/>
           <p:nvPr/>
         </p:nvSpPr>
@@ -5344,7 +5772,7 @@
       </p:sp>
       <p:sp>
         <p:nvSpPr>
-          <p:cNvPr id="101" name=""/>
+          <p:cNvPr id="117" name=""/>
           <p:cNvSpPr/>
           <p:nvPr/>
         </p:nvSpPr>
@@ -5370,7 +5798,7 @@
       </p:sp>
       <p:sp>
         <p:nvSpPr>
-          <p:cNvPr id="102" name="" descr="{&quot;isTemplate&quot;:true,&quot;type&quot;:&quot;text&quot;}"/>
+          <p:cNvPr id="118" name="" descr="{&quot;isTemplate&quot;:true,&quot;type&quot;:&quot;text&quot;}"/>
           <p:cNvSpPr txBox="1"/>
           <p:nvPr/>
         </p:nvSpPr>
@@ -5407,7 +5835,7 @@
       </p:sp>
       <p:sp>
         <p:nvSpPr>
-          <p:cNvPr id="103" name="" descr="{&quot;isTemplate&quot;:true,&quot;type&quot;:&quot;text&quot;}"/>
+          <p:cNvPr id="119" name="" descr="{&quot;isTemplate&quot;:true,&quot;type&quot;:&quot;text&quot;}"/>
           <p:cNvSpPr txBox="1"/>
           <p:nvPr/>
         </p:nvSpPr>
@@ -5442,7 +5870,7 @@
       </p:sp>
       <p:sp>
         <p:nvSpPr>
-          <p:cNvPr id="104" name=""/>
+          <p:cNvPr id="120" name=""/>
           <p:cNvSpPr/>
           <p:nvPr/>
         </p:nvSpPr>
@@ -5475,7 +5903,7 @@
       </p:sp>
       <p:sp>
         <p:nvSpPr>
-          <p:cNvPr id="105" name=""/>
+          <p:cNvPr id="121" name=""/>
           <p:cNvSpPr/>
           <p:nvPr/>
         </p:nvSpPr>
@@ -5532,7 +5960,7 @@
       </p:sp>
       <p:sp>
         <p:nvSpPr>
-          <p:cNvPr id="106" name=""/>
+          <p:cNvPr id="122" name=""/>
           <p:cNvSpPr/>
           <p:nvPr/>
         </p:nvSpPr>
@@ -5560,14 +5988,14 @@
       </p:sp>
       <p:pic>
         <p:nvPicPr>
-          <p:cNvPr id="107" name=""/>
+          <p:cNvPr id="123" name=""/>
           <p:cNvPicPr>
             <a:picLocks noChangeAspect="1"/>
           </p:cNvPicPr>
           <p:nvPr/>
         </p:nvPicPr>
         <p:blipFill>
-          <a:blip r:embed="rId3">
+          <a:blip>
             <a:extLst>
               <a:ext uri="{96DAC541-7B7A-43D3-8B79-37D633B846F1}">
                 <asvg:svgBlip r:embed="rId3"/>
@@ -5591,7 +6019,7 @@
       </p:pic>
       <p:sp>
         <p:nvSpPr>
-          <p:cNvPr id="108" name="" descr="{&quot;isTemplate&quot;:true,&quot;type&quot;:&quot;text&quot;}"/>
+          <p:cNvPr id="124" name="" descr="{&quot;isTemplate&quot;:true,&quot;type&quot;:&quot;text&quot;}"/>
           <p:cNvSpPr txBox="1"/>
           <p:nvPr/>
         </p:nvSpPr>
@@ -5628,7 +6056,7 @@
       </p:sp>
       <p:sp>
         <p:nvSpPr>
-          <p:cNvPr id="109" name=""/>
+          <p:cNvPr id="125" name=""/>
           <p:cNvSpPr/>
           <p:nvPr/>
         </p:nvSpPr>
@@ -5654,7 +6082,7 @@
       </p:sp>
       <p:sp>
         <p:nvSpPr>
-          <p:cNvPr id="110" name="" descr="{&quot;isTemplate&quot;:true,&quot;type&quot;:&quot;text&quot;}"/>
+          <p:cNvPr id="126" name="" descr="{&quot;isTemplate&quot;:true,&quot;type&quot;:&quot;text&quot;}"/>
           <p:cNvSpPr txBox="1"/>
           <p:nvPr/>
         </p:nvSpPr>
@@ -5691,7 +6119,7 @@
       </p:sp>
       <p:sp>
         <p:nvSpPr>
-          <p:cNvPr id="111" name="" descr="{&quot;isTemplate&quot;:true,&quot;type&quot;:&quot;text&quot;}"/>
+          <p:cNvPr id="127" name="" descr="{&quot;isTemplate&quot;:true,&quot;type&quot;:&quot;text&quot;}"/>
           <p:cNvSpPr txBox="1"/>
           <p:nvPr/>
         </p:nvSpPr>
@@ -5726,7 +6154,7 @@
       </p:sp>
       <p:sp>
         <p:nvSpPr>
-          <p:cNvPr id="112" name=""/>
+          <p:cNvPr id="128" name=""/>
           <p:cNvSpPr/>
           <p:nvPr/>
         </p:nvSpPr>
@@ -5759,7 +6187,7 @@
       </p:sp>
       <p:sp>
         <p:nvSpPr>
-          <p:cNvPr id="113" name=""/>
+          <p:cNvPr id="129" name=""/>
           <p:cNvSpPr/>
           <p:nvPr/>
         </p:nvSpPr>
@@ -5816,7 +6244,7 @@
       </p:sp>
       <p:sp>
         <p:nvSpPr>
-          <p:cNvPr id="114" name=""/>
+          <p:cNvPr id="130" name=""/>
           <p:cNvSpPr/>
           <p:nvPr/>
         </p:nvSpPr>
@@ -5844,14 +6272,14 @@
       </p:sp>
       <p:pic>
         <p:nvPicPr>
-          <p:cNvPr id="115" name=""/>
+          <p:cNvPr id="131" name=""/>
           <p:cNvPicPr>
             <a:picLocks noChangeAspect="1"/>
           </p:cNvPicPr>
           <p:nvPr/>
         </p:nvPicPr>
         <p:blipFill>
-          <a:blip r:embed="rId4">
+          <a:blip>
             <a:extLst>
               <a:ext uri="{96DAC541-7B7A-43D3-8B79-37D633B846F1}">
                 <asvg:svgBlip r:embed="rId4"/>
@@ -5875,7 +6303,7 @@
       </p:pic>
       <p:sp>
         <p:nvSpPr>
-          <p:cNvPr id="116" name="" descr="{&quot;isTemplate&quot;:true,&quot;type&quot;:&quot;text&quot;}"/>
+          <p:cNvPr id="132" name="" descr="{&quot;isTemplate&quot;:true,&quot;type&quot;:&quot;text&quot;}"/>
           <p:cNvSpPr txBox="1"/>
           <p:nvPr/>
         </p:nvSpPr>
@@ -5912,7 +6340,7 @@
       </p:sp>
       <p:sp>
         <p:nvSpPr>
-          <p:cNvPr id="117" name=""/>
+          <p:cNvPr id="133" name=""/>
           <p:cNvSpPr/>
           <p:nvPr/>
         </p:nvSpPr>
@@ -5938,7 +6366,7 @@
       </p:sp>
       <p:sp>
         <p:nvSpPr>
-          <p:cNvPr id="118" name="" descr="{&quot;isTemplate&quot;:true,&quot;type&quot;:&quot;text&quot;}"/>
+          <p:cNvPr id="134" name="" descr="{&quot;isTemplate&quot;:true,&quot;type&quot;:&quot;text&quot;}"/>
           <p:cNvSpPr txBox="1"/>
           <p:nvPr/>
         </p:nvSpPr>
@@ -5975,7 +6403,7 @@
       </p:sp>
       <p:sp>
         <p:nvSpPr>
-          <p:cNvPr id="119" name="" descr="{&quot;isTemplate&quot;:true,&quot;type&quot;:&quot;text&quot;}"/>
+          <p:cNvPr id="135" name="" descr="{&quot;isTemplate&quot;:true,&quot;type&quot;:&quot;text&quot;}"/>
           <p:cNvSpPr txBox="1"/>
           <p:nvPr/>
         </p:nvSpPr>
@@ -6010,7 +6438,7 @@
       </p:sp>
       <p:sp>
         <p:nvSpPr>
-          <p:cNvPr id="120" name=""/>
+          <p:cNvPr id="136" name=""/>
           <p:cNvSpPr/>
           <p:nvPr/>
         </p:nvSpPr>
@@ -6036,7 +6464,7 @@
       </p:sp>
       <p:sp>
         <p:nvSpPr>
-          <p:cNvPr id="121" name="" descr="{&quot;isTemplate&quot;:true,&quot;type&quot;:&quot;text&quot;}"/>
+          <p:cNvPr id="137" name="" descr="{&quot;isTemplate&quot;:true,&quot;type&quot;:&quot;text&quot;}"/>
           <p:cNvSpPr txBox="1"/>
           <p:nvPr/>
         </p:nvSpPr>
@@ -6071,7 +6499,7 @@
       </p:sp>
       <p:sp>
         <p:nvSpPr>
-          <p:cNvPr id="122" name="" descr="{&quot;isTemplate&quot;:true,&quot;type&quot;:&quot;text&quot;}"/>
+          <p:cNvPr id="138" name="" descr="{&quot;isTemplate&quot;:true,&quot;type&quot;:&quot;text&quot;}"/>
           <p:cNvSpPr txBox="1"/>
           <p:nvPr/>
         </p:nvSpPr>
@@ -6106,7 +6534,7 @@
       </p:sp>
       <p:sp>
         <p:nvSpPr>
-          <p:cNvPr id="123" name="" descr="{&quot;isTemplate&quot;:true,&quot;type&quot;:&quot;text&quot;}"/>
+          <p:cNvPr id="139" name="" descr="{&quot;isTemplate&quot;:true,&quot;type&quot;:&quot;text&quot;}"/>
           <p:cNvSpPr txBox="1"/>
           <p:nvPr/>
         </p:nvSpPr>
@@ -6133,7 +6561,7 @@
                 <a:latin typeface="Verdana"/>
                 <a:ea typeface="Verdana"/>
               </a:rPr>
-              <a:t>14 / 15</a:t>
+              <a:t>15 / 16</a:t>
             </a:r>
             <a:endParaRPr/>
           </a:p>
@@ -6144,12 +6572,12 @@
 </p:sld>
 </file>
 
-<file path=ppt/slides/slide15.xml><?xml version="1.0" encoding="utf-8"?>
+<file path=ppt/slides/slide16.xml><?xml version="1.0" encoding="utf-8"?>
 <p:sld xmlns:p="http://schemas.openxmlformats.org/presentationml/2006/main" xmlns:a="http://schemas.openxmlformats.org/drawingml/2006/main" xmlns:asvg="http://schemas.microsoft.com/office/drawing/2016/SVG/main" xmlns:r="http://schemas.openxmlformats.org/officeDocument/2006/relationships" xmlns:mc="http://schemas.openxmlformats.org/markup-compatibility/2006" mc:Ignorable="asvg">
   <p:cSld>
     <p:spTree>
       <p:nvGrpSpPr>
-        <p:cNvPr id="124" name=""/>
+        <p:cNvPr id="140" name="" descr="&lt;Slide&#13;&#10;    style={{&#13;&#10;        width: '1280px',&#13;&#10;        height: '720px',&#13;&#10;        background: '#FAF7F2',&#13;&#10;        justifyContent: 'center',&#13;&#10;        alignItems: 'center',&#13;&#10;        position: 'relative',&#13;&#10;        overflow: 'hidden',&#13;&#10;    }}&#13;&#10;&gt;&#13;&#10;    {/* cahaya latar */}&#13;&#10;    &lt;Box&#13;&#10;        style={{&#13;&#10;            position: 'absolute',&#13;&#10;            top: 90,&#13;&#10;            width: 520,&#13;&#10;            height: 520,&#13;&#10;            borderRadius: 260,&#13;&#10;            background: 'linear-gradient(135deg, #51277C 0%, #7A45A8 100%)',&#13;&#10;            opacity: 0.10,&#13;&#10;        }}&#13;&#10;    /&gt;&#13;&#10;    &lt;Box&#13;&#10;        style={{&#13;&#10;            position: 'absolute',&#13;&#10;            bottom: -80,&#13;&#10;            left: -80,&#13;&#10;            width: 320,&#13;&#10;            height: 320,&#13;&#10;            borderRadius: 160,&#13;&#10;            background: 'linear-gradient(135deg, #AFC440 0%, #F3B26C 100%)',&#13;&#10;            opacity: 0.18,&#13;&#10;        }}&#13;&#10;    /&gt;&#13;&#10;&#13;&#10;    &lt;Box style={{ position: 'relative', zIndex: 1, alignItems: 'center', paddingLeft: 72, paddingRight: 72 }}&gt;&#13;&#10;        &lt;Image&#13;&#10;            src=&quot;assets/app_logo.png&quot;&#13;&#10;            style={{ width: 200, height: 194, objectFit: 'contain' }}&#13;&#10;        /&gt;&#13;&#10;&#13;&#10;        &lt;Text&#13;&#10;            style={{&#13;&#10;                marginTop: 26,&#13;&#10;                fontSize: 60,&#13;&#10;                fontWeight: 'bold',&#13;&#10;                color: '#51277C',&#13;&#10;                fontFamily: 'Trebuchet MS',&#13;&#10;                lineHeight: 1.15,&#13;&#10;            }}&#13;&#10;        &gt;&#13;&#10;            Terima kasih&#13;&#10;        &lt;/Text&gt;&#13;&#10;&#13;&#10;        &lt;Box style={{ marginTop: 18, width: 96, height: 7, borderRadius: 4, background: '#AFC440' }} /&gt;&#13;&#10;&#13;&#10;        &lt;Text&#13;&#10;            style={{&#13;&#10;                marginTop: 22,&#13;&#10;                fontSize: 22,&#13;&#10;                color: '#2A2333',&#13;&#10;                fontFamily: 'Verdana',&#13;&#10;                lineHeight: 1.5,&#13;&#10;                textAlign: 'center',&#13;&#10;            }}&#13;&#10;        &gt;&#13;&#10;            Mari pasang aplikasinya hari ini juga.&#13;&#10;        &lt;/Text&gt;&#13;&#10;&#13;&#10;        &lt;Text&#13;&#10;            style={{&#13;&#10;                marginTop: 14,&#13;&#10;                fontSize: 19,&#13;&#10;                color: '#6B6478',&#13;&#10;                fontFamily: 'Verdana',&#13;&#10;                lineHeight: 1.5,&#13;&#10;                textAlign: 'center',&#13;&#10;            }}&#13;&#10;        &gt;&#13;&#10;            Ada pertanyaan? Sampaikan kepada korlas kelas atau admin sekolah.&#13;&#10;        &lt;/Text&gt;&#13;&#10;&#13;&#10;        &lt;Box&#13;&#10;            style={{&#13;&#10;                marginTop: 26,&#13;&#10;                flexDirection: 'row',&#13;&#10;                alignItems: 'center',&#13;&#10;                gap: 12,&#13;&#10;                background: '#F3B26C',&#13;&#10;                borderRadius: 999,&#13;&#10;                paddingTop: 13,&#13;&#10;                paddingBottom: 13,&#13;&#10;                paddingLeft: 28,&#13;&#10;                paddingRight: 30,&#13;&#10;            }}&#13;&#10;        &gt;&#13;&#10;            &lt;svg width={22} height={22} viewBox=&quot;0 0 576 512&quot; xmlns=&quot;http://www.w3.org/2000/svg&quot;&gt;&lt;path fill=&quot;#51277C&quot; d=&quot;M316.9 18C311.6 7 300.4 0 288.1 0s-23.4 7-28.8 18L195 150.3 51.4 171.5c-12 1.8-22 10.2-25.7 21.7s-.7 24.2 7.9 32.7L137.8 329 113.2 474.7c-2 12 3 24.2 12.9 31.3s23 8 33.8 2.3l128.3-68.5 128.3 68.5c10.8 5.7 23.9 4.9 33.8-2.3s14.9-19.3 12.9-31.3L438.5 329 542.7 225.9c8.6-8.5 11.7-21.2 7.9-32.7s-13.7-19.9-25.7-21.7L381.2 150.3 316.9 18z&quot; /&gt;&lt;/svg&gt;&#13;&#10;            &lt;Text style={{ fontSize: 19, color: '#51277C', fontFamily: 'Trebuchet MS', fontWeight: 'bold' }}&gt;&#13;&#10;                Pizza Snack Play&#13;&#10;            &lt;/Text&gt;&#13;&#10;        &lt;/Box&gt;&#13;&#10;    &lt;/Box&gt;&#13;&#10;&lt;/Slide&gt;&#13;&#10;"/>
         <p:cNvGrpSpPr/>
         <p:nvPr/>
       </p:nvGrpSpPr>
@@ -6163,7 +6591,7 @@
       </p:grpSpPr>
       <p:sp>
         <p:nvSpPr>
-          <p:cNvPr id="125" name=""/>
+          <p:cNvPr id="141" name=""/>
           <p:cNvSpPr/>
           <p:nvPr/>
         </p:nvSpPr>
@@ -6182,15 +6610,12 @@
         </p:spPr>
         <p:txBody>
           <a:bodyPr/>
-          <a:p>
-            <a:pPr/>
-            <a:endParaRPr/>
-          </a:p>
-        </p:txBody>
-      </p:sp>
-      <p:sp>
-        <p:nvSpPr>
-          <p:cNvPr id="126" name=""/>
+          <a:p/>
+        </p:txBody>
+      </p:sp>
+      <p:sp>
+        <p:nvSpPr>
+          <p:cNvPr id="142" name=""/>
           <p:cNvSpPr/>
           <p:nvPr/>
         </p:nvSpPr>
@@ -6223,15 +6648,12 @@
         </p:spPr>
         <p:txBody>
           <a:bodyPr/>
-          <a:p>
-            <a:pPr/>
-            <a:endParaRPr/>
-          </a:p>
-        </p:txBody>
-      </p:sp>
-      <p:sp>
-        <p:nvSpPr>
-          <p:cNvPr id="127" name=""/>
+          <a:p/>
+        </p:txBody>
+      </p:sp>
+      <p:sp>
+        <p:nvSpPr>
+          <p:cNvPr id="143" name=""/>
           <p:cNvSpPr/>
           <p:nvPr/>
         </p:nvSpPr>
@@ -6290,15 +6712,12 @@
         </p:spPr>
         <p:txBody>
           <a:bodyPr/>
-          <a:p>
-            <a:pPr/>
-            <a:endParaRPr/>
-          </a:p>
+          <a:p/>
         </p:txBody>
       </p:sp>
       <p:pic>
         <p:nvPicPr>
-          <p:cNvPr id="128" name=""/>
+          <p:cNvPr id="144" name=""/>
           <p:cNvPicPr>
             <a:picLocks noChangeAspect="1"/>
           </p:cNvPicPr>
@@ -6324,7 +6743,7 @@
       </p:pic>
       <p:sp>
         <p:nvSpPr>
-          <p:cNvPr id="129" name="" descr="{&quot;isTemplate&quot;:true,&quot;type&quot;:&quot;text&quot;}"/>
+          <p:cNvPr id="145" name="" descr="{&quot;isTemplate&quot;:true,&quot;type&quot;:&quot;text&quot;}"/>
           <p:cNvSpPr txBox="1"/>
           <p:nvPr/>
         </p:nvSpPr>
@@ -6359,7 +6778,7 @@
       </p:sp>
       <p:sp>
         <p:nvSpPr>
-          <p:cNvPr id="130" name=""/>
+          <p:cNvPr id="146" name=""/>
           <p:cNvSpPr/>
           <p:nvPr/>
         </p:nvSpPr>
@@ -6380,15 +6799,12 @@
         </p:spPr>
         <p:txBody>
           <a:bodyPr/>
-          <a:p>
-            <a:pPr/>
-            <a:endParaRPr/>
-          </a:p>
-        </p:txBody>
-      </p:sp>
-      <p:sp>
-        <p:nvSpPr>
-          <p:cNvPr id="131" name="" descr="{&quot;isTemplate&quot;:true,&quot;type&quot;:&quot;text&quot;}"/>
+          <a:p/>
+        </p:txBody>
+      </p:sp>
+      <p:sp>
+        <p:nvSpPr>
+          <p:cNvPr id="147" name="" descr="{&quot;isTemplate&quot;:true,&quot;type&quot;:&quot;text&quot;}"/>
           <p:cNvSpPr txBox="1"/>
           <p:nvPr/>
         </p:nvSpPr>
@@ -6423,7 +6839,7 @@
       </p:sp>
       <p:sp>
         <p:nvSpPr>
-          <p:cNvPr id="132" name="" descr="{&quot;isTemplate&quot;:true,&quot;type&quot;:&quot;text&quot;}"/>
+          <p:cNvPr id="148" name="" descr="{&quot;isTemplate&quot;:true,&quot;type&quot;:&quot;text&quot;}"/>
           <p:cNvSpPr txBox="1"/>
           <p:nvPr/>
         </p:nvSpPr>
@@ -6458,7 +6874,7 @@
       </p:sp>
       <p:sp>
         <p:nvSpPr>
-          <p:cNvPr id="133" name=""/>
+          <p:cNvPr id="149" name=""/>
           <p:cNvSpPr/>
           <p:nvPr/>
         </p:nvSpPr>
@@ -6479,22 +6895,19 @@
         </p:spPr>
         <p:txBody>
           <a:bodyPr/>
-          <a:p>
-            <a:pPr/>
-            <a:endParaRPr/>
-          </a:p>
+          <a:p/>
         </p:txBody>
       </p:sp>
       <p:pic>
         <p:nvPicPr>
-          <p:cNvPr id="134" name=""/>
+          <p:cNvPr id="150" name=""/>
           <p:cNvPicPr>
             <a:picLocks noChangeAspect="1"/>
           </p:cNvPicPr>
           <p:nvPr/>
         </p:nvPicPr>
         <p:blipFill>
-          <a:blip r:embed="rId2">
+          <a:blip>
             <a:extLst>
               <a:ext uri="{96DAC541-7B7A-43D3-8B79-37D633B846F1}">
                 <asvg:svgBlip r:embed="rId2"/>
@@ -6518,7 +6931,7 @@
       </p:pic>
       <p:sp>
         <p:nvSpPr>
-          <p:cNvPr id="135" name="" descr="{&quot;isTemplate&quot;:true,&quot;type&quot;:&quot;text&quot;}"/>
+          <p:cNvPr id="151" name="" descr="{&quot;isTemplate&quot;:true,&quot;type&quot;:&quot;text&quot;}"/>
           <p:cNvSpPr txBox="1"/>
           <p:nvPr/>
         </p:nvSpPr>
@@ -6561,7 +6974,7 @@
   <p:cSld>
     <p:spTree>
       <p:nvGrpSpPr>
-        <p:cNvPr id="136" name=""/>
+        <p:cNvPr id="152" name="" descr="&lt;Slide&#10;    style={{&#10;        width: '1280px',&#10;        height: '720px',&#10;        background: '#FAF7F2',&#10;        paddingTop: 20,&#10;        paddingBottom: 20,&#10;        paddingLeft: 64,&#10;        paddingRight: 64,&#10;    }}&#10;&gt;&#10;    {/* ── A · blok judul (20–130) ── */}&#10;    &lt;Box style={{ height: 110, justifyContent: 'center' }}&gt;&#10;        &lt;Text&#10;            style={{&#10;                fontSize: 34,&#10;                fontWeight: 'bold',&#10;                color: '#51277C',&#10;                fontFamily: 'Trebuchet MS',&#10;                lineHeight: 1.3,&#10;            }}&#10;        &gt;&#10;            Isi panduan ini&#10;        &lt;/Text&gt;&#10;        &lt;Box style={{ marginTop: 10, width: 72, height: 6, borderRadius: 3, background: '#51277C' }} /&gt;&#10;    &lt;/Box&gt;&#10;&#10;    {/* ── B · area konten (130–660) ── */}&#10;    &lt;Box style={{ height: 530, flexDirection: 'row', gap: 28 }}&gt;&#10;        {/* kolom kiri 32% — penanda jumlah bagian */}&#10;        &lt;Box&#10;            style={{&#10;                width: '32%',&#10;                height: '100%',&#10;                background: 'linear-gradient(135deg, #51277C 0%, #7A45A8 100%)',&#10;                borderRadius: 18,&#10;                padding: 28,&#10;                justifyContent: 'space-between',&#10;            }}&#10;        &gt;&#10;            &lt;Box&gt;&#10;                &lt;Text&#10;                    style={{&#10;                        fontSize: 96,&#10;                        fontWeight: 'bold',&#10;                        color: '#FFFFFF',&#10;                        fontFamily: 'Trebuchet MS',&#10;                        lineHeight: 1,&#10;                    }}&#10;                &gt;&#10;                    4&#10;                &lt;/Text&gt;&#10;                &lt;Text&#10;                    style={{&#10;                        marginTop: 6,&#10;                        fontSize: 24,&#10;                        fontWeight: 'bold',&#10;                        color: '#F3B26C',&#10;                        fontFamily: 'Trebuchet MS',&#10;                    }}&#10;                &gt;&#10;                    bagian&#10;                &lt;/Text&gt;&#10;            &lt;/Box&gt;&#10;            &lt;Text&#10;                style={{&#10;                    fontSize: 17,&#10;                    color: 'rgba(255,255,255,0.88)',&#10;                    fontFamily: 'Verdana',&#10;                    lineHeight: 1.5,&#10;                }}&#10;            &gt;&#10;                Singkat saja. Bagian 2 dan 3 yang paling sering dipakai sehari-hari.&#10;            &lt;/Text&gt;&#10;        &lt;/Box&gt;&#10;&#10;        {/* kolom kanan 68% — daftar bagian */}&#10;        &lt;Box style={{ width: '68%', height: '100%', justifyContent: 'space-between' }}&gt;&#10;            {[&#10;                {&#10;                    n: '01',&#10;                    t: 'Kenapa ada aplikasi ini',&#10;                    d: 'Masalah yang selama ini bikin repot, dan apa yang berubah.',&#10;                    p: '3–5',&#10;                },&#10;                {&#10;                    n: '02',&#10;                    t: 'Cara mulai',&#10;                    d: 'Memasang aplikasi di HP, lalu masuk memakai akun dari sekolah.',&#10;                    p: '6–8',&#10;                },&#10;                {&#10;                    n: '03',&#10;                    t: 'Dipakai tiap hari',&#10;                    d: 'Melihat jadwal snack, mengambil tanggal piket, mencari menu.',&#10;                    p: '9–13',&#10;                },&#10;                {&#10;                    n: '04',&#10;                    t: 'Yang perlu diingat',&#10;                    d: 'Empat aturan yang paling sering ditanyakan orang tua.',&#10;                    p: '14–15',&#10;                },&#10;            ].map((it, i) =&gt; (&#10;                &lt;Box&#10;                    key={i}&#10;                    style={{&#10;                        flexDirection: 'row',&#10;                        alignItems: 'center',&#10;                        gap: 20,&#10;                        height: 122,&#10;                        background: '#FFFFFF',&#10;                        borderRadius: 16,&#10;                        boxShadow: '0 4px 20px rgba(0,0,0,0.08)',&#10;                        paddingLeft: 24,&#10;                        paddingRight: 28,&#10;                        borderLeft: '8px solid #AFC440',&#10;                    }}&#10;                &gt;&#10;                    &lt;Box&#10;                        style={{&#10;                            width: 56,&#10;                            height: 56,&#10;                            borderRadius: 28,&#10;                            background: 'rgba(81,39,124,0.09)',&#10;                            justifyContent: 'center',&#10;                            alignItems: 'center',&#10;                        }}&#10;                    &gt;&#10;                        &lt;Text&#10;                            style={{&#10;                                fontSize: 24,&#10;                                fontWeight: 'bold',&#10;                                color: '#51277C',&#10;                                fontFamily: 'Trebuchet MS',&#10;                            }}&#10;                        &gt;&#10;                            {it.n}&#10;                        &lt;/Text&gt;&#10;                    &lt;/Box&gt;&#10;                    &lt;Box style={{ flex: 1 }}&gt;&#10;                        &lt;Text&#10;                            style={{&#10;                                fontSize: 25,&#10;                                fontWeight: 'bold',&#10;                                color: '#2A2333',&#10;                                fontFamily: 'Trebuchet MS',&#10;                                lineHeight: 1.3,&#10;                            }}&#10;                        &gt;&#10;                            {it.t}&#10;                        &lt;/Text&gt;&#10;                        &lt;Text&#10;                            style={{&#10;                                marginTop: 5,&#10;                                fontSize: 18,&#10;                                color: '#6B6478',&#10;                                fontFamily: 'Verdana',&#10;                                lineHeight: 1.45,&#10;                            }}&#10;                        &gt;&#10;                            {it.d}&#10;                        &lt;/Text&gt;&#10;                    &lt;/Box&gt;&#10;                    &lt;Text&#10;                        style={{&#10;                            fontSize: 17,&#10;                            color: '#51277C',&#10;                            fontFamily: 'Verdana',&#10;                            fontWeight: 'bold',&#10;                        }}&#10;                    &gt;&#10;                        {it.p}&#10;                    &lt;/Text&gt;&#10;                &lt;/Box&gt;&#10;            ))}&#10;        &lt;/Box&gt;&#10;    &lt;/Box&gt;&#10;&#10;    {/* ── C · bilah kaki (660–700) ── */}&#10;    &lt;Box&#10;        style={{&#10;            height: 40,&#10;            flexDirection: 'row',&#10;            alignItems: 'center',&#10;            justifyContent: 'space-between',&#10;        }}&#10;    &gt;&#10;        &lt;Text style={{ fontSize: 14, color: '#6B6478', fontFamily: 'Verdana' }}&gt;&#10;            Pizza Snack Play · Panduan Orang Tua&#10;        &lt;/Text&gt;&#10;        &lt;Text style={{ fontSize: 14, color: '#6B6478', fontFamily: 'Verdana' }}&gt;02 / 16&lt;/Text&gt;&#10;    &lt;/Box&gt;&#10;&lt;/Slide&gt;&#10;"/>
         <p:cNvGrpSpPr/>
         <p:nvPr/>
       </p:nvGrpSpPr>
@@ -6575,7 +6988,7 @@
       </p:grpSpPr>
       <p:sp>
         <p:nvSpPr>
-          <p:cNvPr id="137" name=""/>
+          <p:cNvPr id="153" name=""/>
           <p:cNvSpPr/>
           <p:nvPr/>
         </p:nvSpPr>
@@ -6594,15 +7007,12 @@
         </p:spPr>
         <p:txBody>
           <a:bodyPr/>
-          <a:p>
-            <a:pPr/>
-            <a:endParaRPr/>
-          </a:p>
-        </p:txBody>
-      </p:sp>
-      <p:sp>
-        <p:nvSpPr>
-          <p:cNvPr id="138" name="" descr="{&quot;isTemplate&quot;:true,&quot;type&quot;:&quot;text&quot;}"/>
+          <a:p/>
+        </p:txBody>
+      </p:sp>
+      <p:sp>
+        <p:nvSpPr>
+          <p:cNvPr id="154" name="" descr="{&quot;isTemplate&quot;:true,&quot;type&quot;:&quot;text&quot;}"/>
           <p:cNvSpPr txBox="1"/>
           <p:nvPr/>
         </p:nvSpPr>
@@ -6637,7 +7047,7 @@
       </p:sp>
       <p:sp>
         <p:nvSpPr>
-          <p:cNvPr id="139" name=""/>
+          <p:cNvPr id="155" name=""/>
           <p:cNvSpPr/>
           <p:nvPr/>
         </p:nvSpPr>
@@ -6658,15 +7068,12 @@
         </p:spPr>
         <p:txBody>
           <a:bodyPr/>
-          <a:p>
-            <a:pPr/>
-            <a:endParaRPr/>
-          </a:p>
-        </p:txBody>
-      </p:sp>
-      <p:sp>
-        <p:nvSpPr>
-          <p:cNvPr id="140" name=""/>
+          <a:p/>
+        </p:txBody>
+      </p:sp>
+      <p:sp>
+        <p:nvSpPr>
+          <p:cNvPr id="156" name=""/>
           <p:cNvSpPr/>
           <p:nvPr/>
         </p:nvSpPr>
@@ -6695,15 +7102,12 @@
         </p:spPr>
         <p:txBody>
           <a:bodyPr/>
-          <a:p>
-            <a:pPr/>
-            <a:endParaRPr/>
-          </a:p>
-        </p:txBody>
-      </p:sp>
-      <p:sp>
-        <p:nvSpPr>
-          <p:cNvPr id="141" name="" descr="{&quot;isTemplate&quot;:true,&quot;type&quot;:&quot;text&quot;}"/>
+          <a:p/>
+        </p:txBody>
+      </p:sp>
+      <p:sp>
+        <p:nvSpPr>
+          <p:cNvPr id="157" name="" descr="{&quot;isTemplate&quot;:true,&quot;type&quot;:&quot;text&quot;}"/>
           <p:cNvSpPr txBox="1"/>
           <p:nvPr/>
         </p:nvSpPr>
@@ -6738,7 +7142,7 @@
       </p:sp>
       <p:sp>
         <p:nvSpPr>
-          <p:cNvPr id="142" name="" descr="{&quot;isTemplate&quot;:true,&quot;type&quot;:&quot;text&quot;}"/>
+          <p:cNvPr id="158" name="" descr="{&quot;isTemplate&quot;:true,&quot;type&quot;:&quot;text&quot;}"/>
           <p:cNvSpPr txBox="1"/>
           <p:nvPr/>
         </p:nvSpPr>
@@ -6773,7 +7177,7 @@
       </p:sp>
       <p:sp>
         <p:nvSpPr>
-          <p:cNvPr id="143" name="" descr="{&quot;isTemplate&quot;:true,&quot;type&quot;:&quot;text&quot;}"/>
+          <p:cNvPr id="159" name="" descr="{&quot;isTemplate&quot;:true,&quot;type&quot;:&quot;text&quot;}"/>
           <p:cNvSpPr txBox="1"/>
           <p:nvPr/>
         </p:nvSpPr>
@@ -6812,7 +7216,7 @@
       </p:sp>
       <p:sp>
         <p:nvSpPr>
-          <p:cNvPr id="144" name=""/>
+          <p:cNvPr id="160" name=""/>
           <p:cNvSpPr/>
           <p:nvPr/>
         </p:nvSpPr>
@@ -6840,15 +7244,12 @@
         </p:spPr>
         <p:txBody>
           <a:bodyPr/>
-          <a:p>
-            <a:pPr/>
-            <a:endParaRPr/>
-          </a:p>
-        </p:txBody>
-      </p:sp>
-      <p:sp>
-        <p:nvSpPr>
-          <p:cNvPr id="145" name=""/>
+          <a:p/>
+        </p:txBody>
+      </p:sp>
+      <p:sp>
+        <p:nvSpPr>
+          <p:cNvPr id="161" name=""/>
           <p:cNvSpPr/>
           <p:nvPr/>
         </p:nvSpPr>
@@ -6900,15 +7301,12 @@
         </p:spPr>
         <p:txBody>
           <a:bodyPr/>
-          <a:p>
-            <a:pPr/>
-            <a:endParaRPr/>
-          </a:p>
-        </p:txBody>
-      </p:sp>
-      <p:sp>
-        <p:nvSpPr>
-          <p:cNvPr id="146" name=""/>
+          <a:p/>
+        </p:txBody>
+      </p:sp>
+      <p:sp>
+        <p:nvSpPr>
+          <p:cNvPr id="162" name=""/>
           <p:cNvSpPr/>
           <p:nvPr/>
         </p:nvSpPr>
@@ -6931,15 +7329,12 @@
         </p:spPr>
         <p:txBody>
           <a:bodyPr/>
-          <a:p>
-            <a:pPr/>
-            <a:endParaRPr/>
-          </a:p>
-        </p:txBody>
-      </p:sp>
-      <p:sp>
-        <p:nvSpPr>
-          <p:cNvPr id="147" name="" descr="{&quot;isTemplate&quot;:true,&quot;type&quot;:&quot;text&quot;}"/>
+          <a:p/>
+        </p:txBody>
+      </p:sp>
+      <p:sp>
+        <p:nvSpPr>
+          <p:cNvPr id="163" name="" descr="{&quot;isTemplate&quot;:true,&quot;type&quot;:&quot;text&quot;}"/>
           <p:cNvSpPr txBox="1"/>
           <p:nvPr/>
         </p:nvSpPr>
@@ -6974,7 +7369,7 @@
       </p:sp>
       <p:sp>
         <p:nvSpPr>
-          <p:cNvPr id="148" name="" descr="{&quot;isTemplate&quot;:true,&quot;type&quot;:&quot;text&quot;}"/>
+          <p:cNvPr id="164" name="" descr="{&quot;isTemplate&quot;:true,&quot;type&quot;:&quot;text&quot;}"/>
           <p:cNvSpPr txBox="1"/>
           <p:nvPr/>
         </p:nvSpPr>
@@ -7009,7 +7404,7 @@
       </p:sp>
       <p:sp>
         <p:nvSpPr>
-          <p:cNvPr id="149" name="" descr="{&quot;isTemplate&quot;:true,&quot;type&quot;:&quot;text&quot;}"/>
+          <p:cNvPr id="165" name="" descr="{&quot;isTemplate&quot;:true,&quot;type&quot;:&quot;text&quot;}"/>
           <p:cNvSpPr txBox="1"/>
           <p:nvPr/>
         </p:nvSpPr>
@@ -7044,7 +7439,7 @@
       </p:sp>
       <p:sp>
         <p:nvSpPr>
-          <p:cNvPr id="150" name="" descr="{&quot;isTemplate&quot;:true,&quot;type&quot;:&quot;text&quot;}"/>
+          <p:cNvPr id="166" name="" descr="{&quot;isTemplate&quot;:true,&quot;type&quot;:&quot;text&quot;}"/>
           <p:cNvSpPr txBox="1"/>
           <p:nvPr/>
         </p:nvSpPr>
@@ -7079,7 +7474,7 @@
       </p:sp>
       <p:sp>
         <p:nvSpPr>
-          <p:cNvPr id="151" name=""/>
+          <p:cNvPr id="167" name=""/>
           <p:cNvSpPr/>
           <p:nvPr/>
         </p:nvSpPr>
@@ -7107,15 +7502,12 @@
         </p:spPr>
         <p:txBody>
           <a:bodyPr/>
-          <a:p>
-            <a:pPr/>
-            <a:endParaRPr/>
-          </a:p>
-        </p:txBody>
-      </p:sp>
-      <p:sp>
-        <p:nvSpPr>
-          <p:cNvPr id="152" name=""/>
+          <a:p/>
+        </p:txBody>
+      </p:sp>
+      <p:sp>
+        <p:nvSpPr>
+          <p:cNvPr id="168" name=""/>
           <p:cNvSpPr/>
           <p:nvPr/>
         </p:nvSpPr>
@@ -7167,15 +7559,12 @@
         </p:spPr>
         <p:txBody>
           <a:bodyPr/>
-          <a:p>
-            <a:pPr/>
-            <a:endParaRPr/>
-          </a:p>
-        </p:txBody>
-      </p:sp>
-      <p:sp>
-        <p:nvSpPr>
-          <p:cNvPr id="153" name=""/>
+          <a:p/>
+        </p:txBody>
+      </p:sp>
+      <p:sp>
+        <p:nvSpPr>
+          <p:cNvPr id="169" name=""/>
           <p:cNvSpPr/>
           <p:nvPr/>
         </p:nvSpPr>
@@ -7198,15 +7587,12 @@
         </p:spPr>
         <p:txBody>
           <a:bodyPr/>
-          <a:p>
-            <a:pPr/>
-            <a:endParaRPr/>
-          </a:p>
-        </p:txBody>
-      </p:sp>
-      <p:sp>
-        <p:nvSpPr>
-          <p:cNvPr id="154" name="" descr="{&quot;isTemplate&quot;:true,&quot;type&quot;:&quot;text&quot;}"/>
+          <a:p/>
+        </p:txBody>
+      </p:sp>
+      <p:sp>
+        <p:nvSpPr>
+          <p:cNvPr id="170" name="" descr="{&quot;isTemplate&quot;:true,&quot;type&quot;:&quot;text&quot;}"/>
           <p:cNvSpPr txBox="1"/>
           <p:nvPr/>
         </p:nvSpPr>
@@ -7241,7 +7627,7 @@
       </p:sp>
       <p:sp>
         <p:nvSpPr>
-          <p:cNvPr id="155" name="" descr="{&quot;isTemplate&quot;:true,&quot;type&quot;:&quot;text&quot;}"/>
+          <p:cNvPr id="171" name="" descr="{&quot;isTemplate&quot;:true,&quot;type&quot;:&quot;text&quot;}"/>
           <p:cNvSpPr txBox="1"/>
           <p:nvPr/>
         </p:nvSpPr>
@@ -7276,7 +7662,7 @@
       </p:sp>
       <p:sp>
         <p:nvSpPr>
-          <p:cNvPr id="156" name="" descr="{&quot;isTemplate&quot;:true,&quot;type&quot;:&quot;text&quot;}"/>
+          <p:cNvPr id="172" name="" descr="{&quot;isTemplate&quot;:true,&quot;type&quot;:&quot;text&quot;}"/>
           <p:cNvSpPr txBox="1"/>
           <p:nvPr/>
         </p:nvSpPr>
@@ -7313,7 +7699,7 @@
       </p:sp>
       <p:sp>
         <p:nvSpPr>
-          <p:cNvPr id="157" name="" descr="{&quot;isTemplate&quot;:true,&quot;type&quot;:&quot;text&quot;}"/>
+          <p:cNvPr id="173" name="" descr="{&quot;isTemplate&quot;:true,&quot;type&quot;:&quot;text&quot;}"/>
           <p:cNvSpPr txBox="1"/>
           <p:nvPr/>
         </p:nvSpPr>
@@ -7348,7 +7734,7 @@
       </p:sp>
       <p:sp>
         <p:nvSpPr>
-          <p:cNvPr id="158" name=""/>
+          <p:cNvPr id="174" name=""/>
           <p:cNvSpPr/>
           <p:nvPr/>
         </p:nvSpPr>
@@ -7376,15 +7762,12 @@
         </p:spPr>
         <p:txBody>
           <a:bodyPr/>
-          <a:p>
-            <a:pPr/>
-            <a:endParaRPr/>
-          </a:p>
-        </p:txBody>
-      </p:sp>
-      <p:sp>
-        <p:nvSpPr>
-          <p:cNvPr id="159" name=""/>
+          <a:p/>
+        </p:txBody>
+      </p:sp>
+      <p:sp>
+        <p:nvSpPr>
+          <p:cNvPr id="175" name=""/>
           <p:cNvSpPr/>
           <p:nvPr/>
         </p:nvSpPr>
@@ -7436,15 +7819,12 @@
         </p:spPr>
         <p:txBody>
           <a:bodyPr/>
-          <a:p>
-            <a:pPr/>
-            <a:endParaRPr/>
-          </a:p>
-        </p:txBody>
-      </p:sp>
-      <p:sp>
-        <p:nvSpPr>
-          <p:cNvPr id="160" name=""/>
+          <a:p/>
+        </p:txBody>
+      </p:sp>
+      <p:sp>
+        <p:nvSpPr>
+          <p:cNvPr id="176" name=""/>
           <p:cNvSpPr/>
           <p:nvPr/>
         </p:nvSpPr>
@@ -7467,15 +7847,12 @@
         </p:spPr>
         <p:txBody>
           <a:bodyPr/>
-          <a:p>
-            <a:pPr/>
-            <a:endParaRPr/>
-          </a:p>
-        </p:txBody>
-      </p:sp>
-      <p:sp>
-        <p:nvSpPr>
-          <p:cNvPr id="161" name="" descr="{&quot;isTemplate&quot;:true,&quot;type&quot;:&quot;text&quot;}"/>
+          <a:p/>
+        </p:txBody>
+      </p:sp>
+      <p:sp>
+        <p:nvSpPr>
+          <p:cNvPr id="177" name="" descr="{&quot;isTemplate&quot;:true,&quot;type&quot;:&quot;text&quot;}"/>
           <p:cNvSpPr txBox="1"/>
           <p:nvPr/>
         </p:nvSpPr>
@@ -7510,7 +7887,7 @@
       </p:sp>
       <p:sp>
         <p:nvSpPr>
-          <p:cNvPr id="162" name="" descr="{&quot;isTemplate&quot;:true,&quot;type&quot;:&quot;text&quot;}"/>
+          <p:cNvPr id="178" name="" descr="{&quot;isTemplate&quot;:true,&quot;type&quot;:&quot;text&quot;}"/>
           <p:cNvSpPr txBox="1"/>
           <p:nvPr/>
         </p:nvSpPr>
@@ -7545,7 +7922,7 @@
       </p:sp>
       <p:sp>
         <p:nvSpPr>
-          <p:cNvPr id="163" name="" descr="{&quot;isTemplate&quot;:true,&quot;type&quot;:&quot;text&quot;}"/>
+          <p:cNvPr id="179" name="" descr="{&quot;isTemplate&quot;:true,&quot;type&quot;:&quot;text&quot;}"/>
           <p:cNvSpPr txBox="1"/>
           <p:nvPr/>
         </p:nvSpPr>
@@ -7582,7 +7959,7 @@
       </p:sp>
       <p:sp>
         <p:nvSpPr>
-          <p:cNvPr id="164" name="" descr="{&quot;isTemplate&quot;:true,&quot;type&quot;:&quot;text&quot;}"/>
+          <p:cNvPr id="180" name="" descr="{&quot;isTemplate&quot;:true,&quot;type&quot;:&quot;text&quot;}"/>
           <p:cNvSpPr txBox="1"/>
           <p:nvPr/>
         </p:nvSpPr>
@@ -7609,15 +7986,15 @@
                 <a:latin typeface="Verdana"/>
                 <a:ea typeface="Verdana"/>
               </a:rPr>
-              <a:t>9–12</a:t>
-            </a:r>
-            <a:endParaRPr/>
-          </a:p>
-        </p:txBody>
-      </p:sp>
-      <p:sp>
-        <p:nvSpPr>
-          <p:cNvPr id="165" name=""/>
+              <a:t>9–13</a:t>
+            </a:r>
+            <a:endParaRPr/>
+          </a:p>
+        </p:txBody>
+      </p:sp>
+      <p:sp>
+        <p:nvSpPr>
+          <p:cNvPr id="181" name=""/>
           <p:cNvSpPr/>
           <p:nvPr/>
         </p:nvSpPr>
@@ -7645,15 +8022,12 @@
         </p:spPr>
         <p:txBody>
           <a:bodyPr/>
-          <a:p>
-            <a:pPr/>
-            <a:endParaRPr/>
-          </a:p>
-        </p:txBody>
-      </p:sp>
-      <p:sp>
-        <p:nvSpPr>
-          <p:cNvPr id="166" name=""/>
+          <a:p/>
+        </p:txBody>
+      </p:sp>
+      <p:sp>
+        <p:nvSpPr>
+          <p:cNvPr id="182" name=""/>
           <p:cNvSpPr/>
           <p:nvPr/>
         </p:nvSpPr>
@@ -7705,15 +8079,12 @@
         </p:spPr>
         <p:txBody>
           <a:bodyPr/>
-          <a:p>
-            <a:pPr/>
-            <a:endParaRPr/>
-          </a:p>
-        </p:txBody>
-      </p:sp>
-      <p:sp>
-        <p:nvSpPr>
-          <p:cNvPr id="167" name=""/>
+          <a:p/>
+        </p:txBody>
+      </p:sp>
+      <p:sp>
+        <p:nvSpPr>
+          <p:cNvPr id="183" name=""/>
           <p:cNvSpPr/>
           <p:nvPr/>
         </p:nvSpPr>
@@ -7736,15 +8107,12 @@
         </p:spPr>
         <p:txBody>
           <a:bodyPr/>
-          <a:p>
-            <a:pPr/>
-            <a:endParaRPr/>
-          </a:p>
-        </p:txBody>
-      </p:sp>
-      <p:sp>
-        <p:nvSpPr>
-          <p:cNvPr id="168" name="" descr="{&quot;isTemplate&quot;:true,&quot;type&quot;:&quot;text&quot;}"/>
+          <a:p/>
+        </p:txBody>
+      </p:sp>
+      <p:sp>
+        <p:nvSpPr>
+          <p:cNvPr id="184" name="" descr="{&quot;isTemplate&quot;:true,&quot;type&quot;:&quot;text&quot;}"/>
           <p:cNvSpPr txBox="1"/>
           <p:nvPr/>
         </p:nvSpPr>
@@ -7779,7 +8147,7 @@
       </p:sp>
       <p:sp>
         <p:nvSpPr>
-          <p:cNvPr id="169" name="" descr="{&quot;isTemplate&quot;:true,&quot;type&quot;:&quot;text&quot;}"/>
+          <p:cNvPr id="185" name="" descr="{&quot;isTemplate&quot;:true,&quot;type&quot;:&quot;text&quot;}"/>
           <p:cNvSpPr txBox="1"/>
           <p:nvPr/>
         </p:nvSpPr>
@@ -7814,7 +8182,7 @@
       </p:sp>
       <p:sp>
         <p:nvSpPr>
-          <p:cNvPr id="170" name="" descr="{&quot;isTemplate&quot;:true,&quot;type&quot;:&quot;text&quot;}"/>
+          <p:cNvPr id="186" name="" descr="{&quot;isTemplate&quot;:true,&quot;type&quot;:&quot;text&quot;}"/>
           <p:cNvSpPr txBox="1"/>
           <p:nvPr/>
         </p:nvSpPr>
@@ -7849,7 +8217,7 @@
       </p:sp>
       <p:sp>
         <p:nvSpPr>
-          <p:cNvPr id="171" name="" descr="{&quot;isTemplate&quot;:true,&quot;type&quot;:&quot;text&quot;}"/>
+          <p:cNvPr id="187" name="" descr="{&quot;isTemplate&quot;:true,&quot;type&quot;:&quot;text&quot;}"/>
           <p:cNvSpPr txBox="1"/>
           <p:nvPr/>
         </p:nvSpPr>
@@ -7876,15 +8244,15 @@
                 <a:latin typeface="Verdana"/>
                 <a:ea typeface="Verdana"/>
               </a:rPr>
-              <a:t>13–14</a:t>
-            </a:r>
-            <a:endParaRPr/>
-          </a:p>
-        </p:txBody>
-      </p:sp>
-      <p:sp>
-        <p:nvSpPr>
-          <p:cNvPr id="172" name="" descr="{&quot;isTemplate&quot;:true,&quot;type&quot;:&quot;text&quot;}"/>
+              <a:t>14–15</a:t>
+            </a:r>
+            <a:endParaRPr/>
+          </a:p>
+        </p:txBody>
+      </p:sp>
+      <p:sp>
+        <p:nvSpPr>
+          <p:cNvPr id="188" name="" descr="{&quot;isTemplate&quot;:true,&quot;type&quot;:&quot;text&quot;}"/>
           <p:cNvSpPr txBox="1"/>
           <p:nvPr/>
         </p:nvSpPr>
@@ -7919,7 +8287,7 @@
       </p:sp>
       <p:sp>
         <p:nvSpPr>
-          <p:cNvPr id="173" name="" descr="{&quot;isTemplate&quot;:true,&quot;type&quot;:&quot;text&quot;}"/>
+          <p:cNvPr id="189" name="" descr="{&quot;isTemplate&quot;:true,&quot;type&quot;:&quot;text&quot;}"/>
           <p:cNvSpPr txBox="1"/>
           <p:nvPr/>
         </p:nvSpPr>
@@ -7946,7 +8314,7 @@
                 <a:latin typeface="Verdana"/>
                 <a:ea typeface="Verdana"/>
               </a:rPr>
-              <a:t>02 / 15</a:t>
+              <a:t>02 / 16</a:t>
             </a:r>
             <a:endParaRPr/>
           </a:p>
@@ -7962,7 +8330,7 @@
   <p:cSld>
     <p:spTree>
       <p:nvGrpSpPr>
-        <p:cNvPr id="174" name=""/>
+        <p:cNvPr id="190" name="" descr="&lt;Slide&#10;    style={{&#10;        width: '1280px',&#10;        height: '720px',&#10;        background: 'linear-gradient(135deg, #51277C 0%, #7A45A8 100%)',&#10;        paddingTop: 60,&#10;        paddingBottom: 60,&#10;        paddingLeft: 72,&#10;        paddingRight: 72,&#10;        justifyContent: 'center',&#10;        position: 'relative',&#10;        overflow: 'hidden',&#10;    }}&#10;&gt;&#10;    {/* dekorasi: lingkaran + kisi kalender */}&#10;    &lt;Box&#10;        style={{&#10;            position: 'absolute',&#10;            top: -100,&#10;            right: -60,&#10;            width: 420,&#10;            height: 420,&#10;            borderRadius: 210,&#10;            background: '#AFC440',&#10;            opacity: 0.14,&#10;        }}&#10;    /&gt;&#10;    &lt;Box style={{ position: 'absolute', bottom: 46, right: 78, opacity: 0.16 }}&gt;&#10;        &lt;svg width={240} height={190} viewBox='0 0 240 190'&gt;&#10;            &lt;rect x='10' y='26' width='220' height='156' rx='16' fill='none' stroke='#FFFFFF' strokeWidth='6' /&gt;&#10;            &lt;path d='M10 62h220' stroke='#FFFFFF' strokeWidth='6' /&gt;&#10;            &lt;path d='M60 8v30M180 8v30' stroke='#FFFFFF' strokeWidth='8' strokeLinecap='round' /&gt;&#10;            &lt;rect x='42' y='84' width='34' height='26' rx='6' fill='#FFFFFF' /&gt;&#10;            &lt;rect x='102' y='84' width='34' height='26' rx='6' fill='#FFFFFF' /&gt;&#10;            &lt;rect x='162' y='84' width='34' height='26' rx='6' fill='#FFFFFF' /&gt;&#10;            &lt;rect x='42' y='128' width='34' height='26' rx='6' fill='#FFFFFF' /&gt;&#10;            &lt;rect x='102' y='128' width='34' height='26' rx='6' fill='#FFFFFF' /&gt;&#10;            &lt;rect x='162' y='128' width='34' height='26' rx='6' fill='#F3B26C' /&gt;&#10;        &lt;/svg&gt;&#10;    &lt;/Box&gt;&#10;&#10;    {/* isi */}&#10;    &lt;Box style={{ position: 'relative', zIndex: 1, width: '62%' }}&gt;&#10;        &lt;Box&#10;            style={{&#10;                flexDirection: 'row',&#10;                alignItems: 'center',&#10;                gap: 14,&#10;                alignSelf: 'flex-start',&#10;            }}&#10;        &gt;&#10;            &lt;Text&#10;                style={{&#10;                    fontSize: 76,&#10;                    fontWeight: 'bold',&#10;                    color: '#F3B26C',&#10;                    fontFamily: 'Trebuchet MS',&#10;                    lineHeight: 1,&#10;                }}&#10;            &gt;&#10;                01&#10;            &lt;/Text&gt;&#10;            &lt;Box style={{ width: 3, height: 52, background: 'rgba(255,255,255,0.45)' }} /&gt;&#10;            &lt;Text&#10;                style={{&#10;                    fontSize: 19,&#10;                    color: 'rgba(255,255,255,0.8)',&#10;                    fontFamily: 'Verdana',&#10;                }}&#10;            &gt;&#10;                Bagian pertama&#10;            &lt;/Text&gt;&#10;        &lt;/Box&gt;&#10;&#10;        &lt;Text&#10;            style={{&#10;                marginTop: 26,&#10;                fontSize: 60,&#10;                fontWeight: 'bold',&#10;                color: '#FFFFFF',&#10;                fontFamily: 'Trebuchet MS',&#10;                lineHeight: 1.15,&#10;            }}&#10;        &gt;&#10;            Kenapa ada{'\n'}aplikasi ini&#10;        &lt;/Text&gt;&#10;&#10;        &lt;Text&#10;            style={{&#10;                marginTop: 24,&#10;                fontSize: 22,&#10;                color: 'rgba(255,255,255,0.88)',&#10;                fontFamily: 'Verdana',&#10;                lineHeight: 1.5,&#10;            }}&#10;        &gt;&#10;            Kita mulai dari keluhan yang paling sering terdengar.&#10;        &lt;/Text&gt;&#10;    &lt;/Box&gt;&#10;&lt;/Slide&gt;&#10;"/>
         <p:cNvGrpSpPr/>
         <p:nvPr/>
       </p:nvGrpSpPr>
@@ -7976,7 +8344,7 @@
       </p:grpSpPr>
       <p:sp>
         <p:nvSpPr>
-          <p:cNvPr id="175" name=""/>
+          <p:cNvPr id="191" name=""/>
           <p:cNvSpPr/>
           <p:nvPr/>
         </p:nvSpPr>
@@ -8003,15 +8371,12 @@
         </p:spPr>
         <p:txBody>
           <a:bodyPr/>
-          <a:p>
-            <a:pPr/>
-            <a:endParaRPr/>
-          </a:p>
-        </p:txBody>
-      </p:sp>
-      <p:sp>
-        <p:nvSpPr>
-          <p:cNvPr id="176" name=""/>
+          <a:p/>
+        </p:txBody>
+      </p:sp>
+      <p:sp>
+        <p:nvSpPr>
+          <p:cNvPr id="192" name=""/>
           <p:cNvSpPr/>
           <p:nvPr/>
         </p:nvSpPr>
@@ -8402,22 +8767,19 @@
         </p:spPr>
         <p:txBody>
           <a:bodyPr/>
-          <a:p>
-            <a:pPr/>
-            <a:endParaRPr/>
-          </a:p>
+          <a:p/>
         </p:txBody>
       </p:sp>
       <p:pic>
         <p:nvPicPr>
-          <p:cNvPr id="177" name=""/>
+          <p:cNvPr id="193" name=""/>
           <p:cNvPicPr>
             <a:picLocks noChangeAspect="1"/>
           </p:cNvPicPr>
           <p:nvPr/>
         </p:nvPicPr>
         <p:blipFill>
-          <a:blip r:embed="rId1">
+          <a:blip>
             <a:alphaModFix amt="16000"/>
             <a:extLst>
               <a:ext uri="{96DAC541-7B7A-43D3-8B79-37D633B846F1}">
@@ -8442,7 +8804,7 @@
       </p:pic>
       <p:sp>
         <p:nvSpPr>
-          <p:cNvPr id="178" name="" descr="{&quot;isTemplate&quot;:true,&quot;type&quot;:&quot;text&quot;}"/>
+          <p:cNvPr id="194" name="" descr="{&quot;isTemplate&quot;:true,&quot;type&quot;:&quot;text&quot;}"/>
           <p:cNvSpPr txBox="1"/>
           <p:nvPr/>
         </p:nvSpPr>
@@ -8477,7 +8839,7 @@
       </p:sp>
       <p:sp>
         <p:nvSpPr>
-          <p:cNvPr id="179" name=""/>
+          <p:cNvPr id="195" name=""/>
           <p:cNvSpPr/>
           <p:nvPr/>
         </p:nvSpPr>
@@ -8498,15 +8860,12 @@
         </p:spPr>
         <p:txBody>
           <a:bodyPr/>
-          <a:p>
-            <a:pPr/>
-            <a:endParaRPr/>
-          </a:p>
-        </p:txBody>
-      </p:sp>
-      <p:sp>
-        <p:nvSpPr>
-          <p:cNvPr id="180" name="" descr="{&quot;isTemplate&quot;:true,&quot;type&quot;:&quot;text&quot;}"/>
+          <a:p/>
+        </p:txBody>
+      </p:sp>
+      <p:sp>
+        <p:nvSpPr>
+          <p:cNvPr id="196" name="" descr="{&quot;isTemplate&quot;:true,&quot;type&quot;:&quot;text&quot;}"/>
           <p:cNvSpPr txBox="1"/>
           <p:nvPr/>
         </p:nvSpPr>
@@ -8543,7 +8902,7 @@
       </p:sp>
       <p:sp>
         <p:nvSpPr>
-          <p:cNvPr id="181" name="" descr="{&quot;isTemplate&quot;:true,&quot;type&quot;:&quot;text&quot;}"/>
+          <p:cNvPr id="197" name="" descr="{&quot;isTemplate&quot;:true,&quot;type&quot;:&quot;text&quot;}"/>
           <p:cNvSpPr txBox="1"/>
           <p:nvPr/>
         </p:nvSpPr>
@@ -8596,7 +8955,7 @@
       </p:sp>
       <p:sp>
         <p:nvSpPr>
-          <p:cNvPr id="182" name="" descr="{&quot;isTemplate&quot;:true,&quot;type&quot;:&quot;text&quot;}"/>
+          <p:cNvPr id="198" name="" descr="{&quot;isTemplate&quot;:true,&quot;type&quot;:&quot;text&quot;}"/>
           <p:cNvSpPr txBox="1"/>
           <p:nvPr/>
         </p:nvSpPr>
@@ -8641,7 +9000,7 @@
   <p:cSld>
     <p:spTree>
       <p:nvGrpSpPr>
-        <p:cNvPr id="183" name=""/>
+        <p:cNvPr id="199" name="" descr="&lt;Slide&#10;    style={{&#10;        width: '1280px',&#10;        height: '720px',&#10;        background: '#FAF7F2',&#10;        paddingTop: 20,&#10;        paddingBottom: 20,&#10;        paddingLeft: 64,&#10;        paddingRight: 64,&#10;    }}&#10;&gt;&#10;    {/* ── A · blok judul ── */}&#10;    &lt;Box style={{ height: 110, justifyContent: 'center' }}&gt;&#10;        &lt;Text&#10;            style={{&#10;                fontSize: 34,&#10;                fontWeight: 'bold',&#10;                color: '#51277C',&#10;                fontFamily: 'Trebuchet MS',&#10;                lineHeight: 1.3,&#10;            }}&#10;        &gt;&#10;            Dulu, begini masalahnya&#10;        &lt;/Text&gt;&#10;        &lt;Box style={{ marginTop: 10, width: 72, height: 6, borderRadius: 3, background: '#51277C' }} /&gt;&#10;    &lt;/Box&gt;&#10;&#10;    {/* ── B · area konten ── */}&#10;    &lt;Box style={{ height: 530, flexDirection: 'row', gap: 28 }}&gt;&#10;        {/* kiri 60% — ilustrasi grup &amp; kertas jadwal */}&#10;        &lt;Box&#10;            style={{&#10;                width: '60%',&#10;                height: '100%',&#10;                background: 'rgba(81,39,124,0.06)',&#10;                borderRadius: 20,&#10;                justifyContent: 'center',&#10;                alignItems: 'center',&#10;            }}&#10;        &gt;&#10;            &lt;svg width={620} height={430} viewBox='0 0 620 430'&gt;&#10;                {/* kertas jadwal cetak, miring */}&#10;                &lt;g transform='rotate(-7 150 215)'&gt;&#10;                    &lt;rect x='26' y='34' width='250' height='350' rx='12' fill='#FFFFFF' stroke='#DCD5C9' strokeWidth='3' /&gt;&#10;                    &lt;rect x='58' y='74' width='170' height='15' rx='7' fill='#51277C' opacity='0.55' /&gt;&#10;                    &lt;rect x='58' y='118' width='186' height='10' rx='5' fill='#E6E0D5' /&gt;&#10;                    &lt;rect x='58' y='146' width='150' height='10' rx='5' fill='#EFEAE1' /&gt;&#10;                    &lt;rect x='58' y='174' width='176' height='10' rx='5' fill='#EFEAE1' /&gt;&#10;                    &lt;rect x='58' y='202' width='132' height='10' rx='5' fill='#EFEAE1' /&gt;&#10;                    &lt;rect x='58' y='230' width='164' height='10' rx='5' fill='#EFEAE1' /&gt;&#10;                    &lt;rect x='58' y='258' width='120' height='10' rx='5' fill='#EFEAE1' /&gt;&#10;                    &lt;rect x='58' y='286' width='158' height='10' rx='5' fill='#EFEAE1' /&gt;&#10;                    &lt;rect x='58' y='314' width='140' height='10' rx='5' fill='#E6E0D5' /&gt;&#10;                &lt;/g&gt;&#10;&#10;                {/* gelembung chat bertumpuk */}&#10;                &lt;g&gt;&#10;                    &lt;rect x='296' y='46' width='300' height='92' rx='18' fill='#FFFFFF' stroke='#E3DCCF' strokeWidth='3' /&gt;&#10;                    &lt;path d='M320 138 l0 26 l26 -26 z' fill='#FFFFFF' stroke='#E3DCCF' strokeWidth='3' /&gt;&#10;                    &lt;rect x='322' y='70' width='230' height='12' rx='6' fill='#C9C1B4' /&gt;&#10;                    &lt;rect x='322' y='94' width='170' height='12' rx='6' fill='#DED7CB' /&gt;&#10;                &lt;/g&gt;&#10;                &lt;g&gt;&#10;                    &lt;rect x='330' y='166' width='286' height='92' rx='18' fill='#AFC440' opacity='0.30' /&gt;&#10;                    &lt;path d='M354 258 l0 24 l24 -24 z' fill='#AFC440' opacity='0.30' /&gt;&#10;                    &lt;rect x='356' y='190' width='210' height='12' rx='6' fill='#6E7A32' opacity='0.55' /&gt;&#10;                    &lt;rect x='356' y='214' width='150' height='12' rx='6' fill='#6E7A32' opacity='0.40' /&gt;&#10;                &lt;/g&gt;&#10;                &lt;g&gt;&#10;                    &lt;rect x='288' y='286' width='312' height='96' rx='18' fill='#FFFFFF' stroke='#E3DCCF' strokeWidth='3' /&gt;&#10;                    &lt;path d='M566 382 l0 24 l-24 -24 z' fill='#FFFFFF' stroke='#E3DCCF' strokeWidth='3' /&gt;&#10;                    &lt;rect x='314' y='310' width='200' height='12' rx='6' fill='#C9C1B4' /&gt;&#10;                    &lt;rect x='314' y='334' width='150' height='12' rx='6' fill='#DED7CB' /&gt;&#10;                &lt;/g&gt;&#10;&#10;                {/* tanda tanya besar */}&#10;                &lt;circle cx='546' cy='62' r='44' fill='#F3B26C' /&gt;&#10;                &lt;text&#10;                    x='546'&#10;                    y='82'&#10;                    fontFamily='Trebuchet MS'&#10;                    fontSize='54'&#10;                    fontWeight='bold'&#10;                    fill='#51277C'&#10;                    textAnchor='middle'&#10;                &gt;&#10;                    ?&#10;                &lt;/text&gt;&#10;            &lt;/svg&gt;&#10;        &lt;/Box&gt;&#10;&#10;        {/* kanan 40% — tiga masalah */}&#10;        &lt;Box style={{ width: '40%', height: '100%', justifyContent: 'space-between' }}&gt;&#10;            &lt;Box&#10;                style={{&#10;                    height: 166,&#10;                    background: '#FFFFFF',&#10;                    borderRadius: 16,&#10;                    boxShadow: '0 4px 20px rgba(0,0,0,0.08)',&#10;                    padding: 20,&#10;                }}&#10;            &gt;&#10;                &lt;Box style={{ flexDirection: 'row', gap: 14, alignItems: 'flex-start' }}&gt;&#10;                    &lt;Box&#10;                        style={{&#10;                            width: 48,&#10;                            height: 48,&#10;                            borderRadius: 24,&#10;                            background: 'rgba(81,39,124,0.10)',&#10;                            justifyContent: 'center',&#10;                            alignItems: 'center',&#10;                        }}&#10;                    &gt;&#10;                        &lt;svg width={26} height={26} viewBox=&quot;0 0 512 512&quot; xmlns=&quot;http://www.w3.org/2000/svg&quot;&gt;&lt;path fill=&quot;#51277C&quot; d=&quot;M512 240c0 114.9-114.6 208-256 208c-37.1 0-72.3-6.4-104.1-17.9c-11.9 8.7-31.3 20.6-54.3 30.6C73.6 471.1 44.7 480 16 480c-6.5 0-12.3-3.9-14.8-9.9c-2.5-6-1.1-12.8 3.4-17.4l0 0 0 0 0 0 0 0 .3-.3c.3-.3 .7-.7 1.3-1.4c1.1-1.2 2.8-3.1 4.9-5.7c4.1-5 9.6-12.4 15.2-21.6c10-16.6 19.5-38.4 21.4-62.9C17.7 326.8 0 285.1 0 240C0 125.1 114.6 32 256 32s256 93.1 256 208z&quot; /&gt;&lt;/svg&gt;&#10;                    &lt;/Box&gt;&#10;                    &lt;Box style={{ flex: 1 }}&gt;&#10;                        &lt;Text&#10;                            style={{&#10;                                fontSize: 24,&#10;                                fontWeight: 'bold',&#10;                                color: '#2A2333',&#10;                                fontFamily: 'Trebuchet MS',&#10;                                lineHeight: 1.3,&#10;                            }}&#10;                        &gt;&#10;                            Menu harus ditanya&#10;                        &lt;/Text&gt;&#10;                    &lt;/Box&gt;&#10;                &lt;/Box&gt;&#10;                &lt;Text&#10;                    style={{&#10;                        marginTop: 12,&#10;                        fontSize: 18,&#10;                        color: '#6B6478',&#10;                        fontFamily: 'Verdana',&#10;                        lineHeight: 1.45,&#10;                    }}&#10;                &gt;&#10;                    Tidak ada satu tempat yang jadi rujukan. Jawabannya kadang lambat, kadang beda-beda.&#10;                &lt;/Text&gt;&#10;                &lt;Box style={{ marginTop: 'auto' }}&gt;&#10;                    &lt;Text style={{ fontSize: 15, color: '#51277C', fontFamily: 'Verdana', fontWeight: 'bold' }}&gt;&#10;                        Setiap hari&#10;                    &lt;/Text&gt;&#10;                &lt;/Box&gt;&#10;            &lt;/Box&gt;&#10;&#10;            &lt;Box&#10;                style={{&#10;                    height: 166,&#10;                    background: '#FFFFFF',&#10;                    borderRadius: 16,&#10;                    boxShadow: '0 4px 20px rgba(0,0,0,0.08)',&#10;                    padding: 20,&#10;                }}&#10;            &gt;&#10;                &lt;Box style={{ flexDirection: 'row', gap: 14, alignItems: 'flex-start' }}&gt;&#10;                    &lt;Box&#10;                        style={{&#10;                            width: 48,&#10;                            height: 48,&#10;                            borderRadius: 24,&#10;                            background: 'rgba(81,39,124,0.10)',&#10;                            justifyContent: 'center',&#10;                            alignItems: 'center',&#10;                        }}&#10;                    &gt;&#10;                        &lt;svg width={26} height={26} viewBox=&quot;0 0 384 512&quot; xmlns=&quot;http://www.w3.org/2000/svg&quot;&gt;&lt;path fill=&quot;#51277C&quot; d=&quot;M0 64C0 28.7 28.7 0 64 0H224V128c0 17.7 14.3 32 32 32H384V448c0 35.3-28.7 64-64 64H64c-35.3 0-64-28.7-64-64V64zm384 64H256V0L384 128z&quot; /&gt;&lt;/svg&gt;&#10;                    &lt;/Box&gt;&#10;                    &lt;Box style={{ flex: 1 }}&gt;&#10;                        &lt;Text&#10;                            style={{&#10;                                fontSize: 24,&#10;                                fontWeight: 'bold',&#10;                                color: '#2A2333',&#10;                                fontFamily: 'Trebuchet MS',&#10;                                lineHeight: 1.3,&#10;                            }}&#10;                        &gt;&#10;                            Riwayat hilang&#10;                        &lt;/Text&gt;&#10;                    &lt;/Box&gt;&#10;                &lt;/Box&gt;&#10;                &lt;Text&#10;                    style={{&#10;                        marginTop: 12,&#10;                        fontSize: 18,&#10;                        color: '#6B6478',&#10;                        fontFamily: 'Verdana',&#10;                        lineHeight: 1.45,&#10;                    }}&#10;                &gt;&#10;                    Menu bulan lalu tidak tersimpan rapi. Ingin tahu rotasinya, harus buka-buka lagi.&#10;                &lt;/Text&gt;&#10;                &lt;Box style={{ marginTop: 'auto' }}&gt;&#10;                    &lt;Text style={{ fontSize: 15, color: '#51277C', fontFamily: 'Verdana', fontWeight: 'bold' }}&gt;&#10;                        Tidak bisa dilacak&#10;                    &lt;/Text&gt;&#10;                &lt;/Box&gt;&#10;            &lt;/Box&gt;&#10;&#10;            &lt;Box&#10;                style={{&#10;                    height: 166,&#10;                    background: '#FFFFFF',&#10;                    borderRadius: 16,&#10;                    boxShadow: '0 4px 20px rgba(0,0,0,0.08)',&#10;                    padding: 20,&#10;                    borderLeft: '8px solid #F3B26C',&#10;                }}&#10;            &gt;&#10;                &lt;Box style={{ flexDirection: 'row', gap: 14, alignItems: 'flex-start' }}&gt;&#10;                    &lt;Box&#10;                        style={{&#10;                            width: 48,&#10;                            height: 48,&#10;                            borderRadius: 24,&#10;                            background: 'rgba(243,178,108,0.28)',&#10;                            justifyContent: 'center',&#10;                            alignItems: 'center',&#10;                        }}&#10;                    &gt;&#10;                        &lt;svg width={26} height={26} viewBox=&quot;0 0 512 512&quot; xmlns=&quot;http://www.w3.org/2000/svg&quot;&gt;&lt;path fill=&quot;#51277C&quot; d=&quot;M256 512A256 256 0 1 0 256 0a256 256 0 1 0 0 512zm0-384c13.3 0 24 10.7 24 24V264c0 13.3-10.7 24-24 24s-24-10.7-24-24V152c0-13.3 10.7-24 24-24zM224 352a32 32 0 1 1 64 0 32 32 0 1 1 -64 0z&quot; /&gt;&lt;/svg&gt;&#10;                    &lt;/Box&gt;&#10;                    &lt;Box style={{ flex: 1 }}&gt;&#10;                        &lt;Text&#10;                            style={{&#10;                                fontSize: 24,&#10;                                fontWeight: 'bold',&#10;                                color: '#2A2333',&#10;                                fontFamily: 'Trebuchet MS',&#10;                                lineHeight: 1.3,&#10;                            }}&#10;                        &gt;&#10;                            Rebutan tanggal&#10;                        &lt;/Text&gt;&#10;                    &lt;/Box&gt;&#10;                &lt;/Box&gt;&#10;                &lt;Text&#10;                    style={{&#10;                        marginTop: 12,&#10;                        fontSize: 18,&#10;                        color: '#6B6478',&#10;                        fontFamily: 'Verdana',&#10;                        lineHeight: 1.45,&#10;                    }}&#10;                &gt;&#10;                    Dua orang bisa merasa sama-sama sudah mengambil tanggal yang sama.&#10;                &lt;/Text&gt;&#10;                &lt;Box style={{ marginTop: 'auto' }}&gt;&#10;                    &lt;Text style={{ fontSize: 15, color: '#51277C', fontFamily: 'Verdana', fontWeight: 'bold' }}&gt;&#10;                        Paling sering jadi masalah&#10;                    &lt;/Text&gt;&#10;                &lt;/Box&gt;&#10;            &lt;/Box&gt;&#10;        &lt;/Box&gt;&#10;    &lt;/Box&gt;&#10;&#10;    {/* ── C · bilah kaki ── */}&#10;    &lt;Box&#10;        style={{&#10;            height: 40,&#10;            flexDirection: 'row',&#10;            alignItems: 'center',&#10;            justifyContent: 'space-between',&#10;        }}&#10;    &gt;&#10;        &lt;Text style={{ fontSize: 14, color: '#6B6478', fontFamily: 'Verdana' }}&gt;&#10;            Pizza Snack Play · Panduan Orang Tua&#10;        &lt;/Text&gt;&#10;        &lt;Text style={{ fontSize: 14, color: '#6B6478', fontFamily: 'Verdana' }}&gt;04 / 16&lt;/Text&gt;&#10;    &lt;/Box&gt;&#10;&lt;/Slide&gt;&#10;"/>
         <p:cNvGrpSpPr/>
         <p:nvPr/>
       </p:nvGrpSpPr>
@@ -8655,7 +9014,7 @@
       </p:grpSpPr>
       <p:sp>
         <p:nvSpPr>
-          <p:cNvPr id="184" name=""/>
+          <p:cNvPr id="200" name=""/>
           <p:cNvSpPr/>
           <p:nvPr/>
         </p:nvSpPr>
@@ -8674,15 +9033,12 @@
         </p:spPr>
         <p:txBody>
           <a:bodyPr/>
-          <a:p>
-            <a:pPr/>
-            <a:endParaRPr/>
-          </a:p>
-        </p:txBody>
-      </p:sp>
-      <p:sp>
-        <p:nvSpPr>
-          <p:cNvPr id="185" name="" descr="{&quot;isTemplate&quot;:true,&quot;type&quot;:&quot;text&quot;}"/>
+          <a:p/>
+        </p:txBody>
+      </p:sp>
+      <p:sp>
+        <p:nvSpPr>
+          <p:cNvPr id="201" name="" descr="{&quot;isTemplate&quot;:true,&quot;type&quot;:&quot;text&quot;}"/>
           <p:cNvSpPr txBox="1"/>
           <p:nvPr/>
         </p:nvSpPr>
@@ -8717,7 +9073,7 @@
       </p:sp>
       <p:sp>
         <p:nvSpPr>
-          <p:cNvPr id="186" name=""/>
+          <p:cNvPr id="202" name=""/>
           <p:cNvSpPr/>
           <p:nvPr/>
         </p:nvSpPr>
@@ -8738,15 +9094,12 @@
         </p:spPr>
         <p:txBody>
           <a:bodyPr/>
-          <a:p>
-            <a:pPr/>
-            <a:endParaRPr/>
-          </a:p>
-        </p:txBody>
-      </p:sp>
-      <p:sp>
-        <p:nvSpPr>
-          <p:cNvPr id="187" name=""/>
+          <a:p/>
+        </p:txBody>
+      </p:sp>
+      <p:sp>
+        <p:nvSpPr>
+          <p:cNvPr id="203" name=""/>
           <p:cNvSpPr/>
           <p:nvPr/>
         </p:nvSpPr>
@@ -8769,22 +9122,19 @@
         </p:spPr>
         <p:txBody>
           <a:bodyPr/>
-          <a:p>
-            <a:pPr/>
-            <a:endParaRPr/>
-          </a:p>
+          <a:p/>
         </p:txBody>
       </p:sp>
       <p:pic>
         <p:nvPicPr>
-          <p:cNvPr id="188" name=""/>
+          <p:cNvPr id="204" name=""/>
           <p:cNvPicPr>
             <a:picLocks noChangeAspect="1"/>
           </p:cNvPicPr>
           <p:nvPr/>
         </p:nvPicPr>
         <p:blipFill>
-          <a:blip r:embed="rId1">
+          <a:blip>
             <a:extLst>
               <a:ext uri="{96DAC541-7B7A-43D3-8B79-37D633B846F1}">
                 <asvg:svgBlip r:embed="rId1"/>
@@ -8808,7 +9158,7 @@
       </p:pic>
       <p:sp>
         <p:nvSpPr>
-          <p:cNvPr id="189" name=""/>
+          <p:cNvPr id="205" name=""/>
           <p:cNvSpPr/>
           <p:nvPr/>
         </p:nvSpPr>
@@ -8836,15 +9186,12 @@
         </p:spPr>
         <p:txBody>
           <a:bodyPr/>
-          <a:p>
-            <a:pPr/>
-            <a:endParaRPr/>
-          </a:p>
-        </p:txBody>
-      </p:sp>
-      <p:sp>
-        <p:nvSpPr>
-          <p:cNvPr id="190" name=""/>
+          <a:p/>
+        </p:txBody>
+      </p:sp>
+      <p:sp>
+        <p:nvSpPr>
+          <p:cNvPr id="206" name=""/>
           <p:cNvSpPr/>
           <p:nvPr/>
         </p:nvSpPr>
@@ -8867,22 +9214,19 @@
         </p:spPr>
         <p:txBody>
           <a:bodyPr/>
-          <a:p>
-            <a:pPr/>
-            <a:endParaRPr/>
-          </a:p>
+          <a:p/>
         </p:txBody>
       </p:sp>
       <p:pic>
         <p:nvPicPr>
-          <p:cNvPr id="191" name=""/>
+          <p:cNvPr id="207" name=""/>
           <p:cNvPicPr>
             <a:picLocks noChangeAspect="1"/>
           </p:cNvPicPr>
           <p:nvPr/>
         </p:nvPicPr>
         <p:blipFill>
-          <a:blip r:embed="rId2">
+          <a:blip>
             <a:extLst>
               <a:ext uri="{96DAC541-7B7A-43D3-8B79-37D633B846F1}">
                 <asvg:svgBlip r:embed="rId2"/>
@@ -8906,7 +9250,7 @@
       </p:pic>
       <p:sp>
         <p:nvSpPr>
-          <p:cNvPr id="192" name="" descr="{&quot;isTemplate&quot;:true,&quot;type&quot;:&quot;text&quot;}"/>
+          <p:cNvPr id="208" name="" descr="{&quot;isTemplate&quot;:true,&quot;type&quot;:&quot;text&quot;}"/>
           <p:cNvSpPr txBox="1"/>
           <p:nvPr/>
         </p:nvSpPr>
@@ -8941,7 +9285,7 @@
       </p:sp>
       <p:sp>
         <p:nvSpPr>
-          <p:cNvPr id="193" name="" descr="{&quot;isTemplate&quot;:true,&quot;type&quot;:&quot;text&quot;}"/>
+          <p:cNvPr id="209" name="" descr="{&quot;isTemplate&quot;:true,&quot;type&quot;:&quot;text&quot;}"/>
           <p:cNvSpPr txBox="1"/>
           <p:nvPr/>
         </p:nvSpPr>
@@ -8978,7 +9322,7 @@
       </p:sp>
       <p:sp>
         <p:nvSpPr>
-          <p:cNvPr id="194" name="" descr="{&quot;isTemplate&quot;:true,&quot;type&quot;:&quot;text&quot;}"/>
+          <p:cNvPr id="210" name="" descr="{&quot;isTemplate&quot;:true,&quot;type&quot;:&quot;text&quot;}"/>
           <p:cNvSpPr txBox="1"/>
           <p:nvPr/>
         </p:nvSpPr>
@@ -9013,7 +9357,7 @@
       </p:sp>
       <p:sp>
         <p:nvSpPr>
-          <p:cNvPr id="195" name=""/>
+          <p:cNvPr id="211" name=""/>
           <p:cNvSpPr/>
           <p:nvPr/>
         </p:nvSpPr>
@@ -9041,15 +9385,12 @@
         </p:spPr>
         <p:txBody>
           <a:bodyPr/>
-          <a:p>
-            <a:pPr/>
-            <a:endParaRPr/>
-          </a:p>
-        </p:txBody>
-      </p:sp>
-      <p:sp>
-        <p:nvSpPr>
-          <p:cNvPr id="196" name=""/>
+          <a:p/>
+        </p:txBody>
+      </p:sp>
+      <p:sp>
+        <p:nvSpPr>
+          <p:cNvPr id="212" name=""/>
           <p:cNvSpPr/>
           <p:nvPr/>
         </p:nvSpPr>
@@ -9072,22 +9413,19 @@
         </p:spPr>
         <p:txBody>
           <a:bodyPr/>
-          <a:p>
-            <a:pPr/>
-            <a:endParaRPr/>
-          </a:p>
+          <a:p/>
         </p:txBody>
       </p:sp>
       <p:pic>
         <p:nvPicPr>
-          <p:cNvPr id="197" name=""/>
+          <p:cNvPr id="213" name=""/>
           <p:cNvPicPr>
             <a:picLocks noChangeAspect="1"/>
           </p:cNvPicPr>
           <p:nvPr/>
         </p:nvPicPr>
         <p:blipFill>
-          <a:blip r:embed="rId3">
+          <a:blip>
             <a:extLst>
               <a:ext uri="{96DAC541-7B7A-43D3-8B79-37D633B846F1}">
                 <asvg:svgBlip r:embed="rId3"/>
@@ -9111,7 +9449,7 @@
       </p:pic>
       <p:sp>
         <p:nvSpPr>
-          <p:cNvPr id="198" name="" descr="{&quot;isTemplate&quot;:true,&quot;type&quot;:&quot;text&quot;}"/>
+          <p:cNvPr id="214" name="" descr="{&quot;isTemplate&quot;:true,&quot;type&quot;:&quot;text&quot;}"/>
           <p:cNvSpPr txBox="1"/>
           <p:nvPr/>
         </p:nvSpPr>
@@ -9146,7 +9484,7 @@
       </p:sp>
       <p:sp>
         <p:nvSpPr>
-          <p:cNvPr id="199" name="" descr="{&quot;isTemplate&quot;:true,&quot;type&quot;:&quot;text&quot;}"/>
+          <p:cNvPr id="215" name="" descr="{&quot;isTemplate&quot;:true,&quot;type&quot;:&quot;text&quot;}"/>
           <p:cNvSpPr txBox="1"/>
           <p:nvPr/>
         </p:nvSpPr>
@@ -9183,7 +9521,7 @@
       </p:sp>
       <p:sp>
         <p:nvSpPr>
-          <p:cNvPr id="200" name="" descr="{&quot;isTemplate&quot;:true,&quot;type&quot;:&quot;text&quot;}"/>
+          <p:cNvPr id="216" name="" descr="{&quot;isTemplate&quot;:true,&quot;type&quot;:&quot;text&quot;}"/>
           <p:cNvSpPr txBox="1"/>
           <p:nvPr/>
         </p:nvSpPr>
@@ -9218,7 +9556,7 @@
       </p:sp>
       <p:sp>
         <p:nvSpPr>
-          <p:cNvPr id="201" name=""/>
+          <p:cNvPr id="217" name=""/>
           <p:cNvSpPr/>
           <p:nvPr/>
         </p:nvSpPr>
@@ -9246,15 +9584,12 @@
         </p:spPr>
         <p:txBody>
           <a:bodyPr/>
-          <a:p>
-            <a:pPr/>
-            <a:endParaRPr/>
-          </a:p>
-        </p:txBody>
-      </p:sp>
-      <p:sp>
-        <p:nvSpPr>
-          <p:cNvPr id="202" name=""/>
+          <a:p/>
+        </p:txBody>
+      </p:sp>
+      <p:sp>
+        <p:nvSpPr>
+          <p:cNvPr id="218" name=""/>
           <p:cNvSpPr/>
           <p:nvPr/>
         </p:nvSpPr>
@@ -9306,15 +9641,12 @@
         </p:spPr>
         <p:txBody>
           <a:bodyPr/>
-          <a:p>
-            <a:pPr/>
-            <a:endParaRPr/>
-          </a:p>
-        </p:txBody>
-      </p:sp>
-      <p:sp>
-        <p:nvSpPr>
-          <p:cNvPr id="203" name=""/>
+          <a:p/>
+        </p:txBody>
+      </p:sp>
+      <p:sp>
+        <p:nvSpPr>
+          <p:cNvPr id="219" name=""/>
           <p:cNvSpPr/>
           <p:nvPr/>
         </p:nvSpPr>
@@ -9337,22 +9669,19 @@
         </p:spPr>
         <p:txBody>
           <a:bodyPr/>
-          <a:p>
-            <a:pPr/>
-            <a:endParaRPr/>
-          </a:p>
+          <a:p/>
         </p:txBody>
       </p:sp>
       <p:pic>
         <p:nvPicPr>
-          <p:cNvPr id="204" name=""/>
+          <p:cNvPr id="220" name=""/>
           <p:cNvPicPr>
             <a:picLocks noChangeAspect="1"/>
           </p:cNvPicPr>
           <p:nvPr/>
         </p:nvPicPr>
         <p:blipFill>
-          <a:blip r:embed="rId4">
+          <a:blip>
             <a:extLst>
               <a:ext uri="{96DAC541-7B7A-43D3-8B79-37D633B846F1}">
                 <asvg:svgBlip r:embed="rId4"/>
@@ -9376,7 +9705,7 @@
       </p:pic>
       <p:sp>
         <p:nvSpPr>
-          <p:cNvPr id="205" name="" descr="{&quot;isTemplate&quot;:true,&quot;type&quot;:&quot;text&quot;}"/>
+          <p:cNvPr id="221" name="" descr="{&quot;isTemplate&quot;:true,&quot;type&quot;:&quot;text&quot;}"/>
           <p:cNvSpPr txBox="1"/>
           <p:nvPr/>
         </p:nvSpPr>
@@ -9411,7 +9740,7 @@
       </p:sp>
       <p:sp>
         <p:nvSpPr>
-          <p:cNvPr id="206" name="" descr="{&quot;isTemplate&quot;:true,&quot;type&quot;:&quot;text&quot;}"/>
+          <p:cNvPr id="222" name="" descr="{&quot;isTemplate&quot;:true,&quot;type&quot;:&quot;text&quot;}"/>
           <p:cNvSpPr txBox="1"/>
           <p:nvPr/>
         </p:nvSpPr>
@@ -9448,7 +9777,7 @@
       </p:sp>
       <p:sp>
         <p:nvSpPr>
-          <p:cNvPr id="207" name="" descr="{&quot;isTemplate&quot;:true,&quot;type&quot;:&quot;text&quot;}"/>
+          <p:cNvPr id="223" name="" descr="{&quot;isTemplate&quot;:true,&quot;type&quot;:&quot;text&quot;}"/>
           <p:cNvSpPr txBox="1"/>
           <p:nvPr/>
         </p:nvSpPr>
@@ -9483,7 +9812,7 @@
       </p:sp>
       <p:sp>
         <p:nvSpPr>
-          <p:cNvPr id="208" name="" descr="{&quot;isTemplate&quot;:true,&quot;type&quot;:&quot;text&quot;}"/>
+          <p:cNvPr id="224" name="" descr="{&quot;isTemplate&quot;:true,&quot;type&quot;:&quot;text&quot;}"/>
           <p:cNvSpPr txBox="1"/>
           <p:nvPr/>
         </p:nvSpPr>
@@ -9518,7 +9847,7 @@
       </p:sp>
       <p:sp>
         <p:nvSpPr>
-          <p:cNvPr id="209" name="" descr="{&quot;isTemplate&quot;:true,&quot;type&quot;:&quot;text&quot;}"/>
+          <p:cNvPr id="225" name="" descr="{&quot;isTemplate&quot;:true,&quot;type&quot;:&quot;text&quot;}"/>
           <p:cNvSpPr txBox="1"/>
           <p:nvPr/>
         </p:nvSpPr>
@@ -9545,7 +9874,7 @@
                 <a:latin typeface="Verdana"/>
                 <a:ea typeface="Verdana"/>
               </a:rPr>
-              <a:t>04 / 15</a:t>
+              <a:t>04 / 16</a:t>
             </a:r>
             <a:endParaRPr/>
           </a:p>
@@ -9561,7 +9890,7 @@
   <p:cSld>
     <p:spTree>
       <p:nvGrpSpPr>
-        <p:cNvPr id="210" name=""/>
+        <p:cNvPr id="226" name="" descr="&lt;Slide&#10;    style={{&#10;        width: '1280px',&#10;        height: '720px',&#10;        background: '#FAF7F2',&#10;        paddingTop: 20,&#10;        paddingBottom: 20,&#10;        paddingLeft: 64,&#10;        paddingRight: 64,&#10;    }}&#10;&gt;&#10;    {/* ── A · blok judul ── */}&#10;    &lt;Box style={{ height: 110, justifyContent: 'center' }}&gt;&#10;        &lt;Text&#10;            style={{&#10;                fontSize: 34,&#10;                fontWeight: 'bold',&#10;                color: '#51277C',&#10;                fontFamily: 'Trebuchet MS',&#10;                lineHeight: 1.3,&#10;            }}&#10;        &gt;&#10;            Sekarang: cukup satu aplikasi&#10;        &lt;/Text&gt;&#10;        &lt;Box style={{ marginTop: 10, width: 72, height: 6, borderRadius: 3, background: '#51277C' }} /&gt;&#10;    &lt;/Box&gt;&#10;&#10;    {/* ── B · area konten ── */}&#10;    &lt;Box style={{ height: 530, flexDirection: 'row', gap: 28 }}&gt;&#10;        {/* ── kiri 44% · teks ── */}&#10;        &lt;Box&#10;            style={{&#10;                width: '44%',&#10;                justifyContent: 'center',&#10;            }}&#10;        &gt;&#10;        &lt;Box&#10;            style={{&#10;                flexDirection: 'row',&#10;                alignItems: 'center',&#10;                gap: 10,&#10;                alignSelf: 'flex-start',&#10;                background: 'rgba(175,196,64,0.28)',&#10;                borderRadius: 999,&#10;                paddingTop: 8,&#10;                paddingBottom: 8,&#10;                paddingLeft: 18,&#10;                paddingRight: 20,&#10;            }}&#10;        &gt;&#10;            &lt;Text style={{ fontSize: 16, color: '#4F5A24', fontFamily: 'Verdana', fontWeight: 'bold' }}&gt;&#10;                Solusinya&#10;            &lt;/Text&gt;&#10;        &lt;/Box&gt;&#10;&#10;        &lt;Text&#10;            style={{&#10;                marginTop: 18,&#10;                fontSize: 46,&#10;                fontWeight: 'bold',&#10;                color: '#51277C',&#10;                fontFamily: 'Trebuchet MS',&#10;                lineHeight: 1.15,&#10;            }}&#10;        &gt;&#10;            Menu jelas,{'\n'}giliran jelas.&#10;        &lt;/Text&gt;&#10;&#10;        &lt;Text&#10;            style={{&#10;                marginTop: 16,&#10;                fontSize: 21,&#10;                color: '#2A2333',&#10;                fontFamily: 'Verdana',&#10;                lineHeight: 1.5,&#10;            }}&#10;        &gt;&#10;            Tidak perlu tanya-tanya lagi ke grup.&#10;        &lt;/Text&gt;&#10;&#10;        &lt;Box style={{ marginTop: 22, gap: 14 }}&gt;&#10;            {[&#10;                'Jadwal snack kelihatan kapan saja',&#10;                'Giliran piket anak tercatat rapi',&#10;                'Tanggal kosong bisa diambil sendiri',&#10;            ].map((t, i) =&gt; (&#10;                &lt;Box key={i} style={{ flexDirection: 'row', alignItems: 'center', gap: 14 }}&gt;&#10;                    &lt;Box&#10;                        style={{&#10;                            width: 34,&#10;                            height: 34,&#10;                            borderRadius: 17,&#10;                            background: '#AFC440',&#10;                            justifyContent: 'center',&#10;                            alignItems: 'center',&#10;                        }}&#10;                    &gt;&#10;                        &lt;svg width={18} height={18} viewBox=&quot;0 0 448 512&quot; xmlns=&quot;http://www.w3.org/2000/svg&quot;&gt;&lt;path fill=&quot;#FFFFFF&quot; d=&quot;M438.6 105.4c12.5 12.5 12.5 32.8 0 45.3l-256 256c-12.5 12.5-32.8 12.5-45.3 0l-128-128c-12.5-12.5-12.5-32.8 0-45.3s32.8-12.5 45.3 0L160 338.7 393.4 105.4c12.5-12.5 32.8-12.5 45.3 0z&quot; /&gt;&lt;/svg&gt;&#10;                    &lt;/Box&gt;&#10;                    &lt;Text style={{ fontSize: 20, color: '#2A2333', fontFamily: 'Verdana' }}&gt;{t}&lt;/Text&gt;&#10;                &lt;/Box&gt;&#10;            ))}&#10;        &lt;/Box&gt;&#10;&#10;        &lt;Box&#10;            style={{&#10;                marginTop: 24,&#10;                alignSelf: 'flex-start',&#10;                background: '#F3B26C',&#10;                borderRadius: 14,&#10;                paddingTop: 13,&#10;                paddingBottom: 13,&#10;                paddingLeft: 24,&#10;                paddingRight: 26,&#10;            }}&#10;        &gt;&#10;            &lt;Text style={{ fontSize: 19, color: '#51277C', fontFamily: 'Trebuchet MS', fontWeight: 'bold' }}&gt;&#10;                Satu tempat. Satu rujukan.&#10;            &lt;/Text&gt;&#10;        &lt;/Box&gt;&#10;    &lt;/Box&gt;&#10;&#10;    {/* ── kanan 52% · panel ungu + ponsel ── */}&#10;    &lt;Box&#10;        style={{&#10;            width: '52%',&#10;            height: '100%',&#10;            background: 'linear-gradient(135deg, #51277C 0%, #7A45A8 100%)',&#10;            borderRadius: 20,&#10;            justifyContent: 'center',&#10;            alignItems: 'center',&#10;            position: 'relative',&#10;            overflow: 'hidden',&#10;        }}&#10;    &gt;&#10;        &lt;Box&#10;            style={{&#10;                position: 'absolute',&#10;                top: -110,&#10;                left: -90,&#10;                width: 340,&#10;                height: 340,&#10;                borderRadius: 170,&#10;                background: '#AFC440',&#10;                opacity: 0.16,&#10;            }}&#10;        /&gt;&#10;        &lt;Box style={{ position: 'relative', zIndex: 1 }}&gt;&#10;            &lt;svg width={376} height={490} viewBox='0 0 430 560'&gt;&#10;                {/* bingkai ponsel */}&#10;                &lt;rect x='12' y='10' width='406' height='540' rx='46' fill='#FFFFFF' stroke='#E3DCCF' strokeWidth='4' /&gt;&#10;                &lt;rect x='176' y='26' width='78' height='11' rx='6' fill='#DCD5C9' /&gt;&#10;&#10;                {/* bilah atas aplikasi */}&#10;                &lt;rect x='38' y='56' width='354' height='62' rx='14' fill='#51277C' /&gt;&#10;                &lt;text x='60' y='96' fontFamily='Trebuchet MS' fontSize='25' fontWeight='bold' fill='#FFFFFF'&gt;&#10;                    Hari Ini&#10;                &lt;/text&gt;&#10;                &lt;circle cx='366' cy='87' r='16' fill='#F3B26C' /&gt;&#10;&#10;                {/* kartu menu hari ini */}&#10;                &lt;rect x='38' y='136' width='354' height='128' rx='16' fill='#F7F3EC' stroke='#E6DFD2' strokeWidth='2' /&gt;&#10;                &lt;rect x='60' y='158' width='92' height='26' rx='13' fill='#AFC440' /&gt;&#10;                &lt;text x='74' y='177' fontFamily='Verdana' fontSize='15' fill='#3F4718'&gt;&#10;                    Selasa&#10;                &lt;/text&gt;&#10;                &lt;text x='60' y='218' fontFamily='Trebuchet MS' fontSize='26' fontWeight='bold' fill='#2A2333'&gt;&#10;                    Roti coklat&#10;                &lt;/text&gt;&#10;                &lt;text x='60' y='246' fontFamily='Verdana' fontSize='19' fill='#6B6478'&gt;&#10;                    + Jeruk manis&#10;                &lt;/text&gt;&#10;&#10;                {/* kartu minggu ini */}&#10;                &lt;rect x='38' y='280' width='354' height='166' rx='16' fill='#F7F3EC' stroke='#E6DFD2' strokeWidth='2' /&gt;&#10;                &lt;text x='60' y='310' fontFamily='Trebuchet MS' fontSize='21' fontWeight='bold' fill='#51277C'&gt;&#10;                    Minggu ini&#10;                &lt;/text&gt;&#10;                &lt;rect x='60' y='326' width='310' height='1' fill='#E6DFD2' /&gt;&#10;                &lt;circle cx='74' cy='352' r='7' fill='#AFC440' /&gt;&#10;                &lt;rect x='92' y='344' width='150' height='11' rx='5' fill='#C9C1B4' /&gt;&#10;                &lt;circle cx='74' cy='382' r='7' fill='#AFC440' /&gt;&#10;                &lt;rect x='92' y='374' width='120' height='11' rx='5' fill='#DED7CB' /&gt;&#10;                &lt;circle cx='74' cy='412' r='7' fill='#F3B26C' /&gt;&#10;                &lt;rect x='92' y='404' width='160' height='11' rx='5' fill='#DED7CB' /&gt;&#10;&#10;                {/* bilah navigasi bawah */}&#10;                &lt;rect x='52' y='470' width='326' height='60' rx='30' fill='#FFFFFF' stroke='#E6DFD2' strokeWidth='2' /&gt;&#10;                &lt;circle cx='100' cy='500' r='11' fill='#51277C' /&gt;&#10;                &lt;circle cx='160' cy='500' r='11' fill='#DED7CB' /&gt;&#10;                &lt;circle cx='270' cy='500' r='11' fill='#DED7CB' /&gt;&#10;                &lt;circle cx='330' cy='500' r='11' fill='#DED7CB' /&gt;&#10;                &lt;circle cx='215' cy='470' r='24' fill='#51277C' /&gt;&#10;                &lt;rect x='203' y='459' width='24' height='4' rx='2' fill='#FFFFFF' /&gt;&#10;                &lt;rect x='203' y='467' width='24' height='4' rx='2' fill='#FFFFFF' /&gt;&#10;                &lt;rect x='203' y='475' width='24' height='4' rx='2' fill='#FFFFFF' /&gt;&#10;            &lt;/svg&gt;&#10;        &lt;/Box&gt;&#10;    &lt;/Box&gt;&#10;    &lt;/Box&gt;&#10;&#10;    {/* ── C · bilah kaki ── */}&#10;    &lt;Box&#10;        style={{&#10;            height: 40,&#10;            flexDirection: 'row',&#10;            alignItems: 'center',&#10;            justifyContent: 'space-between',&#10;        }}&#10;    &gt;&#10;        &lt;Text style={{ fontSize: 14, color: '#6B6478', fontFamily: 'Verdana' }}&gt;&#10;            Pizza Snack Play · Panduan Orang Tua&#10;        &lt;/Text&gt;&#10;        &lt;Text style={{ fontSize: 14, color: '#6B6478', fontFamily: 'Verdana' }}&gt;05 / 16&lt;/Text&gt;&#10;    &lt;/Box&gt;&#10;&lt;/Slide&gt;&#10;"/>
         <p:cNvGrpSpPr/>
         <p:nvPr/>
       </p:nvGrpSpPr>
@@ -9575,7 +9904,7 @@
       </p:grpSpPr>
       <p:sp>
         <p:nvSpPr>
-          <p:cNvPr id="211" name=""/>
+          <p:cNvPr id="227" name=""/>
           <p:cNvSpPr/>
           <p:nvPr/>
         </p:nvSpPr>
@@ -9594,15 +9923,12 @@
         </p:spPr>
         <p:txBody>
           <a:bodyPr/>
-          <a:p>
-            <a:pPr/>
-            <a:endParaRPr/>
-          </a:p>
-        </p:txBody>
-      </p:sp>
-      <p:sp>
-        <p:nvSpPr>
-          <p:cNvPr id="212" name="" descr="{&quot;isTemplate&quot;:true,&quot;type&quot;:&quot;text&quot;}"/>
+          <a:p/>
+        </p:txBody>
+      </p:sp>
+      <p:sp>
+        <p:nvSpPr>
+          <p:cNvPr id="228" name="" descr="{&quot;isTemplate&quot;:true,&quot;type&quot;:&quot;text&quot;}"/>
           <p:cNvSpPr txBox="1"/>
           <p:nvPr/>
         </p:nvSpPr>
@@ -9637,7 +9963,7 @@
       </p:sp>
       <p:sp>
         <p:nvSpPr>
-          <p:cNvPr id="213" name=""/>
+          <p:cNvPr id="229" name=""/>
           <p:cNvSpPr/>
           <p:nvPr/>
         </p:nvSpPr>
@@ -9658,15 +9984,12 @@
         </p:spPr>
         <p:txBody>
           <a:bodyPr/>
-          <a:p>
-            <a:pPr/>
-            <a:endParaRPr/>
-          </a:p>
-        </p:txBody>
-      </p:sp>
-      <p:sp>
-        <p:nvSpPr>
-          <p:cNvPr id="214" name=""/>
+          <a:p/>
+        </p:txBody>
+      </p:sp>
+      <p:sp>
+        <p:nvSpPr>
+          <p:cNvPr id="230" name=""/>
           <p:cNvSpPr/>
           <p:nvPr/>
         </p:nvSpPr>
@@ -9689,15 +10012,12 @@
         </p:spPr>
         <p:txBody>
           <a:bodyPr/>
-          <a:p>
-            <a:pPr/>
-            <a:endParaRPr/>
-          </a:p>
-        </p:txBody>
-      </p:sp>
-      <p:sp>
-        <p:nvSpPr>
-          <p:cNvPr id="215" name="" descr="{&quot;isTemplate&quot;:true,&quot;type&quot;:&quot;text&quot;}"/>
+          <a:p/>
+        </p:txBody>
+      </p:sp>
+      <p:sp>
+        <p:nvSpPr>
+          <p:cNvPr id="231" name="" descr="{&quot;isTemplate&quot;:true,&quot;type&quot;:&quot;text&quot;}"/>
           <p:cNvSpPr txBox="1"/>
           <p:nvPr/>
         </p:nvSpPr>
@@ -9732,7 +10052,7 @@
       </p:sp>
       <p:sp>
         <p:nvSpPr>
-          <p:cNvPr id="216" name="" descr="{&quot;isTemplate&quot;:true,&quot;type&quot;:&quot;text&quot;}"/>
+          <p:cNvPr id="232" name="" descr="{&quot;isTemplate&quot;:true,&quot;type&quot;:&quot;text&quot;}"/>
           <p:cNvSpPr txBox="1"/>
           <p:nvPr/>
         </p:nvSpPr>
@@ -9785,7 +10105,7 @@
       </p:sp>
       <p:sp>
         <p:nvSpPr>
-          <p:cNvPr id="217" name="" descr="{&quot;isTemplate&quot;:true,&quot;type&quot;:&quot;text&quot;}"/>
+          <p:cNvPr id="233" name="" descr="{&quot;isTemplate&quot;:true,&quot;type&quot;:&quot;text&quot;}"/>
           <p:cNvSpPr txBox="1"/>
           <p:nvPr/>
         </p:nvSpPr>
@@ -9820,7 +10140,7 @@
       </p:sp>
       <p:sp>
         <p:nvSpPr>
-          <p:cNvPr id="218" name=""/>
+          <p:cNvPr id="234" name=""/>
           <p:cNvSpPr/>
           <p:nvPr/>
         </p:nvSpPr>
@@ -9841,22 +10161,19 @@
         </p:spPr>
         <p:txBody>
           <a:bodyPr/>
-          <a:p>
-            <a:pPr/>
-            <a:endParaRPr/>
-          </a:p>
+          <a:p/>
         </p:txBody>
       </p:sp>
       <p:pic>
         <p:nvPicPr>
-          <p:cNvPr id="219" name=""/>
+          <p:cNvPr id="235" name=""/>
           <p:cNvPicPr>
             <a:picLocks noChangeAspect="1"/>
           </p:cNvPicPr>
           <p:nvPr/>
         </p:nvPicPr>
         <p:blipFill>
-          <a:blip r:embed="rId1">
+          <a:blip>
             <a:extLst>
               <a:ext uri="{96DAC541-7B7A-43D3-8B79-37D633B846F1}">
                 <asvg:svgBlip r:embed="rId1"/>
@@ -9880,7 +10197,7 @@
       </p:pic>
       <p:sp>
         <p:nvSpPr>
-          <p:cNvPr id="220" name="" descr="{&quot;isTemplate&quot;:true,&quot;type&quot;:&quot;text&quot;}"/>
+          <p:cNvPr id="236" name="" descr="{&quot;isTemplate&quot;:true,&quot;type&quot;:&quot;text&quot;}"/>
           <p:cNvSpPr txBox="1"/>
           <p:nvPr/>
         </p:nvSpPr>
@@ -9915,7 +10232,7 @@
       </p:sp>
       <p:sp>
         <p:nvSpPr>
-          <p:cNvPr id="221" name=""/>
+          <p:cNvPr id="237" name=""/>
           <p:cNvSpPr/>
           <p:nvPr/>
         </p:nvSpPr>
@@ -9936,22 +10253,19 @@
         </p:spPr>
         <p:txBody>
           <a:bodyPr/>
-          <a:p>
-            <a:pPr/>
-            <a:endParaRPr/>
-          </a:p>
+          <a:p/>
         </p:txBody>
       </p:sp>
       <p:pic>
         <p:nvPicPr>
-          <p:cNvPr id="222" name=""/>
+          <p:cNvPr id="238" name=""/>
           <p:cNvPicPr>
             <a:picLocks noChangeAspect="1"/>
           </p:cNvPicPr>
           <p:nvPr/>
         </p:nvPicPr>
         <p:blipFill>
-          <a:blip r:embed="rId1">
+          <a:blip>
             <a:extLst>
               <a:ext uri="{96DAC541-7B7A-43D3-8B79-37D633B846F1}">
                 <asvg:svgBlip r:embed="rId1"/>
@@ -9975,7 +10289,7 @@
       </p:pic>
       <p:sp>
         <p:nvSpPr>
-          <p:cNvPr id="223" name="" descr="{&quot;isTemplate&quot;:true,&quot;type&quot;:&quot;text&quot;}"/>
+          <p:cNvPr id="239" name="" descr="{&quot;isTemplate&quot;:true,&quot;type&quot;:&quot;text&quot;}"/>
           <p:cNvSpPr txBox="1"/>
           <p:nvPr/>
         </p:nvSpPr>
@@ -10010,7 +10324,7 @@
       </p:sp>
       <p:sp>
         <p:nvSpPr>
-          <p:cNvPr id="224" name=""/>
+          <p:cNvPr id="240" name=""/>
           <p:cNvSpPr/>
           <p:nvPr/>
         </p:nvSpPr>
@@ -10031,22 +10345,19 @@
         </p:spPr>
         <p:txBody>
           <a:bodyPr/>
-          <a:p>
-            <a:pPr/>
-            <a:endParaRPr/>
-          </a:p>
+          <a:p/>
         </p:txBody>
       </p:sp>
       <p:pic>
         <p:nvPicPr>
-          <p:cNvPr id="225" name=""/>
+          <p:cNvPr id="241" name=""/>
           <p:cNvPicPr>
             <a:picLocks noChangeAspect="1"/>
           </p:cNvPicPr>
           <p:nvPr/>
         </p:nvPicPr>
         <p:blipFill>
-          <a:blip r:embed="rId1">
+          <a:blip>
             <a:extLst>
               <a:ext uri="{96DAC541-7B7A-43D3-8B79-37D633B846F1}">
                 <asvg:svgBlip r:embed="rId1"/>
@@ -10070,7 +10381,7 @@
       </p:pic>
       <p:sp>
         <p:nvSpPr>
-          <p:cNvPr id="226" name="" descr="{&quot;isTemplate&quot;:true,&quot;type&quot;:&quot;text&quot;}"/>
+          <p:cNvPr id="242" name="" descr="{&quot;isTemplate&quot;:true,&quot;type&quot;:&quot;text&quot;}"/>
           <p:cNvSpPr txBox="1"/>
           <p:nvPr/>
         </p:nvSpPr>
@@ -10105,7 +10416,7 @@
       </p:sp>
       <p:sp>
         <p:nvSpPr>
-          <p:cNvPr id="227" name=""/>
+          <p:cNvPr id="243" name=""/>
           <p:cNvSpPr/>
           <p:nvPr/>
         </p:nvSpPr>
@@ -10126,15 +10437,12 @@
         </p:spPr>
         <p:txBody>
           <a:bodyPr/>
-          <a:p>
-            <a:pPr/>
-            <a:endParaRPr/>
-          </a:p>
-        </p:txBody>
-      </p:sp>
-      <p:sp>
-        <p:nvSpPr>
-          <p:cNvPr id="228" name="" descr="{&quot;isTemplate&quot;:true,&quot;type&quot;:&quot;text&quot;}"/>
+          <a:p/>
+        </p:txBody>
+      </p:sp>
+      <p:sp>
+        <p:nvSpPr>
+          <p:cNvPr id="244" name="" descr="{&quot;isTemplate&quot;:true,&quot;type&quot;:&quot;text&quot;}"/>
           <p:cNvSpPr txBox="1"/>
           <p:nvPr/>
         </p:nvSpPr>
@@ -10169,7 +10477,7 @@
       </p:sp>
       <p:sp>
         <p:nvSpPr>
-          <p:cNvPr id="229" name="" descr="{&quot;isTemplate&quot;:true,&quot;type&quot;:&quot;text&quot;}"/>
+          <p:cNvPr id="245" name="" descr="{&quot;isTemplate&quot;:true,&quot;type&quot;:&quot;text&quot;}"/>
           <p:cNvSpPr txBox="1"/>
           <p:nvPr/>
         </p:nvSpPr>
@@ -10204,7 +10512,7 @@
       </p:sp>
       <p:sp>
         <p:nvSpPr>
-          <p:cNvPr id="230" name="" descr="{&quot;isTemplate&quot;:true,&quot;type&quot;:&quot;text&quot;}"/>
+          <p:cNvPr id="246" name="" descr="{&quot;isTemplate&quot;:true,&quot;type&quot;:&quot;text&quot;}"/>
           <p:cNvSpPr txBox="1"/>
           <p:nvPr/>
         </p:nvSpPr>
@@ -10231,15 +10539,15 @@
                 <a:latin typeface="Verdana"/>
                 <a:ea typeface="Verdana"/>
               </a:rPr>
-              <a:t>05 / 15</a:t>
-            </a:r>
-            <a:endParaRPr/>
-          </a:p>
-        </p:txBody>
-      </p:sp>
-      <p:sp>
-        <p:nvSpPr>
-          <p:cNvPr id="231" name=""/>
+              <a:t>05 / 16</a:t>
+            </a:r>
+            <a:endParaRPr/>
+          </a:p>
+        </p:txBody>
+      </p:sp>
+      <p:sp>
+        <p:nvSpPr>
+          <p:cNvPr id="247" name=""/>
           <p:cNvSpPr/>
           <p:nvPr/>
         </p:nvSpPr>
@@ -10268,15 +10576,12 @@
         </p:spPr>
         <p:txBody>
           <a:bodyPr/>
-          <a:p>
-            <a:pPr/>
-            <a:endParaRPr/>
-          </a:p>
-        </p:txBody>
-      </p:sp>
-      <p:sp>
-        <p:nvSpPr>
-          <p:cNvPr id="232" name=""/>
+          <a:p/>
+        </p:txBody>
+      </p:sp>
+      <p:sp>
+        <p:nvSpPr>
+          <p:cNvPr id="248" name=""/>
           <p:cNvSpPr/>
           <p:nvPr/>
         </p:nvSpPr>
@@ -10325,22 +10630,19 @@
         </p:spPr>
         <p:txBody>
           <a:bodyPr/>
-          <a:p>
-            <a:pPr/>
-            <a:endParaRPr/>
-          </a:p>
+          <a:p/>
         </p:txBody>
       </p:sp>
       <p:pic>
         <p:nvPicPr>
-          <p:cNvPr id="233" name=""/>
+          <p:cNvPr id="249" name=""/>
           <p:cNvPicPr>
             <a:picLocks noChangeAspect="1"/>
           </p:cNvPicPr>
           <p:nvPr/>
         </p:nvPicPr>
         <p:blipFill>
-          <a:blip r:embed="rId2">
+          <a:blip>
             <a:extLst>
               <a:ext uri="{96DAC541-7B7A-43D3-8B79-37D633B846F1}">
                 <asvg:svgBlip r:embed="rId2"/>
@@ -10372,7 +10674,7 @@
   <p:cSld>
     <p:spTree>
       <p:nvGrpSpPr>
-        <p:cNvPr id="234" name=""/>
+        <p:cNvPr id="250" name="" descr="&lt;Slide&#10;    style={{&#10;        width: '1280px',&#10;        height: '720px',&#10;        background: 'linear-gradient(135deg, #51277C 0%, #7A45A8 100%)',&#10;        paddingTop: 60,&#10;        paddingBottom: 60,&#10;        paddingLeft: 72,&#10;        paddingRight: 72,&#10;        justifyContent: 'center',&#10;        position: 'relative',&#10;        overflow: 'hidden',&#10;    }}&#10;&gt;&#10;    {/* dekorasi: ponsel + panah unduh */}&#10;    &lt;Box&#10;        style={{&#10;            position: 'absolute',&#10;            bottom: -120,&#10;            right: -70,&#10;            width: 440,&#10;            height: 440,&#10;            borderRadius: 220,&#10;            background: '#AFC440',&#10;            opacity: 0.14,&#10;        }}&#10;    /&gt;&#10;    &lt;Box style={{ position: 'absolute', top: 74, right: 92, opacity: 0.20 }}&gt;&#10;        &lt;svg width={230} height={250} viewBox='0 0 230 250'&gt;&#10;            &lt;rect x='52' y='10' width='126' height='210' rx='22' fill='none' stroke='#FFFFFF' strokeWidth='6' /&gt;&#10;            &lt;rect x='96' y='24' width='38' height='7' rx='4' fill='#FFFFFF' /&gt;&#10;            &lt;path d='M92 150 v46 M74 180 l18 18 l18 -18' fill='none' stroke='#FFFFFF' strokeWidth='8' strokeLinecap='round' strokeLinejoin='round' /&gt;&#10;            &lt;path d='M52 196 h126' stroke='#FFFFFF' strokeWidth='6' /&gt;&#10;        &lt;/svg&gt;&#10;    &lt;/Box&gt;&#10;&#10;    {/* isi */}&#10;    &lt;Box style={{ position: 'relative', zIndex: 1, width: '62%' }}&gt;&#10;        &lt;Box style={{ flexDirection: 'row', alignItems: 'center', gap: 14, alignSelf: 'flex-start' }}&gt;&#10;            &lt;Text&#10;                style={{&#10;                    fontSize: 76,&#10;                    fontWeight: 'bold',&#10;                    color: '#F3B26C',&#10;                    fontFamily: 'Trebuchet MS',&#10;                    lineHeight: 1,&#10;                }}&#10;            &gt;&#10;                02&#10;            &lt;/Text&gt;&#10;            &lt;Box style={{ width: 3, height: 52, background: 'rgba(255,255,255,0.45)' }} /&gt;&#10;            &lt;Text style={{ fontSize: 19, color: 'rgba(255,255,255,0.8)', fontFamily: 'Verdana' }}&gt;&#10;                Bagian kedua&#10;            &lt;/Text&gt;&#10;        &lt;/Box&gt;&#10;&#10;        &lt;Text&#10;            style={{&#10;                marginTop: 26,&#10;                fontSize: 60,&#10;                fontWeight: 'bold',&#10;                color: '#FFFFFF',&#10;                fontFamily: 'Trebuchet MS',&#10;                lineHeight: 1.15,&#10;            }}&#10;        &gt;&#10;            Cara mulai&#10;        &lt;/Text&gt;&#10;&#10;        &lt;Text&#10;            style={{&#10;                marginTop: 24,&#10;                fontSize: 22,&#10;                color: 'rgba(255,255,255,0.88)',&#10;                fontFamily: 'Verdana',&#10;                lineHeight: 1.5,&#10;            }}&#10;        &gt;&#10;            Dua langkah saja, lalu aplikasinya siap dipakai.&#10;        &lt;/Text&gt;&#10;    &lt;/Box&gt;&#10;&lt;/Slide&gt;&#10;"/>
         <p:cNvGrpSpPr/>
         <p:nvPr/>
       </p:nvGrpSpPr>
@@ -10386,7 +10688,7 @@
       </p:grpSpPr>
       <p:sp>
         <p:nvSpPr>
-          <p:cNvPr id="235" name=""/>
+          <p:cNvPr id="251" name=""/>
           <p:cNvSpPr/>
           <p:nvPr/>
         </p:nvSpPr>
@@ -10413,15 +10715,12 @@
         </p:spPr>
         <p:txBody>
           <a:bodyPr/>
-          <a:p>
-            <a:pPr/>
-            <a:endParaRPr/>
-          </a:p>
-        </p:txBody>
-      </p:sp>
-      <p:sp>
-        <p:nvSpPr>
-          <p:cNvPr id="236" name=""/>
+          <a:p/>
+        </p:txBody>
+      </p:sp>
+      <p:sp>
+        <p:nvSpPr>
+          <p:cNvPr id="252" name=""/>
           <p:cNvSpPr/>
           <p:nvPr/>
         </p:nvSpPr>
@@ -10794,22 +11093,19 @@
         </p:spPr>
         <p:txBody>
           <a:bodyPr/>
-          <a:p>
-            <a:pPr/>
-            <a:endParaRPr/>
-          </a:p>
+          <a:p/>
         </p:txBody>
       </p:sp>
       <p:pic>
         <p:nvPicPr>
-          <p:cNvPr id="237" name=""/>
+          <p:cNvPr id="253" name=""/>
           <p:cNvPicPr>
             <a:picLocks noChangeAspect="1"/>
           </p:cNvPicPr>
           <p:nvPr/>
         </p:nvPicPr>
         <p:blipFill>
-          <a:blip r:embed="rId1">
+          <a:blip>
             <a:alphaModFix amt="20000"/>
             <a:extLst>
               <a:ext uri="{96DAC541-7B7A-43D3-8B79-37D633B846F1}">
@@ -10834,7 +11130,7 @@
       </p:pic>
       <p:sp>
         <p:nvSpPr>
-          <p:cNvPr id="238" name="" descr="{&quot;isTemplate&quot;:true,&quot;type&quot;:&quot;text&quot;}"/>
+          <p:cNvPr id="254" name="" descr="{&quot;isTemplate&quot;:true,&quot;type&quot;:&quot;text&quot;}"/>
           <p:cNvSpPr txBox="1"/>
           <p:nvPr/>
         </p:nvSpPr>
@@ -10869,7 +11165,7 @@
       </p:sp>
       <p:sp>
         <p:nvSpPr>
-          <p:cNvPr id="239" name=""/>
+          <p:cNvPr id="255" name=""/>
           <p:cNvSpPr/>
           <p:nvPr/>
         </p:nvSpPr>
@@ -10890,15 +11186,12 @@
         </p:spPr>
         <p:txBody>
           <a:bodyPr/>
-          <a:p>
-            <a:pPr/>
-            <a:endParaRPr/>
-          </a:p>
-        </p:txBody>
-      </p:sp>
-      <p:sp>
-        <p:nvSpPr>
-          <p:cNvPr id="240" name="" descr="{&quot;isTemplate&quot;:true,&quot;type&quot;:&quot;text&quot;}"/>
+          <a:p/>
+        </p:txBody>
+      </p:sp>
+      <p:sp>
+        <p:nvSpPr>
+          <p:cNvPr id="256" name="" descr="{&quot;isTemplate&quot;:true,&quot;type&quot;:&quot;text&quot;}"/>
           <p:cNvSpPr txBox="1"/>
           <p:nvPr/>
         </p:nvSpPr>
@@ -10935,7 +11228,7 @@
       </p:sp>
       <p:sp>
         <p:nvSpPr>
-          <p:cNvPr id="241" name="" descr="{&quot;isTemplate&quot;:true,&quot;type&quot;:&quot;text&quot;}"/>
+          <p:cNvPr id="257" name="" descr="{&quot;isTemplate&quot;:true,&quot;type&quot;:&quot;text&quot;}"/>
           <p:cNvSpPr txBox="1"/>
           <p:nvPr/>
         </p:nvSpPr>
@@ -10970,7 +11263,7 @@
       </p:sp>
       <p:sp>
         <p:nvSpPr>
-          <p:cNvPr id="242" name="" descr="{&quot;isTemplate&quot;:true,&quot;type&quot;:&quot;text&quot;}"/>
+          <p:cNvPr id="258" name="" descr="{&quot;isTemplate&quot;:true,&quot;type&quot;:&quot;text&quot;}"/>
           <p:cNvSpPr txBox="1"/>
           <p:nvPr/>
         </p:nvSpPr>
@@ -11015,7 +11308,7 @@
   <p:cSld>
     <p:spTree>
       <p:nvGrpSpPr>
-        <p:cNvPr id="243" name=""/>
+        <p:cNvPr id="259" name="" descr="&lt;Slide&#10;    style={{&#10;        width: '1280px',&#10;        height: '720px',&#10;        background: '#FAF7F2',&#10;        paddingTop: 20,&#10;        paddingBottom: 20,&#10;        paddingLeft: 64,&#10;        paddingRight: 64,&#10;    }}&#10;&gt;&#10;    {/* ── A · blok judul ── */}&#10;    &lt;Box style={{ height: 110, justifyContent: 'center' }}&gt;&#10;        &lt;Text&#10;            style={{&#10;                fontSize: 34,&#10;                fontWeight: 'bold',&#10;                color: '#51277C',&#10;                fontFamily: 'Trebuchet MS',&#10;                lineHeight: 1.3,&#10;            }}&#10;        &gt;&#10;            Pasang ke layar utama HP&#10;        &lt;/Text&gt;&#10;        &lt;Box style={{ marginTop: 10, width: 72, height: 6, borderRadius: 3, background: '#51277C' }} /&gt;&#10;    &lt;/Box&gt;&#10;&#10;    {/* ── B · area konten ── */}&#10;    &lt;Box style={{ height: 530, flexDirection: 'row', gap: 30 }}&gt;&#10;        {/* kiri 55% · ilustrasi */}&#10;        &lt;Box&#10;            style={{&#10;                width: '55%',&#10;                height: '100%',&#10;                background: 'rgba(81,39,124,0.06)',&#10;                borderRadius: 20,&#10;                justifyContent: 'center',&#10;                alignItems: 'center',&#10;            }}&#10;        &gt;&#10;            &lt;svg width={600} height={430} viewBox='0 0 600 430'&gt;&#10;                {/* ponsel kiri — browser */}&#10;                &lt;rect x='24' y='34' width='204' height='362' rx='30' fill='#FFFFFF' stroke='#E3DCCF' strokeWidth='4' /&gt;&#10;                &lt;rect x='104' y='50' width='44' height='9' rx='5' fill='#DCD5C9' /&gt;&#10;                &lt;rect x='48' y='76' width='156' height='34' rx='10' fill='#EFEAE1' /&gt;&#10;                &lt;rect x='48' y='126' width='156' height='10' rx='5' fill='#DED7CB' /&gt;&#10;                &lt;rect x='48' y='148' width='118' height='10' rx='5' fill='#EDE8DF' /&gt;&#10;                &lt;rect x='48' y='186' width='156' height='10' rx='5' fill='#EDE8DF' /&gt;&#10;                &lt;rect x='48' y='208' width='132' height='10' rx='5' fill='#EDE8DF' /&gt;&#10;                &lt;rect x='48' y='246' width='156' height='10' rx='5' fill='#EDE8DF' /&gt;&#10;                {/* tombol Pasang */}&#10;                &lt;rect x='48' y='292' width='156' height='54' rx='14' fill='#F3B26C' /&gt;&#10;                &lt;text x='126' y='326' fontFamily='Trebuchet MS' fontSize='24' fontWeight='bold' fill='#51277C' textAnchor='middle'&gt;&#10;                    Pasang&#10;                &lt;/text&gt;&#10;&#10;                {/* panah */}&#10;                &lt;path&#10;                    d='M248 215 h60 M292 195 l20 20 l-20 20'&#10;                    fill='none'&#10;                    stroke='#51277C'&#10;                    strokeWidth='7'&#10;                    strokeLinecap='round'&#10;                    strokeLinejoin='round'&#10;                /&gt;&#10;&#10;                {/* ponsel kanan — layar utama */}&#10;                &lt;rect x='330' y='54' width='244' height='322' rx='30' fill='#FFFFFF' stroke='#E3DCCF' strokeWidth='4' /&gt;&#10;                &lt;rect x='430' y='70' width='44' height='9' rx='5' fill='#DCD5C9' /&gt;&#10;                {/* ikon-ikon lain */}&#10;                &lt;rect x='358' y='100' width='48' height='48' rx='13' fill='#EFEAE1' /&gt;&#10;                &lt;rect x='424' y='100' width='48' height='48' rx='13' fill='#EFEAE1' /&gt;&#10;                &lt;rect x='490' y='100' width='48' height='48' rx='13' fill='#EFEAE1' /&gt;&#10;                &lt;rect x='358' y='170' width='48' height='48' rx='13' fill='#EFEAE1' /&gt;&#10;                &lt;rect x='424' y='170' width='48' height='48' rx='13' fill='#EFEAE1' /&gt;&#10;                &lt;rect x='490' y='170' width='48' height='48' rx='13' fill='#EFEAE1' /&gt;&#10;                &lt;rect x='358' y='240' width='48' height='48' rx='13' fill='#EFEAE1' /&gt;&#10;                &lt;rect x='490' y='240' width='48' height='48' rx='13' fill='#EFEAE1' /&gt;&#10;                {/* ikon aplikasi — baru muncul */}&#10;                &lt;rect x='418' y='234' width='64' height='64' rx='16' fill='#B6E9EC' /&gt;&#10;                &lt;rect x='430' y='246' width='30' height='26' rx='5' fill='#FFFFFF' /&gt;&#10;                &lt;path d='M430 246 h30' stroke='#51277C' strokeWidth='4' /&gt;&#10;                &lt;path d='M472 288 l-14 -14 a20 20 0 0 1 14 -6 z' fill='#F3B26C' /&gt;&#10;                &lt;circle cx='404' cy='228' r='13' fill='#AFC440' /&gt;&#10;                &lt;text x='404' y='235' fontFamily='Verdana' fontSize='14' fontWeight='bold' fill='#FFFFFF' textAnchor='middle'&gt;&#10;                    1&#10;                &lt;/text&gt;&#10;            &lt;/svg&gt;&#10;        &lt;/Box&gt;&#10;&#10;        {/* kanan 45% · langkah */}&#10;        &lt;Box style={{ width: '45%', height: '100%' }}&gt;&#10;            &lt;Box style={{ gap: 10 }}&gt;&#10;                {[&#10;                    { a: 'Buka alamat aplikasi', d: 'Lewat browser HP — Chrome atau Edge.' },&#10;                    { a: 'Ketuk tombol &quot;Pasang&quot;', d: 'Muncul sendiri di bagian bawah layar.' },&#10;                    { a: 'Ikon muncul di layar utama', d: 'Berciri pizza dan kalender, warna hijau muda.' },&#10;                    { a: 'Ketuk ikonnya', d: 'Terbuka seperti aplikasi biasa. Tidak perlu mengetik alamat lagi.' },&#10;                ].map((s, i) =&gt; (&#10;                    &lt;Box&#10;                        key={i}&#10;                        style={{&#10;                            height: 96,&#10;                            flexDirection: 'row',&#10;                            alignItems: 'center',&#10;                            gap: 16,&#10;                            background: '#FFFFFF',&#10;                            borderRadius: 14,&#10;                            boxShadow: '0 4px 20px rgba(0,0,0,0.08)',&#10;                            paddingLeft: 18,&#10;                            paddingRight: 20,&#10;                        }}&#10;                    &gt;&#10;                        &lt;Box&#10;                            style={{&#10;                                width: 44,&#10;                                height: 44,&#10;                                borderRadius: 22,&#10;                                background: '#51277C',&#10;                                justifyContent: 'center',&#10;                                alignItems: 'center',&#10;                            }}&#10;                        &gt;&#10;                            &lt;Text&#10;                                style={{&#10;                                    fontSize: 22,&#10;                                    fontWeight: 'bold',&#10;                                    color: '#FFFFFF',&#10;                                    fontFamily: 'Trebuchet MS',&#10;                                }}&#10;                            &gt;&#10;                                {i + 1}&#10;                            &lt;/Text&gt;&#10;                        &lt;/Box&gt;&#10;                        &lt;Box style={{ flex: 1 }}&gt;&#10;                            &lt;Text&#10;                                style={{&#10;                                    fontSize: 20,&#10;                                    fontWeight: 'bold',&#10;                                    color: '#2A2333',&#10;                                    fontFamily: 'Trebuchet MS',&#10;                                    lineHeight: 1.3,&#10;                                }}&#10;                            &gt;&#10;                                {s.a}&#10;                            &lt;/Text&gt;&#10;                            &lt;Text&#10;                                style={{&#10;                                    marginTop: 3,&#10;                                    fontSize: 17,&#10;                                    color: '#6B6478',&#10;                                    fontFamily: 'Verdana',&#10;                                    lineHeight: 1.4,&#10;                                }}&#10;                            &gt;&#10;                                {s.d}&#10;                            &lt;/Text&gt;&#10;                        &lt;/Box&gt;&#10;                    &lt;/Box&gt;&#10;                ))}&#10;            &lt;/Box&gt;&#10;&#10;            {/* catatan iOS */}&#10;            &lt;Box&#10;                style={{&#10;                    marginTop: 20,&#10;                    height: 96,&#10;                    background: '#FFFFFF',&#10;                    borderLeft: '8px solid #F3B26C',&#10;                    borderRadius: 14,&#10;                    boxShadow: '0 4px 20px rgba(0,0,0,0.08)',&#10;                    paddingTop: 16,&#10;                    paddingBottom: 16,&#10;                    paddingLeft: 20,&#10;                    paddingRight: 20,&#10;                    justifyContent: 'center',&#10;                }}&#10;            &gt;&#10;                &lt;Text&#10;                    style={{&#10;                        fontSize: 18,&#10;                        fontWeight: 'bold',&#10;                        color: '#51277C',&#10;                        fontFamily: 'Trebuchet MS',&#10;                    }}&#10;                &gt;&#10;                    Kalau memakai iPhone&#10;                &lt;/Text&gt;&#10;                &lt;Text&#10;                    style={{&#10;                        marginTop: 5,&#10;                        fontSize: 17,&#10;                        color: '#6B6478',&#10;                        fontFamily: 'Verdana',&#10;                        lineHeight: 1.4,&#10;                    }}&#10;                &gt;&#10;                    Tombol Bagikan, lalu pilih &quot;Add to Home Screen&quot;.&#10;                &lt;/Text&gt;&#10;            &lt;/Box&gt;&#10;        &lt;/Box&gt;&#10;    &lt;/Box&gt;&#10;&#10;    {/* ── C · bilah kaki ── */}&#10;    &lt;Box&#10;        style={{&#10;            height: 40,&#10;            flexDirection: 'row',&#10;            alignItems: 'center',&#10;            justifyContent: 'space-between',&#10;        }}&#10;    &gt;&#10;        &lt;Text style={{ fontSize: 14, color: '#6B6478', fontFamily: 'Verdana' }}&gt;&#10;            Pizza Snack Play · Panduan Orang Tua&#10;        &lt;/Text&gt;&#10;        &lt;Text style={{ fontSize: 14, color: '#6B6478', fontFamily: 'Verdana' }}&gt;07 / 16&lt;/Text&gt;&#10;    &lt;/Box&gt;&#10;&lt;/Slide&gt;&#10;"/>
         <p:cNvGrpSpPr/>
         <p:nvPr/>
       </p:nvGrpSpPr>
@@ -11029,7 +11322,7 @@
       </p:grpSpPr>
       <p:sp>
         <p:nvSpPr>
-          <p:cNvPr id="244" name=""/>
+          <p:cNvPr id="260" name=""/>
           <p:cNvSpPr/>
           <p:nvPr/>
         </p:nvSpPr>
@@ -11048,15 +11341,12 @@
         </p:spPr>
         <p:txBody>
           <a:bodyPr/>
-          <a:p>
-            <a:pPr/>
-            <a:endParaRPr/>
-          </a:p>
-        </p:txBody>
-      </p:sp>
-      <p:sp>
-        <p:nvSpPr>
-          <p:cNvPr id="245" name="" descr="{&quot;isTemplate&quot;:true,&quot;type&quot;:&quot;text&quot;}"/>
+          <a:p/>
+        </p:txBody>
+      </p:sp>
+      <p:sp>
+        <p:nvSpPr>
+          <p:cNvPr id="261" name="" descr="{&quot;isTemplate&quot;:true,&quot;type&quot;:&quot;text&quot;}"/>
           <p:cNvSpPr txBox="1"/>
           <p:nvPr/>
         </p:nvSpPr>
@@ -11091,7 +11381,7 @@
       </p:sp>
       <p:sp>
         <p:nvSpPr>
-          <p:cNvPr id="246" name=""/>
+          <p:cNvPr id="262" name=""/>
           <p:cNvSpPr/>
           <p:nvPr/>
         </p:nvSpPr>
@@ -11112,15 +11402,12 @@
         </p:spPr>
         <p:txBody>
           <a:bodyPr/>
-          <a:p>
-            <a:pPr/>
-            <a:endParaRPr/>
-          </a:p>
-        </p:txBody>
-      </p:sp>
-      <p:sp>
-        <p:nvSpPr>
-          <p:cNvPr id="247" name=""/>
+          <a:p/>
+        </p:txBody>
+      </p:sp>
+      <p:sp>
+        <p:nvSpPr>
+          <p:cNvPr id="263" name=""/>
           <p:cNvSpPr/>
           <p:nvPr/>
         </p:nvSpPr>
@@ -11143,22 +11430,19 @@
         </p:spPr>
         <p:txBody>
           <a:bodyPr/>
-          <a:p>
-            <a:pPr/>
-            <a:endParaRPr/>
-          </a:p>
+          <a:p/>
         </p:txBody>
       </p:sp>
       <p:pic>
         <p:nvPicPr>
-          <p:cNvPr id="248" name=""/>
+          <p:cNvPr id="264" name=""/>
           <p:cNvPicPr>
             <a:picLocks noChangeAspect="1"/>
           </p:cNvPicPr>
           <p:nvPr/>
         </p:nvPicPr>
         <p:blipFill>
-          <a:blip r:embed="rId1">
+          <a:blip>
             <a:extLst>
               <a:ext uri="{96DAC541-7B7A-43D3-8B79-37D633B846F1}">
                 <asvg:svgBlip r:embed="rId1"/>
@@ -11182,7 +11466,7 @@
       </p:pic>
       <p:sp>
         <p:nvSpPr>
-          <p:cNvPr id="249" name=""/>
+          <p:cNvPr id="265" name=""/>
           <p:cNvSpPr/>
           <p:nvPr/>
         </p:nvSpPr>
@@ -11210,15 +11494,12 @@
         </p:spPr>
         <p:txBody>
           <a:bodyPr/>
-          <a:p>
-            <a:pPr/>
-            <a:endParaRPr/>
-          </a:p>
-        </p:txBody>
-      </p:sp>
-      <p:sp>
-        <p:nvSpPr>
-          <p:cNvPr id="250" name=""/>
+          <a:p/>
+        </p:txBody>
+      </p:sp>
+      <p:sp>
+        <p:nvSpPr>
+          <p:cNvPr id="266" name=""/>
           <p:cNvSpPr/>
           <p:nvPr/>
         </p:nvSpPr>
@@ -11239,15 +11520,12 @@
         </p:spPr>
         <p:txBody>
           <a:bodyPr/>
-          <a:p>
-            <a:pPr/>
-            <a:endParaRPr/>
-          </a:p>
-        </p:txBody>
-      </p:sp>
-      <p:sp>
-        <p:nvSpPr>
-          <p:cNvPr id="251" name="" descr="{&quot;isTemplate&quot;:true,&quot;type&quot;:&quot;text&quot;}"/>
+          <a:p/>
+        </p:txBody>
+      </p:sp>
+      <p:sp>
+        <p:nvSpPr>
+          <p:cNvPr id="267" name="" descr="{&quot;isTemplate&quot;:true,&quot;type&quot;:&quot;text&quot;}"/>
           <p:cNvSpPr txBox="1"/>
           <p:nvPr/>
         </p:nvSpPr>
@@ -11282,7 +11560,7 @@
       </p:sp>
       <p:sp>
         <p:nvSpPr>
-          <p:cNvPr id="252" name="" descr="{&quot;isTemplate&quot;:true,&quot;type&quot;:&quot;text&quot;}"/>
+          <p:cNvPr id="268" name="" descr="{&quot;isTemplate&quot;:true,&quot;type&quot;:&quot;text&quot;}"/>
           <p:cNvSpPr txBox="1"/>
           <p:nvPr/>
         </p:nvSpPr>
@@ -11317,7 +11595,7 @@
       </p:sp>
       <p:sp>
         <p:nvSpPr>
-          <p:cNvPr id="253" name="" descr="{&quot;isTemplate&quot;:true,&quot;type&quot;:&quot;text&quot;}"/>
+          <p:cNvPr id="269" name="" descr="{&quot;isTemplate&quot;:true,&quot;type&quot;:&quot;text&quot;}"/>
           <p:cNvSpPr txBox="1"/>
           <p:nvPr/>
         </p:nvSpPr>
@@ -11352,7 +11630,7 @@
       </p:sp>
       <p:sp>
         <p:nvSpPr>
-          <p:cNvPr id="254" name=""/>
+          <p:cNvPr id="270" name=""/>
           <p:cNvSpPr/>
           <p:nvPr/>
         </p:nvSpPr>
@@ -11380,15 +11658,12 @@
         </p:spPr>
         <p:txBody>
           <a:bodyPr/>
-          <a:p>
-            <a:pPr/>
-            <a:endParaRPr/>
-          </a:p>
-        </p:txBody>
-      </p:sp>
-      <p:sp>
-        <p:nvSpPr>
-          <p:cNvPr id="255" name=""/>
+          <a:p/>
+        </p:txBody>
+      </p:sp>
+      <p:sp>
+        <p:nvSpPr>
+          <p:cNvPr id="271" name=""/>
           <p:cNvSpPr/>
           <p:nvPr/>
         </p:nvSpPr>
@@ -11409,15 +11684,12 @@
         </p:spPr>
         <p:txBody>
           <a:bodyPr/>
-          <a:p>
-            <a:pPr/>
-            <a:endParaRPr/>
-          </a:p>
-        </p:txBody>
-      </p:sp>
-      <p:sp>
-        <p:nvSpPr>
-          <p:cNvPr id="256" name="" descr="{&quot;isTemplate&quot;:true,&quot;type&quot;:&quot;text&quot;}"/>
+          <a:p/>
+        </p:txBody>
+      </p:sp>
+      <p:sp>
+        <p:nvSpPr>
+          <p:cNvPr id="272" name="" descr="{&quot;isTemplate&quot;:true,&quot;type&quot;:&quot;text&quot;}"/>
           <p:cNvSpPr txBox="1"/>
           <p:nvPr/>
         </p:nvSpPr>
@@ -11452,7 +11724,7 @@
       </p:sp>
       <p:sp>
         <p:nvSpPr>
-          <p:cNvPr id="257" name="" descr="{&quot;isTemplate&quot;:true,&quot;type&quot;:&quot;text&quot;}"/>
+          <p:cNvPr id="273" name="" descr="{&quot;isTemplate&quot;:true,&quot;type&quot;:&quot;text&quot;}"/>
           <p:cNvSpPr txBox="1"/>
           <p:nvPr/>
         </p:nvSpPr>
@@ -11487,7 +11759,7 @@
       </p:sp>
       <p:sp>
         <p:nvSpPr>
-          <p:cNvPr id="258" name="" descr="{&quot;isTemplate&quot;:true,&quot;type&quot;:&quot;text&quot;}"/>
+          <p:cNvPr id="274" name="" descr="{&quot;isTemplate&quot;:true,&quot;type&quot;:&quot;text&quot;}"/>
           <p:cNvSpPr txBox="1"/>
           <p:nvPr/>
         </p:nvSpPr>
@@ -11522,7 +11794,7 @@
       </p:sp>
       <p:sp>
         <p:nvSpPr>
-          <p:cNvPr id="259" name=""/>
+          <p:cNvPr id="275" name=""/>
           <p:cNvSpPr/>
           <p:nvPr/>
         </p:nvSpPr>
@@ -11550,15 +11822,12 @@
         </p:spPr>
         <p:txBody>
           <a:bodyPr/>
-          <a:p>
-            <a:pPr/>
-            <a:endParaRPr/>
-          </a:p>
-        </p:txBody>
-      </p:sp>
-      <p:sp>
-        <p:nvSpPr>
-          <p:cNvPr id="260" name=""/>
+          <a:p/>
+        </p:txBody>
+      </p:sp>
+      <p:sp>
+        <p:nvSpPr>
+          <p:cNvPr id="276" name=""/>
           <p:cNvSpPr/>
           <p:nvPr/>
         </p:nvSpPr>
@@ -11579,15 +11848,12 @@
         </p:spPr>
         <p:txBody>
           <a:bodyPr/>
-          <a:p>
-            <a:pPr/>
-            <a:endParaRPr/>
-          </a:p>
-        </p:txBody>
-      </p:sp>
-      <p:sp>
-        <p:nvSpPr>
-          <p:cNvPr id="261" name="" descr="{&quot;isTemplate&quot;:true,&quot;type&quot;:&quot;text&quot;}"/>
+          <a:p/>
+        </p:txBody>
+      </p:sp>
+      <p:sp>
+        <p:nvSpPr>
+          <p:cNvPr id="277" name="" descr="{&quot;isTemplate&quot;:true,&quot;type&quot;:&quot;text&quot;}"/>
           <p:cNvSpPr txBox="1"/>
           <p:nvPr/>
         </p:nvSpPr>
@@ -11622,7 +11888,7 @@
       </p:sp>
       <p:sp>
         <p:nvSpPr>
-          <p:cNvPr id="262" name="" descr="{&quot;isTemplate&quot;:true,&quot;type&quot;:&quot;text&quot;}"/>
+          <p:cNvPr id="278" name="" descr="{&quot;isTemplate&quot;:true,&quot;type&quot;:&quot;text&quot;}"/>
           <p:cNvSpPr txBox="1"/>
           <p:nvPr/>
         </p:nvSpPr>
@@ -11657,7 +11923,7 @@
       </p:sp>
       <p:sp>
         <p:nvSpPr>
-          <p:cNvPr id="263" name="" descr="{&quot;isTemplate&quot;:true,&quot;type&quot;:&quot;text&quot;}"/>
+          <p:cNvPr id="279" name="" descr="{&quot;isTemplate&quot;:true,&quot;type&quot;:&quot;text&quot;}"/>
           <p:cNvSpPr txBox="1"/>
           <p:nvPr/>
         </p:nvSpPr>
@@ -11692,7 +11958,7 @@
       </p:sp>
       <p:sp>
         <p:nvSpPr>
-          <p:cNvPr id="264" name=""/>
+          <p:cNvPr id="280" name=""/>
           <p:cNvSpPr/>
           <p:nvPr/>
         </p:nvSpPr>
@@ -11720,15 +11986,12 @@
         </p:spPr>
         <p:txBody>
           <a:bodyPr/>
-          <a:p>
-            <a:pPr/>
-            <a:endParaRPr/>
-          </a:p>
-        </p:txBody>
-      </p:sp>
-      <p:sp>
-        <p:nvSpPr>
-          <p:cNvPr id="265" name=""/>
+          <a:p/>
+        </p:txBody>
+      </p:sp>
+      <p:sp>
+        <p:nvSpPr>
+          <p:cNvPr id="281" name=""/>
           <p:cNvSpPr/>
           <p:nvPr/>
         </p:nvSpPr>
@@ -11749,15 +12012,12 @@
         </p:spPr>
         <p:txBody>
           <a:bodyPr/>
-          <a:p>
-            <a:pPr/>
-            <a:endParaRPr/>
-          </a:p>
-        </p:txBody>
-      </p:sp>
-      <p:sp>
-        <p:nvSpPr>
-          <p:cNvPr id="266" name="" descr="{&quot;isTemplate&quot;:true,&quot;type&quot;:&quot;text&quot;}"/>
+          <a:p/>
+        </p:txBody>
+      </p:sp>
+      <p:sp>
+        <p:nvSpPr>
+          <p:cNvPr id="282" name="" descr="{&quot;isTemplate&quot;:true,&quot;type&quot;:&quot;text&quot;}"/>
           <p:cNvSpPr txBox="1"/>
           <p:nvPr/>
         </p:nvSpPr>
@@ -11792,7 +12052,7 @@
       </p:sp>
       <p:sp>
         <p:nvSpPr>
-          <p:cNvPr id="267" name="" descr="{&quot;isTemplate&quot;:true,&quot;type&quot;:&quot;text&quot;}"/>
+          <p:cNvPr id="283" name="" descr="{&quot;isTemplate&quot;:true,&quot;type&quot;:&quot;text&quot;}"/>
           <p:cNvSpPr txBox="1"/>
           <p:nvPr/>
         </p:nvSpPr>
@@ -11827,7 +12087,7 @@
       </p:sp>
       <p:sp>
         <p:nvSpPr>
-          <p:cNvPr id="268" name="" descr="{&quot;isTemplate&quot;:true,&quot;type&quot;:&quot;text&quot;}"/>
+          <p:cNvPr id="284" name="" descr="{&quot;isTemplate&quot;:true,&quot;type&quot;:&quot;text&quot;}"/>
           <p:cNvSpPr txBox="1"/>
           <p:nvPr/>
         </p:nvSpPr>
@@ -11864,7 +12124,7 @@
       </p:sp>
       <p:sp>
         <p:nvSpPr>
-          <p:cNvPr id="269" name=""/>
+          <p:cNvPr id="285" name=""/>
           <p:cNvSpPr/>
           <p:nvPr/>
         </p:nvSpPr>
@@ -11892,15 +12152,12 @@
         </p:spPr>
         <p:txBody>
           <a:bodyPr/>
-          <a:p>
-            <a:pPr/>
-            <a:endParaRPr/>
-          </a:p>
-        </p:txBody>
-      </p:sp>
-      <p:sp>
-        <p:nvSpPr>
-          <p:cNvPr id="270" name=""/>
+          <a:p/>
+        </p:txBody>
+      </p:sp>
+      <p:sp>
+        <p:nvSpPr>
+          <p:cNvPr id="286" name=""/>
           <p:cNvSpPr/>
           <p:nvPr/>
         </p:nvSpPr>
@@ -11952,15 +12209,12 @@
         </p:spPr>
         <p:txBody>
           <a:bodyPr/>
-          <a:p>
-            <a:pPr/>
-            <a:endParaRPr/>
-          </a:p>
-        </p:txBody>
-      </p:sp>
-      <p:sp>
-        <p:nvSpPr>
-          <p:cNvPr id="271" name="" descr="{&quot;isTemplate&quot;:true,&quot;type&quot;:&quot;text&quot;}"/>
+          <a:p/>
+        </p:txBody>
+      </p:sp>
+      <p:sp>
+        <p:nvSpPr>
+          <p:cNvPr id="287" name="" descr="{&quot;isTemplate&quot;:true,&quot;type&quot;:&quot;text&quot;}"/>
           <p:cNvSpPr txBox="1"/>
           <p:nvPr/>
         </p:nvSpPr>
@@ -11995,7 +12249,7 @@
       </p:sp>
       <p:sp>
         <p:nvSpPr>
-          <p:cNvPr id="272" name="" descr="{&quot;isTemplate&quot;:true,&quot;type&quot;:&quot;text&quot;}"/>
+          <p:cNvPr id="288" name="" descr="{&quot;isTemplate&quot;:true,&quot;type&quot;:&quot;text&quot;}"/>
           <p:cNvSpPr txBox="1"/>
           <p:nvPr/>
         </p:nvSpPr>
@@ -12030,7 +12284,7 @@
       </p:sp>
       <p:sp>
         <p:nvSpPr>
-          <p:cNvPr id="273" name="" descr="{&quot;isTemplate&quot;:true,&quot;type&quot;:&quot;text&quot;}"/>
+          <p:cNvPr id="289" name="" descr="{&quot;isTemplate&quot;:true,&quot;type&quot;:&quot;text&quot;}"/>
           <p:cNvSpPr txBox="1"/>
           <p:nvPr/>
         </p:nvSpPr>
@@ -12065,7 +12319,7 @@
       </p:sp>
       <p:sp>
         <p:nvSpPr>
-          <p:cNvPr id="274" name="" descr="{&quot;isTemplate&quot;:true,&quot;type&quot;:&quot;text&quot;}"/>
+          <p:cNvPr id="290" name="" descr="{&quot;isTemplate&quot;:true,&quot;type&quot;:&quot;text&quot;}"/>
           <p:cNvSpPr txBox="1"/>
           <p:nvPr/>
         </p:nvSpPr>
@@ -12092,7 +12346,7 @@
                 <a:latin typeface="Verdana"/>
                 <a:ea typeface="Verdana"/>
               </a:rPr>
-              <a:t>07 / 15</a:t>
+              <a:t>07 / 16</a:t>
             </a:r>
             <a:endParaRPr/>
           </a:p>
@@ -12108,7 +12362,7 @@
   <p:cSld>
     <p:spTree>
       <p:nvGrpSpPr>
-        <p:cNvPr id="275" name=""/>
+        <p:cNvPr id="291" name="" descr="&lt;Slide&#10;    style={{&#10;        width: '1280px',&#10;        height: '720px',&#10;        background: '#FAF7F2',&#10;        paddingTop: 20,&#10;        paddingBottom: 20,&#10;        paddingLeft: 64,&#10;        paddingRight: 64,&#10;    }}&#10;&gt;&#10;    {/* ── A · blok judul ── */}&#10;    &lt;Box style={{ height: 110, justifyContent: 'center' }}&gt;&#10;        &lt;Text&#10;            style={{&#10;                fontSize: 34,&#10;                fontWeight: 'bold',&#10;                color: '#51277C',&#10;                fontFamily: 'Trebuchet MS',&#10;                lineHeight: 1.3,&#10;            }}&#10;        &gt;&#10;            Masuk memakai akun dari sekolah&#10;        &lt;/Text&gt;&#10;        &lt;Box style={{ marginTop: 10, width: 72, height: 6, borderRadius: 3, background: '#51277C' }} /&gt;&#10;    &lt;/Box&gt;&#10;&#10;    {/* ── B · area konten ── */}&#10;    &lt;Box style={{ height: 530, flexDirection: 'row', gap: 28 }}&gt;&#10;        {/* kiri 30% · panel ungu */}&#10;        &lt;Box&#10;            style={{&#10;                width: '30%',&#10;                height: '100%',&#10;                background: 'linear-gradient(135deg, #51277C 0%, #7A45A8 100%)',&#10;                borderRadius: 20,&#10;                padding: 26,&#10;                justifyContent: 'space-between',&#10;                alignItems: 'center',&#10;            }}&#10;        &gt;&#10;            &lt;Box style={{ alignItems: 'center' }}&gt;&#10;                &lt;Text&#10;                    style={{&#10;                        fontSize: 16,&#10;                        color: 'rgba(255,255,255,0.75)',&#10;                        fontFamily: 'Verdana',&#10;                    }}&#10;                &gt;&#10;                    Langkah 2&#10;                &lt;/Text&gt;&#10;                &lt;Text&#10;                    style={{&#10;                        marginTop: 8,&#10;                        fontSize: 40,&#10;                        fontWeight: 'bold',&#10;                        color: '#FFFFFF',&#10;                        fontFamily: 'Trebuchet MS',&#10;                    }}&#10;                &gt;&#10;                    Masuk&#10;                &lt;/Text&gt;&#10;            &lt;/Box&gt;&#10;&#10;            &lt;svg width={170} height={170} viewBox='0 0 170 170'&gt;&#10;                &lt;rect x='34' y='74' width='102' height='80' rx='14' fill='#F3B26C' /&gt;&#10;                &lt;path&#10;                    d='M58 74 v-20 a27 27 0 0 1 54 0 v20'&#10;                    fill='none'&#10;                    stroke='#FFFFFF'&#10;                    strokeWidth='10'&#10;                    strokeLinecap='round'&#10;                /&gt;&#10;                &lt;circle cx='85' cy='108' r='10' fill='#51277C' /&gt;&#10;                &lt;rect x='81' y='114' width='8' height='20' rx='4' fill='#51277C' /&gt;&#10;                &lt;circle cx='132' cy='44' r='22' fill='none' stroke='#AFC440' strokeWidth='8' /&gt;&#10;                &lt;path d='M148 60 l16 16' stroke='#AFC440' strokeWidth='8' strokeLinecap='round' /&gt;&#10;            &lt;/svg&gt;&#10;&#10;            &lt;Text&#10;                style={{&#10;                    fontSize: 17,&#10;                    color: 'rgba(255,255,255,0.9)',&#10;                    fontFamily: 'Verdana',&#10;                    lineHeight: 1.5,&#10;                    textAlign: 'center',&#10;                }}&#10;            &gt;&#10;                Wajib masuk dulu sebelum jadwal bisa dilihat.&#10;            &lt;/Text&gt;&#10;        &lt;/Box&gt;&#10;&#10;        {/* kanan 70% · empat keterangan */}&#10;        &lt;Box style={{ width: '70%', height: '100%', justifyContent: 'space-between' }}&gt;&#10;            {[&#10;                {&#10;                    vb: '0 0 448 512',&#10;                    d: 'M224 256A128 128 0 1 0 224 0a128 128 0 1 0 0 256zm-45.7 48C79.8 304 0 383.8 0 482.3C0 498.7 13.3 512 29.7 512H418.3c16.4 0 29.7-13.3 29.7-29.7C448 383.8 368.2 304 269.7 304H178.3z',&#10;                    t: 'Akunnya dibuatkan sekolah',&#10;                    d: 'Username dan password diberikan oleh admin sekolah. Bapak/Ibu tidak perlu mendaftar sendiri.',&#10;                },&#10;                {&#10;                    vb: '0 0 640 512',&#10;                    d: 'M144 0a80 80 0 1 1 0 160A80 80 0 1 1 144 0zM512 0a80 80 0 1 1 0 160A80 80 0 1 1 512 0zM0 298.7C0 239.8 47.8 192 106.7 192h42.7c15.9 0 31 3.5 44.6 9.7c-1.3 7.2-1.9 14.7-1.9 22.3c0 38.2 16.8 72.5 43.3 96c-.2 0-.4 0-.7 0H21.3C9.6 320 0 310.4 0 298.7zM405.3 320c-.2 0-.4 0-.7 0c26.6-23.5 43.3-57.8 43.3-96c0-7.6-.7-15-1.9-22.3c13.6-6.3 28.7-9.7 44.6-9.7h42.7C592.2 192 640 239.8 640 298.7c0 11.8-9.6 21.3-21.3 21.3H405.3zM224 224a96 96 0 1 1 192 0 96 96 0 1 1 -192 0zM128 485.3C128 411.7 187.7 352 261.3 352H378.7C452.3 352 512 411.7 512 485.3c0 14.7-11.9 26.7-26.7 26.7H154.7c-14.7 0-26.7-11.9-26.7-26.7z',&#10;                    t: 'Satu akun bisa untuk beberapa anak',&#10;                    d: 'Punya dua anak di kelas berbeda? Cukup satu akun — pilih kelasnya di bagian atas layar. Anak bisa ditambah di menu Profil.',&#10;                },&#10;                {&#10;                    vb: '0 0 512 512',&#10;                    d: 'M336 352c97.2 0 176-78.8 176-176S433.2 0 336 0S160 78.8 160 176c0 18.7 2.9 36.8 8.3 53.7L7 391c-4.5 4.5-7 10.6-7 17v80c0 13.3 10.7 24 24 24h80c13.3 0 24-10.7 24-24V448h40c13.3 0 24-10.7 24-24V384h40c6.4 0 12.5-2.5 17-7l33.3-33.3c16.9 5.4 35 8.3 53.7 8.3zM376 96a40 40 0 1 1 0 80 40 40 0 1 1 0-80z',&#10;                    t: 'Password bisa diganti sendiri',&#10;                    d: 'Ada menu Profil di dalam aplikasi. Kalau lupa, minta reset kepada admin sekolah sebelum salah mencoba berulang kali.',&#10;                },&#10;                {&#10;                    vb: '0 0 448 512',&#10;                    d: 'M144 144v48H304V144c0-44.2-35.8-80-80-80s-80 35.8-80 80zM80 192V144C80 64.5 144.5 0 224 0s144 64.5 144 144v48h16c35.3 0 64 28.7 64 64V448c0 35.3-28.7 64-64 64H64c-35.3 0-64-28.7-64-64V256c0-35.3 28.7-64 64-64H80z',&#10;                    t: 'Hati-hati: 5 kali salah, akun terkunci',&#10;                    d: 'Salah password 5 kali berturut-turut mengunci akun. Tidak bisa dibuka sendiri — hubungi admin sekolah, nanti dibukakan.',&#10;                    warn: true,&#10;                },&#10;                {&#10;                    vb: '0 0 512 512',&#10;                    d: 'M256 0c4.6 0 9.2 1 13.4 2.9L457.7 82.8c22 9.3 38.4 31 38.3 57.2c-.5 99.2-41.3 280.7-213.6 363.2c-16.7 8-36.1 8-52.8 0C57.3 420.7 16.5 239.2 16 140c-.1-26.2 16.3-47.9 38.3-57.2L242.7 2.9C246.8 1 251.4 0 256 0z',&#10;                    t: 'Kenapa harus masuk?',&#10;                    d: 'Supaya jadwal dan nama anak hanya dilihat oleh orang tuanya sendiri, bukan orang lain.',&#10;                },&#10;            ].map((c, idx) =&gt; (&#10;                &lt;Box&#10;                    key={idx}&#10;                    style={{&#10;                        height: 100,&#10;                        flexDirection: 'row',&#10;                        alignItems: 'center',&#10;                        gap: 20,&#10;                        background: '#FFFFFF',&#10;                        borderRadius: 16,&#10;                        boxShadow: '0 4px 20px rgba(0,0,0,0.08)',&#10;                        paddingLeft: 24,&#10;                        paddingRight: 26,&#10;                        borderLeft: c.warn ? '8px solid #F3B26C' : '8px solid #AFC440',&#10;                    }}&#10;                &gt;&#10;                    &lt;Box&#10;                        style={{&#10;                            width: 54,&#10;                            height: 54,&#10;                            borderRadius: 27,&#10;                            background: 'rgba(81,39,124,0.10)',&#10;                            justifyContent: 'center',&#10;                            alignItems: 'center',&#10;                        }}&#10;                    &gt;&#10;                        &lt;svg width={28} height={28} viewBox={c.vb} xmlns=&quot;http://www.w3.org/2000/svg&quot;&gt;&lt;path fill=&quot;#51277C&quot; d={c.d} /&gt;&lt;/svg&gt;&#10;                    &lt;/Box&gt;&#10;                    &lt;Box style={{ flex: 1 }}&gt;&#10;                        &lt;Text&#10;                            style={{&#10;                                fontSize: 24,&#10;                                fontWeight: 'bold',&#10;                                color: '#2A2333',&#10;                                fontFamily: 'Trebuchet MS',&#10;                                lineHeight: 1.3,&#10;                            }}&#10;                        &gt;&#10;                            {c.t}&#10;                        &lt;/Text&gt;&#10;                        &lt;Text&#10;                            style={{&#10;                                marginTop: 5,&#10;                                fontSize: 18,&#10;                                color: '#6B6478',&#10;                                fontFamily: 'Verdana',&#10;                                lineHeight: 1.45,&#10;                            }}&#10;                        &gt;&#10;                            {c.d}&#10;                        &lt;/Text&gt;&#10;                    &lt;/Box&gt;&#10;                &lt;/Box&gt;&#10;            ))}&#10;        &lt;/Box&gt;&#10;    &lt;/Box&gt;&#10;&#10;    {/* ── C · bilah kaki ── */}&#10;    &lt;Box&#10;        style={{&#10;            height: 40,&#10;            flexDirection: 'row',&#10;            alignItems: 'center',&#10;            justifyContent: 'space-between',&#10;        }}&#10;    &gt;&#10;        &lt;Text style={{ fontSize: 14, color: '#6B6478', fontFamily: 'Verdana' }}&gt;&#10;            Pizza Snack Play · Panduan Orang Tua&#10;        &lt;/Text&gt;&#10;        &lt;Text style={{ fontSize: 14, color: '#6B6478', fontFamily: 'Verdana' }}&gt;08 / 16&lt;/Text&gt;&#10;    &lt;/Box&gt;&#10;&lt;/Slide&gt;&#10;"/>
         <p:cNvGrpSpPr/>
         <p:nvPr/>
       </p:nvGrpSpPr>
@@ -12122,7 +12376,7 @@
       </p:grpSpPr>
       <p:sp>
         <p:nvSpPr>
-          <p:cNvPr id="276" name=""/>
+          <p:cNvPr id="292" name=""/>
           <p:cNvSpPr/>
           <p:nvPr/>
         </p:nvSpPr>
@@ -12141,15 +12395,12 @@
         </p:spPr>
         <p:txBody>
           <a:bodyPr/>
-          <a:p>
-            <a:pPr/>
-            <a:endParaRPr/>
-          </a:p>
-        </p:txBody>
-      </p:sp>
-      <p:sp>
-        <p:nvSpPr>
-          <p:cNvPr id="277" name="" descr="{&quot;isTemplate&quot;:true,&quot;type&quot;:&quot;text&quot;}"/>
+          <a:p/>
+        </p:txBody>
+      </p:sp>
+      <p:sp>
+        <p:nvSpPr>
+          <p:cNvPr id="293" name="" descr="{&quot;isTemplate&quot;:true,&quot;type&quot;:&quot;text&quot;}"/>
           <p:cNvSpPr txBox="1"/>
           <p:nvPr/>
         </p:nvSpPr>
@@ -12184,7 +12435,7 @@
       </p:sp>
       <p:sp>
         <p:nvSpPr>
-          <p:cNvPr id="278" name=""/>
+          <p:cNvPr id="294" name=""/>
           <p:cNvSpPr/>
           <p:nvPr/>
         </p:nvSpPr>
@@ -12205,15 +12456,12 @@
         </p:spPr>
         <p:txBody>
           <a:bodyPr/>
-          <a:p>
-            <a:pPr/>
-            <a:endParaRPr/>
-          </a:p>
-        </p:txBody>
-      </p:sp>
-      <p:sp>
-        <p:nvSpPr>
-          <p:cNvPr id="279" name=""/>
+          <a:p/>
+        </p:txBody>
+      </p:sp>
+      <p:sp>
+        <p:nvSpPr>
+          <p:cNvPr id="295" name=""/>
           <p:cNvSpPr/>
           <p:nvPr/>
         </p:nvSpPr>
@@ -12242,15 +12490,12 @@
         </p:spPr>
         <p:txBody>
           <a:bodyPr/>
-          <a:p>
-            <a:pPr/>
-            <a:endParaRPr/>
-          </a:p>
-        </p:txBody>
-      </p:sp>
-      <p:sp>
-        <p:nvSpPr>
-          <p:cNvPr id="280" name="" descr="{&quot;isTemplate&quot;:true,&quot;type&quot;:&quot;text&quot;}"/>
+          <a:p/>
+        </p:txBody>
+      </p:sp>
+      <p:sp>
+        <p:nvSpPr>
+          <p:cNvPr id="296" name="" descr="{&quot;isTemplate&quot;:true,&quot;type&quot;:&quot;text&quot;}"/>
           <p:cNvSpPr txBox="1"/>
           <p:nvPr/>
         </p:nvSpPr>
@@ -12287,7 +12532,7 @@
       </p:sp>
       <p:sp>
         <p:nvSpPr>
-          <p:cNvPr id="281" name="" descr="{&quot;isTemplate&quot;:true,&quot;type&quot;:&quot;text&quot;}"/>
+          <p:cNvPr id="297" name="" descr="{&quot;isTemplate&quot;:true,&quot;type&quot;:&quot;text&quot;}"/>
           <p:cNvSpPr txBox="1"/>
           <p:nvPr/>
         </p:nvSpPr>
@@ -12322,14 +12567,14 @@
       </p:sp>
       <p:pic>
         <p:nvPicPr>
-          <p:cNvPr id="282" name=""/>
+          <p:cNvPr id="298" name=""/>
           <p:cNvPicPr>
             <a:picLocks noChangeAspect="1"/>
           </p:cNvPicPr>
           <p:nvPr/>
         </p:nvPicPr>
         <p:blipFill>
-          <a:blip r:embed="rId1">
+          <a:blip>
             <a:extLst>
               <a:ext uri="{96DAC541-7B7A-43D3-8B79-37D633B846F1}">
                 <asvg:svgBlip r:embed="rId1"/>
@@ -12353,7 +12598,7 @@
       </p:pic>
       <p:sp>
         <p:nvSpPr>
-          <p:cNvPr id="283" name="" descr="{&quot;isTemplate&quot;:true,&quot;type&quot;:&quot;text&quot;}"/>
+          <p:cNvPr id="299" name="" descr="{&quot;isTemplate&quot;:true,&quot;type&quot;:&quot;text&quot;}"/>
           <p:cNvSpPr txBox="1"/>
           <p:nvPr/>
         </p:nvSpPr>
@@ -12392,7 +12637,7 @@
       </p:sp>
       <p:sp>
         <p:nvSpPr>
-          <p:cNvPr id="284" name=""/>
+          <p:cNvPr id="300" name=""/>
           <p:cNvSpPr/>
           <p:nvPr/>
         </p:nvSpPr>
@@ -12420,15 +12665,12 @@
         </p:spPr>
         <p:txBody>
           <a:bodyPr/>
-          <a:p>
-            <a:pPr/>
-            <a:endParaRPr/>
-          </a:p>
-        </p:txBody>
-      </p:sp>
-      <p:sp>
-        <p:nvSpPr>
-          <p:cNvPr id="285" name=""/>
+          <a:p/>
+        </p:txBody>
+      </p:sp>
+      <p:sp>
+        <p:nvSpPr>
+          <p:cNvPr id="301" name=""/>
           <p:cNvSpPr/>
           <p:nvPr/>
         </p:nvSpPr>
@@ -12480,15 +12722,12 @@
         </p:spPr>
         <p:txBody>
           <a:bodyPr/>
-          <a:p>
-            <a:pPr/>
-            <a:endParaRPr/>
-          </a:p>
-        </p:txBody>
-      </p:sp>
-      <p:sp>
-        <p:nvSpPr>
-          <p:cNvPr id="286" name=""/>
+          <a:p/>
+        </p:txBody>
+      </p:sp>
+      <p:sp>
+        <p:nvSpPr>
+          <p:cNvPr id="302" name=""/>
           <p:cNvSpPr/>
           <p:nvPr/>
         </p:nvSpPr>
@@ -12511,22 +12750,19 @@
         </p:spPr>
         <p:txBody>
           <a:bodyPr/>
-          <a:p>
-            <a:pPr/>
-            <a:endParaRPr/>
-          </a:p>
+          <a:p/>
         </p:txBody>
       </p:sp>
       <p:pic>
         <p:nvPicPr>
-          <p:cNvPr id="287" name=""/>
+          <p:cNvPr id="303" name=""/>
           <p:cNvPicPr>
             <a:picLocks noChangeAspect="1"/>
           </p:cNvPicPr>
           <p:nvPr/>
         </p:nvPicPr>
         <p:blipFill>
-          <a:blip r:embed="rId2">
+          <a:blip>
             <a:extLst>
               <a:ext uri="{96DAC541-7B7A-43D3-8B79-37D633B846F1}">
                 <asvg:svgBlip r:embed="rId2"/>
@@ -12550,7 +12786,7 @@
       </p:pic>
       <p:sp>
         <p:nvSpPr>
-          <p:cNvPr id="288" name="" descr="{&quot;isTemplate&quot;:true,&quot;type&quot;:&quot;text&quot;}"/>
+          <p:cNvPr id="304" name="" descr="{&quot;isTemplate&quot;:true,&quot;type&quot;:&quot;text&quot;}"/>
           <p:cNvSpPr txBox="1"/>
           <p:nvPr/>
         </p:nvSpPr>
@@ -12585,7 +12821,7 @@
       </p:sp>
       <p:sp>
         <p:nvSpPr>
-          <p:cNvPr id="289" name="" descr="{&quot;isTemplate&quot;:true,&quot;type&quot;:&quot;text&quot;}"/>
+          <p:cNvPr id="305" name="" descr="{&quot;isTemplate&quot;:true,&quot;type&quot;:&quot;text&quot;}"/>
           <p:cNvSpPr txBox="1"/>
           <p:nvPr/>
         </p:nvSpPr>
@@ -12622,7 +12858,7 @@
       </p:sp>
       <p:sp>
         <p:nvSpPr>
-          <p:cNvPr id="290" name=""/>
+          <p:cNvPr id="306" name=""/>
           <p:cNvSpPr/>
           <p:nvPr/>
         </p:nvSpPr>
@@ -12650,15 +12886,12 @@
         </p:spPr>
         <p:txBody>
           <a:bodyPr/>
-          <a:p>
-            <a:pPr/>
-            <a:endParaRPr/>
-          </a:p>
-        </p:txBody>
-      </p:sp>
-      <p:sp>
-        <p:nvSpPr>
-          <p:cNvPr id="291" name=""/>
+          <a:p/>
+        </p:txBody>
+      </p:sp>
+      <p:sp>
+        <p:nvSpPr>
+          <p:cNvPr id="307" name=""/>
           <p:cNvSpPr/>
           <p:nvPr/>
         </p:nvSpPr>
@@ -12710,15 +12943,12 @@
         </p:spPr>
         <p:txBody>
           <a:bodyPr/>
-          <a:p>
-            <a:pPr/>
-            <a:endParaRPr/>
-          </a:p>
-        </p:txBody>
-      </p:sp>
-      <p:sp>
-        <p:nvSpPr>
-          <p:cNvPr id="292" name=""/>
+          <a:p/>
+        </p:txBody>
+      </p:sp>
+      <p:sp>
+        <p:nvSpPr>
+          <p:cNvPr id="308" name=""/>
           <p:cNvSpPr/>
           <p:nvPr/>
         </p:nvSpPr>
@@ -12741,22 +12971,19 @@
         </p:spPr>
         <p:txBody>
           <a:bodyPr/>
-          <a:p>
-            <a:pPr/>
-            <a:endParaRPr/>
-          </a:p>
+          <a:p/>
         </p:txBody>
       </p:sp>
       <p:pic>
         <p:nvPicPr>
-          <p:cNvPr id="293" name=""/>
+          <p:cNvPr id="309" name=""/>
           <p:cNvPicPr>
             <a:picLocks noChangeAspect="1"/>
           </p:cNvPicPr>
           <p:nvPr/>
         </p:nvPicPr>
         <p:blipFill>
-          <a:blip r:embed="rId3">
+          <a:blip>
             <a:extLst>
               <a:ext uri="{96DAC541-7B7A-43D3-8B79-37D633B846F1}">
                 <asvg:svgBlip r:embed="rId3"/>
@@ -12780,7 +13007,7 @@
       </p:pic>
       <p:sp>
         <p:nvSpPr>
-          <p:cNvPr id="294" name="" descr="{&quot;isTemplate&quot;:true,&quot;type&quot;:&quot;text&quot;}"/>
+          <p:cNvPr id="310" name="" descr="{&quot;isTemplate&quot;:true,&quot;type&quot;:&quot;text&quot;}"/>
           <p:cNvSpPr txBox="1"/>
           <p:nvPr/>
         </p:nvSpPr>
@@ -12815,7 +13042,7 @@
       </p:sp>
       <p:sp>
         <p:nvSpPr>
-          <p:cNvPr id="295" name="" descr="{&quot;isTemplate&quot;:true,&quot;type&quot;:&quot;text&quot;}"/>
+          <p:cNvPr id="311" name="" descr="{&quot;isTemplate&quot;:true,&quot;type&quot;:&quot;text&quot;}"/>
           <p:cNvSpPr txBox="1"/>
           <p:nvPr/>
         </p:nvSpPr>
@@ -12852,7 +13079,7 @@
       </p:sp>
       <p:sp>
         <p:nvSpPr>
-          <p:cNvPr id="296" name=""/>
+          <p:cNvPr id="312" name=""/>
           <p:cNvSpPr/>
           <p:nvPr/>
         </p:nvSpPr>
@@ -12880,15 +13107,12 @@
         </p:spPr>
         <p:txBody>
           <a:bodyPr/>
-          <a:p>
-            <a:pPr/>
-            <a:endParaRPr/>
-          </a:p>
-        </p:txBody>
-      </p:sp>
-      <p:sp>
-        <p:nvSpPr>
-          <p:cNvPr id="297" name=""/>
+          <a:p/>
+        </p:txBody>
+      </p:sp>
+      <p:sp>
+        <p:nvSpPr>
+          <p:cNvPr id="313" name=""/>
           <p:cNvSpPr/>
           <p:nvPr/>
         </p:nvSpPr>
@@ -12940,15 +13164,12 @@
         </p:spPr>
         <p:txBody>
           <a:bodyPr/>
-          <a:p>
-            <a:pPr/>
-            <a:endParaRPr/>
-          </a:p>
-        </p:txBody>
-      </p:sp>
-      <p:sp>
-        <p:nvSpPr>
-          <p:cNvPr id="298" name=""/>
+          <a:p/>
+        </p:txBody>
+      </p:sp>
+      <p:sp>
+        <p:nvSpPr>
+          <p:cNvPr id="314" name=""/>
           <p:cNvSpPr/>
           <p:nvPr/>
         </p:nvSpPr>
@@ -12971,22 +13192,19 @@
         </p:spPr>
         <p:txBody>
           <a:bodyPr/>
-          <a:p>
-            <a:pPr/>
-            <a:endParaRPr/>
-          </a:p>
+          <a:p/>
         </p:txBody>
       </p:sp>
       <p:pic>
         <p:nvPicPr>
-          <p:cNvPr id="299" name=""/>
+          <p:cNvPr id="315" name=""/>
           <p:cNvPicPr>
             <a:picLocks noChangeAspect="1"/>
           </p:cNvPicPr>
           <p:nvPr/>
         </p:nvPicPr>
         <p:blipFill>
-          <a:blip r:embed="rId4">
+          <a:blip>
             <a:extLst>
               <a:ext uri="{96DAC541-7B7A-43D3-8B79-37D633B846F1}">
                 <asvg:svgBlip r:embed="rId4"/>
@@ -13010,7 +13228,7 @@
       </p:pic>
       <p:sp>
         <p:nvSpPr>
-          <p:cNvPr id="300" name="" descr="{&quot;isTemplate&quot;:true,&quot;type&quot;:&quot;text&quot;}"/>
+          <p:cNvPr id="316" name="" descr="{&quot;isTemplate&quot;:true,&quot;type&quot;:&quot;text&quot;}"/>
           <p:cNvSpPr txBox="1"/>
           <p:nvPr/>
         </p:nvSpPr>
@@ -13045,7 +13263,7 @@
       </p:sp>
       <p:sp>
         <p:nvSpPr>
-          <p:cNvPr id="301" name="" descr="{&quot;isTemplate&quot;:true,&quot;type&quot;:&quot;text&quot;}"/>
+          <p:cNvPr id="317" name="" descr="{&quot;isTemplate&quot;:true,&quot;type&quot;:&quot;text&quot;}"/>
           <p:cNvSpPr txBox="1"/>
           <p:nvPr/>
         </p:nvSpPr>
@@ -13082,7 +13300,7 @@
       </p:sp>
       <p:sp>
         <p:nvSpPr>
-          <p:cNvPr id="302" name=""/>
+          <p:cNvPr id="318" name=""/>
           <p:cNvSpPr/>
           <p:nvPr/>
         </p:nvSpPr>
@@ -13110,15 +13328,12 @@
         </p:spPr>
         <p:txBody>
           <a:bodyPr/>
-          <a:p>
-            <a:pPr/>
-            <a:endParaRPr/>
-          </a:p>
-        </p:txBody>
-      </p:sp>
-      <p:sp>
-        <p:nvSpPr>
-          <p:cNvPr id="303" name=""/>
+          <a:p/>
+        </p:txBody>
+      </p:sp>
+      <p:sp>
+        <p:nvSpPr>
+          <p:cNvPr id="319" name=""/>
           <p:cNvSpPr/>
           <p:nvPr/>
         </p:nvSpPr>
@@ -13170,15 +13385,12 @@
         </p:spPr>
         <p:txBody>
           <a:bodyPr/>
-          <a:p>
-            <a:pPr/>
-            <a:endParaRPr/>
-          </a:p>
-        </p:txBody>
-      </p:sp>
-      <p:sp>
-        <p:nvSpPr>
-          <p:cNvPr id="304" name=""/>
+          <a:p/>
+        </p:txBody>
+      </p:sp>
+      <p:sp>
+        <p:nvSpPr>
+          <p:cNvPr id="320" name=""/>
           <p:cNvSpPr/>
           <p:nvPr/>
         </p:nvSpPr>
@@ -13201,22 +13413,19 @@
         </p:spPr>
         <p:txBody>
           <a:bodyPr/>
-          <a:p>
-            <a:pPr/>
-            <a:endParaRPr/>
-          </a:p>
+          <a:p/>
         </p:txBody>
       </p:sp>
       <p:pic>
         <p:nvPicPr>
-          <p:cNvPr id="305" name=""/>
+          <p:cNvPr id="321" name=""/>
           <p:cNvPicPr>
             <a:picLocks noChangeAspect="1"/>
           </p:cNvPicPr>
           <p:nvPr/>
         </p:nvPicPr>
         <p:blipFill>
-          <a:blip r:embed="rId5">
+          <a:blip>
             <a:extLst>
               <a:ext uri="{96DAC541-7B7A-43D3-8B79-37D633B846F1}">
                 <asvg:svgBlip r:embed="rId5"/>
@@ -13240,7 +13449,7 @@
       </p:pic>
       <p:sp>
         <p:nvSpPr>
-          <p:cNvPr id="306" name="" descr="{&quot;isTemplate&quot;:true,&quot;type&quot;:&quot;text&quot;}"/>
+          <p:cNvPr id="322" name="" descr="{&quot;isTemplate&quot;:true,&quot;type&quot;:&quot;text&quot;}"/>
           <p:cNvSpPr txBox="1"/>
           <p:nvPr/>
         </p:nvSpPr>
@@ -13275,7 +13484,7 @@
       </p:sp>
       <p:sp>
         <p:nvSpPr>
-          <p:cNvPr id="307" name="" descr="{&quot;isTemplate&quot;:true,&quot;type&quot;:&quot;text&quot;}"/>
+          <p:cNvPr id="323" name="" descr="{&quot;isTemplate&quot;:true,&quot;type&quot;:&quot;text&quot;}"/>
           <p:cNvSpPr txBox="1"/>
           <p:nvPr/>
         </p:nvSpPr>
@@ -13312,7 +13521,7 @@
       </p:sp>
       <p:sp>
         <p:nvSpPr>
-          <p:cNvPr id="308" name=""/>
+          <p:cNvPr id="324" name=""/>
           <p:cNvSpPr/>
           <p:nvPr/>
         </p:nvSpPr>
@@ -13340,15 +13549,12 @@
         </p:spPr>
         <p:txBody>
           <a:bodyPr/>
-          <a:p>
-            <a:pPr/>
-            <a:endParaRPr/>
-          </a:p>
-        </p:txBody>
-      </p:sp>
-      <p:sp>
-        <p:nvSpPr>
-          <p:cNvPr id="309" name=""/>
+          <a:p/>
+        </p:txBody>
+      </p:sp>
+      <p:sp>
+        <p:nvSpPr>
+          <p:cNvPr id="325" name=""/>
           <p:cNvSpPr/>
           <p:nvPr/>
         </p:nvSpPr>
@@ -13400,15 +13606,12 @@
         </p:spPr>
         <p:txBody>
           <a:bodyPr/>
-          <a:p>
-            <a:pPr/>
-            <a:endParaRPr/>
-          </a:p>
-        </p:txBody>
-      </p:sp>
-      <p:sp>
-        <p:nvSpPr>
-          <p:cNvPr id="310" name=""/>
+          <a:p/>
+        </p:txBody>
+      </p:sp>
+      <p:sp>
+        <p:nvSpPr>
+          <p:cNvPr id="326" name=""/>
           <p:cNvSpPr/>
           <p:nvPr/>
         </p:nvSpPr>
@@ -13431,22 +13634,19 @@
         </p:spPr>
         <p:txBody>
           <a:bodyPr/>
-          <a:p>
-            <a:pPr/>
-            <a:endParaRPr/>
-          </a:p>
+          <a:p/>
         </p:txBody>
       </p:sp>
       <p:pic>
         <p:nvPicPr>
-          <p:cNvPr id="311" name=""/>
+          <p:cNvPr id="327" name=""/>
           <p:cNvPicPr>
             <a:picLocks noChangeAspect="1"/>
           </p:cNvPicPr>
           <p:nvPr/>
         </p:nvPicPr>
         <p:blipFill>
-          <a:blip r:embed="rId6">
+          <a:blip>
             <a:extLst>
               <a:ext uri="{96DAC541-7B7A-43D3-8B79-37D633B846F1}">
                 <asvg:svgBlip r:embed="rId6"/>
@@ -13470,7 +13670,7 @@
       </p:pic>
       <p:sp>
         <p:nvSpPr>
-          <p:cNvPr id="312" name="" descr="{&quot;isTemplate&quot;:true,&quot;type&quot;:&quot;text&quot;}"/>
+          <p:cNvPr id="328" name="" descr="{&quot;isTemplate&quot;:true,&quot;type&quot;:&quot;text&quot;}"/>
           <p:cNvSpPr txBox="1"/>
           <p:nvPr/>
         </p:nvSpPr>
@@ -13505,7 +13705,7 @@
       </p:sp>
       <p:sp>
         <p:nvSpPr>
-          <p:cNvPr id="313" name="" descr="{&quot;isTemplate&quot;:true,&quot;type&quot;:&quot;text&quot;}"/>
+          <p:cNvPr id="329" name="" descr="{&quot;isTemplate&quot;:true,&quot;type&quot;:&quot;text&quot;}"/>
           <p:cNvSpPr txBox="1"/>
           <p:nvPr/>
         </p:nvSpPr>
@@ -13542,7 +13742,7 @@
       </p:sp>
       <p:sp>
         <p:nvSpPr>
-          <p:cNvPr id="314" name="" descr="{&quot;isTemplate&quot;:true,&quot;type&quot;:&quot;text&quot;}"/>
+          <p:cNvPr id="330" name="" descr="{&quot;isTemplate&quot;:true,&quot;type&quot;:&quot;text&quot;}"/>
           <p:cNvSpPr txBox="1"/>
           <p:nvPr/>
         </p:nvSpPr>
@@ -13577,7 +13777,7 @@
       </p:sp>
       <p:sp>
         <p:nvSpPr>
-          <p:cNvPr id="315" name="" descr="{&quot;isTemplate&quot;:true,&quot;type&quot;:&quot;text&quot;}"/>
+          <p:cNvPr id="331" name="" descr="{&quot;isTemplate&quot;:true,&quot;type&quot;:&quot;text&quot;}"/>
           <p:cNvSpPr txBox="1"/>
           <p:nvPr/>
         </p:nvSpPr>
@@ -13604,7 +13804,7 @@
                 <a:latin typeface="Verdana"/>
                 <a:ea typeface="Verdana"/>
               </a:rPr>
-              <a:t>08 / 15</a:t>
+              <a:t>08 / 16</a:t>
             </a:r>
             <a:endParaRPr/>
           </a:p>
@@ -13620,7 +13820,7 @@
   <p:cSld>
     <p:spTree>
       <p:nvGrpSpPr>
-        <p:cNvPr id="316" name=""/>
+        <p:cNvPr id="332" name="" descr="&lt;Slide&#10;    style={{&#10;        width: '1280px',&#10;        height: '720px',&#10;        background: 'linear-gradient(135deg, #51277C 0%, #7A45A8 100%)',&#10;        paddingTop: 60,&#10;        paddingBottom: 60,&#10;        paddingLeft: 72,&#10;        paddingRight: 72,&#10;        justifyContent: 'center',&#10;        position: 'relative',&#10;        overflow: 'hidden',&#10;    }}&#10;&gt;&#10;    {/* dekorasi: kalender + centang */}&#10;    &lt;Box&#10;        style={{&#10;            position: 'absolute',&#10;            top: -110,&#10;            right: 140,&#10;            width: 380,&#10;            height: 380,&#10;            borderRadius: 190,&#10;            background: '#F3B26C',&#10;            opacity: 0.16,&#10;        }}&#10;    /&gt;&#10;    &lt;Box style={{ position: 'absolute', bottom: 62, right: 84, opacity: 0.20 }}&gt;&#10;        &lt;svg width={250} height={210} viewBox='0 0 250 210'&gt;&#10;            &lt;rect x='14' y='30' width='222' height='166' rx='18' fill='none' stroke='#FFFFFF' strokeWidth='6' /&gt;&#10;            &lt;path d='M14 74 h222' stroke='#FFFFFF' strokeWidth='6' /&gt;&#10;            &lt;path d='M64 10 v34M186 10 v34' stroke='#FFFFFF' strokeWidth='8' strokeLinecap='round' /&gt;&#10;            &lt;path d='M52 152 l30 32 l66 -74' fill='none' stroke='#AFC440' strokeWidth='14' strokeLinecap='round' strokeLinejoin='round' /&gt;&#10;        &lt;/svg&gt;&#10;    &lt;/Box&gt;&#10;&#10;    {/* isi */}&#10;    &lt;Box style={{ position: 'relative', zIndex: 1, width: '62%' }}&gt;&#10;        &lt;Box style={{ flexDirection: 'row', alignItems: 'center', gap: 14, alignSelf: 'flex-start' }}&gt;&#10;            &lt;Text&#10;                style={{&#10;                    fontSize: 76,&#10;                    fontWeight: 'bold',&#10;                    color: '#F3B26C',&#10;                    fontFamily: 'Trebuchet MS',&#10;                    lineHeight: 1,&#10;                }}&#10;            &gt;&#10;                03&#10;            &lt;/Text&gt;&#10;            &lt;Box style={{ width: 3, height: 52, background: 'rgba(255,255,255,0.45)' }} /&gt;&#10;            &lt;Text style={{ fontSize: 19, color: 'rgba(255,255,255,0.8)', fontFamily: 'Verdana' }}&gt;&#10;                Bagian ketiga&#10;            &lt;/Text&gt;&#10;        &lt;/Box&gt;&#10;&#10;        &lt;Text&#10;            style={{&#10;                marginTop: 26,&#10;                fontSize: 60,&#10;                fontWeight: 'bold',&#10;                color: '#FFFFFF',&#10;                fontFamily: 'Trebuchet MS',&#10;                lineHeight: 1.15,&#10;            }}&#10;        &gt;&#10;            Dipakai{'\n'}tiap hari&#10;        &lt;/Text&gt;&#10;&#10;        &lt;Text&#10;            style={{&#10;                marginTop: 24,&#10;                fontSize: 22,&#10;                color: 'rgba(255,255,255,0.88)',&#10;                fontFamily: 'Verdana',&#10;                lineHeight: 1.5,&#10;            }}&#10;        &gt;&#10;            Tiga hal yang paling sering dibuka orang tua.&#10;        &lt;/Text&gt;&#10;    &lt;/Box&gt;&#10;&lt;/Slide&gt;&#10;"/>
         <p:cNvGrpSpPr/>
         <p:nvPr/>
       </p:nvGrpSpPr>
@@ -13634,7 +13834,7 @@
       </p:grpSpPr>
       <p:sp>
         <p:nvSpPr>
-          <p:cNvPr id="317" name=""/>
+          <p:cNvPr id="333" name=""/>
           <p:cNvSpPr/>
           <p:nvPr/>
         </p:nvSpPr>
@@ -13661,15 +13861,12 @@
         </p:spPr>
         <p:txBody>
           <a:bodyPr/>
-          <a:p>
-            <a:pPr/>
-            <a:endParaRPr/>
-          </a:p>
-        </p:txBody>
-      </p:sp>
-      <p:sp>
-        <p:nvSpPr>
-          <p:cNvPr id="318" name=""/>
+          <a:p/>
+        </p:txBody>
+      </p:sp>
+      <p:sp>
+        <p:nvSpPr>
+          <p:cNvPr id="334" name=""/>
           <p:cNvSpPr/>
           <p:nvPr/>
         </p:nvSpPr>
@@ -13715,22 +13912,19 @@
         </p:spPr>
         <p:txBody>
           <a:bodyPr/>
-          <a:p>
-            <a:pPr/>
-            <a:endParaRPr/>
-          </a:p>
+          <a:p/>
         </p:txBody>
       </p:sp>
       <p:pic>
         <p:nvPicPr>
-          <p:cNvPr id="319" name=""/>
+          <p:cNvPr id="335" name=""/>
           <p:cNvPicPr>
             <a:picLocks noChangeAspect="1"/>
           </p:cNvPicPr>
           <p:nvPr/>
         </p:nvPicPr>
         <p:blipFill>
-          <a:blip r:embed="rId1">
+          <a:blip>
             <a:alphaModFix amt="20000"/>
             <a:extLst>
               <a:ext uri="{96DAC541-7B7A-43D3-8B79-37D633B846F1}">
@@ -13755,7 +13949,7 @@
       </p:pic>
       <p:sp>
         <p:nvSpPr>
-          <p:cNvPr id="320" name="" descr="{&quot;isTemplate&quot;:true,&quot;type&quot;:&quot;text&quot;}"/>
+          <p:cNvPr id="336" name="" descr="{&quot;isTemplate&quot;:true,&quot;type&quot;:&quot;text&quot;}"/>
           <p:cNvSpPr txBox="1"/>
           <p:nvPr/>
         </p:nvSpPr>
@@ -13790,7 +13984,7 @@
       </p:sp>
       <p:sp>
         <p:nvSpPr>
-          <p:cNvPr id="321" name=""/>
+          <p:cNvPr id="337" name=""/>
           <p:cNvSpPr/>
           <p:nvPr/>
         </p:nvSpPr>
@@ -13811,15 +14005,12 @@
         </p:spPr>
         <p:txBody>
           <a:bodyPr/>
-          <a:p>
-            <a:pPr/>
-            <a:endParaRPr/>
-          </a:p>
-        </p:txBody>
-      </p:sp>
-      <p:sp>
-        <p:nvSpPr>
-          <p:cNvPr id="322" name="" descr="{&quot;isTemplate&quot;:true,&quot;type&quot;:&quot;text&quot;}"/>
+          <a:p/>
+        </p:txBody>
+      </p:sp>
+      <p:sp>
+        <p:nvSpPr>
+          <p:cNvPr id="338" name="" descr="{&quot;isTemplate&quot;:true,&quot;type&quot;:&quot;text&quot;}"/>
           <p:cNvSpPr txBox="1"/>
           <p:nvPr/>
         </p:nvSpPr>
@@ -13856,7 +14047,7 @@
       </p:sp>
       <p:sp>
         <p:nvSpPr>
-          <p:cNvPr id="323" name="" descr="{&quot;isTemplate&quot;:true,&quot;type&quot;:&quot;text&quot;}"/>
+          <p:cNvPr id="339" name="" descr="{&quot;isTemplate&quot;:true,&quot;type&quot;:&quot;text&quot;}"/>
           <p:cNvSpPr txBox="1"/>
           <p:nvPr/>
         </p:nvSpPr>
@@ -13909,7 +14100,7 @@
       </p:sp>
       <p:sp>
         <p:nvSpPr>
-          <p:cNvPr id="324" name="" descr="{&quot;isTemplate&quot;:true,&quot;type&quot;:&quot;text&quot;}"/>
+          <p:cNvPr id="340" name="" descr="{&quot;isTemplate&quot;:true,&quot;type&quot;:&quot;text&quot;}"/>
           <p:cNvSpPr txBox="1"/>
           <p:nvPr/>
         </p:nvSpPr>
